--- a/_implementation-notes/evening-series/FotH Evening Session 18 Slides DRAFT v1.pptx
+++ b/_implementation-notes/evening-series/FotH Evening Session 18 Slides DRAFT v1.pptx
@@ -10,13 +10,15 @@
   <p:sldIdLst>
     <p:sldId id="256" r:id="rId2"/>
     <p:sldId id="313" r:id="rId221"/>
+    <p:sldId id="542" r:id="rId21"/>
     <p:sldId id="314" r:id="rId222"/>
     <p:sldId id="475" r:id="rId223"/>
     <p:sldId id="476" r:id="rId224"/>
     <p:sldId id="477" r:id="rId225"/>
     <p:sldId id="478" r:id="rId226"/>
     <p:sldId id="479" r:id="rId227"/>
-    <p:sldId id="541" r:id="rId228"/>
+    <p:sldId id="543" r:id="rId22"/>
+    <p:sldId id="544" r:id="rId23"/>
     <p:sldId id="480" r:id="rId229"/>
     <p:sldId id="481" r:id="rId230"/>
     <p:sldId id="482" r:id="rId231"/>
@@ -749,6 +751,214 @@
 </p:notes>
 </file>
 
+<file path=ppt/notesSlides/notesSlide13.xml><?xml version="1.0" encoding="utf-8"?>
+<p:notes xmlns:a="http://schemas.openxmlformats.org/drawingml/2006/main" xmlns:p="http://schemas.openxmlformats.org/presentationml/2006/main" xmlns:r="http://schemas.openxmlformats.org/officeDocument/2006/relationships">
+  <p:cSld>
+    <p:spTree>
+      <p:nvGrpSpPr>
+        <p:cNvPr id="1" name=""/>
+        <p:cNvGrpSpPr/>
+        <p:nvPr/>
+      </p:nvGrpSpPr>
+      <p:grpSpPr>
+        <a:xfrm>
+          <a:off x="0" y="0"/>
+          <a:ext cx="0" cy="0"/>
+          <a:chOff x="0" y="0"/>
+          <a:chExt cx="0" cy="0"/>
+        </a:xfrm>
+      </p:grpSpPr>
+      <p:sp>
+        <p:nvSpPr>
+          <p:cNvPr id="2" name="Notes Placeholder 1"/>
+          <p:cNvSpPr>
+            <a:spLocks noGrp="1"/>
+          </p:cNvSpPr>
+          <p:nvPr>
+            <p:ph type="body" idx="1"/>
+          </p:nvPr>
+        </p:nvSpPr>
+        <p:spPr/>
+        <p:txBody>
+          <a:bodyPr/>
+          <a:lstStyle/>
+          <a:p>
+            <a:r>
+              <a:t>S18 · WELCOME · LEAD: CONTAINER HOLDER · GROUNDING — every session opens on this map</a:t>
+            </a:r>
+          </a:p>
+          <a:p>
+            <a:r>
+              <a:t>BEATS:</a:t>
+            </a:r>
+          </a:p>
+          <a:p>
+            <a:r>
+              <a:t>1. Locate tonight on the map, plainly: Session 18 returns to the whole map — all four Connects, for the final stretch. Each connection makes the next one real (Matt. 22:37–40).</a:t>
+            </a:r>
+          </a:p>
+          <a:p>
+            <a:r>
+              <a:t>2. The four boxes are one journey — each connection makes the next one real — rooted in the two great commandments: love God, love neighbor (Matt 22:37–40).</a:t>
+            </a:r>
+          </a:p>
+          <a:p>
+            <a:r>
+              <a:t>3. This is also the 'where we are on the map' minute the welcome owes any newcomer.</a:t>
+            </a:r>
+          </a:p>
+          <a:p>
+            <a:r>
+              <a:t>CUES: Two minutes at most; then tonight's road.</a:t>
+            </a:r>
+          </a:p>
+        </p:txBody>
+      </p:sp>
+    </p:spTree>
+  </p:cSld>
+  <p:clrMapOvr>
+    <a:masterClrMapping/>
+  </p:clrMapOvr>
+</p:notes>
+</file>
+
+<file path=ppt/notesSlides/notesSlide14.xml><?xml version="1.0" encoding="utf-8"?>
+<p:notes xmlns:a="http://schemas.openxmlformats.org/drawingml/2006/main" xmlns:p="http://schemas.openxmlformats.org/presentationml/2006/main" xmlns:r="http://schemas.openxmlformats.org/officeDocument/2006/relationships">
+  <p:cSld>
+    <p:spTree>
+      <p:nvGrpSpPr>
+        <p:cNvPr id="1" name=""/>
+        <p:cNvGrpSpPr/>
+        <p:nvPr/>
+      </p:nvGrpSpPr>
+      <p:grpSpPr>
+        <a:xfrm>
+          <a:off x="0" y="0"/>
+          <a:ext cx="0" cy="0"/>
+          <a:chOff x="0" y="0"/>
+          <a:chExt cx="0" cy="0"/>
+        </a:xfrm>
+      </p:grpSpPr>
+      <p:sp>
+        <p:nvSpPr>
+          <p:cNvPr id="2" name="Notes Placeholder 1"/>
+          <p:cNvSpPr>
+            <a:spLocks noGrp="1"/>
+          </p:cNvSpPr>
+          <p:nvPr>
+            <p:ph type="body" idx="1"/>
+          </p:nvPr>
+        </p:nvSpPr>
+        <p:spPr/>
+        <p:txBody>
+          <a:bodyPr/>
+          <a:lstStyle/>
+          <a:p>
+            <a:r>
+              <a:t>S18 · COMMISSIONING · LEAD: CONTENT PRESENTER</a:t>
+            </a:r>
+          </a:p>
+          <a:p>
+            <a:r>
+              <a:t>BEATS:</a:t>
+            </a:r>
+          </a:p>
+          <a:p>
+            <a:r>
+              <a:t>1. The sheet on the screen is the sheet in their hands — walk it, don't read it.</a:t>
+            </a:r>
+          </a:p>
+          <a:p>
+            <a:r>
+              <a:t>2. The standing rhythm first: the morning question, the evening journal line — one box per day on the week-grids.</a:t>
+            </a:r>
+          </a:p>
+          <a:p>
+            <a:r>
+              <a:t>3. A missed box is never a failure — it is an invitation to return.</a:t>
+            </a:r>
+          </a:p>
+          <a:p>
+            <a:r>
+              <a:t>CUES: The four parts are the next slide.</a:t>
+            </a:r>
+          </a:p>
+        </p:txBody>
+      </p:sp>
+    </p:spTree>
+  </p:cSld>
+  <p:clrMapOvr>
+    <a:masterClrMapping/>
+  </p:clrMapOvr>
+</p:notes>
+</file>
+
+<file path=ppt/notesSlides/notesSlide15.xml><?xml version="1.0" encoding="utf-8"?>
+<p:notes xmlns:a="http://schemas.openxmlformats.org/drawingml/2006/main" xmlns:p="http://schemas.openxmlformats.org/presentationml/2006/main" xmlns:r="http://schemas.openxmlformats.org/officeDocument/2006/relationships">
+  <p:cSld>
+    <p:spTree>
+      <p:nvGrpSpPr>
+        <p:cNvPr id="1" name=""/>
+        <p:cNvGrpSpPr/>
+        <p:nvPr/>
+      </p:nvGrpSpPr>
+      <p:grpSpPr>
+        <a:xfrm>
+          <a:off x="0" y="0"/>
+          <a:ext cx="0" cy="0"/>
+          <a:chOff x="0" y="0"/>
+          <a:chExt cx="0" cy="0"/>
+        </a:xfrm>
+      </p:grpSpPr>
+      <p:sp>
+        <p:nvSpPr>
+          <p:cNvPr id="2" name="Notes Placeholder 1"/>
+          <p:cNvSpPr>
+            <a:spLocks noGrp="1"/>
+          </p:cNvSpPr>
+          <p:nvPr>
+            <p:ph type="body" idx="1"/>
+          </p:nvPr>
+        </p:nvSpPr>
+        <p:spPr/>
+        <p:txBody>
+          <a:bodyPr/>
+          <a:lstStyle/>
+          <a:p>
+            <a:r>
+              <a:t>S18 · COMMISSIONING · LEAD: CONTENT PRESENTER</a:t>
+            </a:r>
+          </a:p>
+          <a:p>
+            <a:r>
+              <a:t>BEATS:</a:t>
+            </a:r>
+          </a:p>
+          <a:p>
+            <a:r>
+              <a:t>1. The four parts, in order: the homework practice, week one; the end-of-week-one check-in; the homework practice, week two; one sentence of preparation.</a:t>
+            </a:r>
+          </a:p>
+          <a:p>
+            <a:r>
+              <a:t>2. Check-in partners are named aloud before leaving this slide — the sheet has the line to write the name.</a:t>
+            </a:r>
+          </a:p>
+          <a:p>
+            <a:r>
+              <a:t>GUARD: The sheet-walk, not a re-teach.</a:t>
+            </a:r>
+          </a:p>
+        </p:txBody>
+      </p:sp>
+    </p:spTree>
+  </p:cSld>
+  <p:clrMapOvr>
+    <a:masterClrMapping/>
+  </p:clrMapOvr>
+</p:notes>
+</file>
+
 <file path=ppt/notesSlides/notesSlide218.xml><?xml version="1.0" encoding="utf-8"?>
 <p:notes xmlns:a="http://schemas.openxmlformats.org/drawingml/2006/main" xmlns:r="http://schemas.openxmlformats.org/officeDocument/2006/relationships" xmlns:p="http://schemas.openxmlformats.org/presentationml/2006/main">
   <p:cSld>
@@ -912,44 +1122,42 @@
           <a:lstStyle/>
           <a:p>
             <a:r>
-              <a:rPr lang="en-US" sz="1200"/>
               <a:t>S18 · 7:00–7:08 · LEAD: CONTAINER HOLDER CIRCLE</a:t>
             </a:r>
           </a:p>
           <a:p>
             <a:r>
-              <a:rPr lang="en-US" sz="1200"/>
               <a:t>BEATS:</a:t>
             </a:r>
           </a:p>
           <a:p>
             <a:r>
-              <a:rPr lang="en-US" sz="1200"/>
               <a:t>1. The Companion-in-Formation runs the full eight steps from memory, normal pace — nothing changes because a teen holds it; that is the point.</a:t>
             </a:r>
           </a:p>
           <a:p>
             <a:r>
-              <a:rPr lang="en-US" sz="1200"/>
               <a:t>2. Sit where the teen can find your eyes; otherwise stay out of the way.</a:t>
             </a:r>
           </a:p>
           <a:p>
             <a:r>
-              <a:rPr lang="en-US" sz="1200"/>
               <a:t>3. Receive every check-in word; the adults read them as closely as ever.</a:t>
             </a:r>
           </a:p>
           <a:p>
             <a:r>
-              <a:rPr lang="en-US" sz="1200"/>
               <a:t>CUES: Timing Companion starts discreetly at 7:00 and notes the minute the room is truly present — expect it fast; the speed is the year's work showing, and it goes in the log.</a:t>
             </a:r>
           </a:p>
           <a:p>
             <a:r>
-              <a:rPr lang="en-US" sz="1200"/>
               <a:t>GUARD: Do not shadow the open or add a welcome on top of the teen's — over-carrying teaches the room it still needs carrying.</a:t>
+            </a:r>
+          </a:p>
+          <a:p>
+            <a:r>
+              <a:t>PAIR LEAD: name the leading pair in the welcome — two leaders hold tonight, and the room will see the evening handed back and forth between them; that is the design. The pair practices the session together beforehand.</a:t>
             </a:r>
           </a:p>
         </p:txBody>
@@ -1276,77 +1484,6 @@
             <a:r>
               <a:rPr lang="en-US" sz="1200"/>
               <a:t>GUARD: It is a door left ajar, not a knock. If any parent looks cornered, repeat the guards 1:1 before they leave; whatever they say afterward, receive, encourage, audit nothing.</a:t>
-            </a:r>
-          </a:p>
-        </p:txBody>
-      </p:sp>
-    </p:spTree>
-  </p:cSld>
-  <p:clrMapOvr>
-    <a:masterClrMapping/>
-  </p:clrMapOvr>
-</p:notes>
-</file>
-
-<file path=ppt/notesSlides/notesSlide225.xml><?xml version="1.0" encoding="utf-8"?>
-<p:notes xmlns:a="http://schemas.openxmlformats.org/drawingml/2006/main" xmlns:r="http://schemas.openxmlformats.org/officeDocument/2006/relationships" xmlns:p="http://schemas.openxmlformats.org/presentationml/2006/main">
-  <p:cSld>
-    <p:spTree>
-      <p:nvGrpSpPr>
-        <p:cNvPr id="1" name=""/>
-        <p:cNvGrpSpPr/>
-        <p:nvPr/>
-      </p:nvGrpSpPr>
-      <p:grpSpPr>
-        <a:xfrm>
-          <a:off x="0" y="0"/>
-          <a:ext cx="0" cy="0"/>
-          <a:chOff x="0" y="0"/>
-          <a:chExt cx="0" cy="0"/>
-        </a:xfrm>
-      </p:grpSpPr>
-      <p:sp>
-        <p:nvSpPr>
-          <p:cNvPr id="2" name="Notes Placeholder 1"/>
-          <p:cNvSpPr>
-            <a:spLocks noGrp="1"/>
-          </p:cNvSpPr>
-          <p:nvPr>
-            <p:ph type="body" idx="1"/>
-          </p:nvPr>
-        </p:nvSpPr>
-        <p:spPr/>
-        <p:txBody>
-          <a:bodyPr/>
-          <a:lstStyle/>
-          <a:p>
-            <a:r>
-              <a:rPr lang="en-US" sz="1200"/>
-              <a:t>S18 · 8:20–8:24 · LEAD: CONTENT PRESENTER CIRCLE</a:t>
-            </a:r>
-          </a:p>
-          <a:p>
-            <a:r>
-              <a:rPr lang="en-US" sz="1200"/>
-              <a:t>BEATS:</a:t>
-            </a:r>
-          </a:p>
-          <a:p>
-            <a:r>
-              <a:rPr lang="en-US" sz="1200"/>
-              <a:t>1. Hold up the check-off card (H18.1): one daily row — the Rhythm Card dailies as built, with this week's evening-note question.</a:t>
-            </a:r>
-          </a:p>
-          <a:p>
-            <a:r>
-              <a:rPr lang="en-US" sz="1200"/>
-              <a:t>2. One one-time box: the Four Questions door, willing parents only.</a:t>
-            </a:r>
-          </a:p>
-          <a:p>
-            <a:r>
-              <a:rPr lang="en-US" sz="1200"/>
-              <a:t>3. Say the card's own rule: a missed box is never a failure; it is an invitation to return.</a:t>
             </a:r>
           </a:p>
         </p:txBody>
@@ -4783,7 +4920,1615 @@
 </p:sld>
 </file>
 
-<file path=ppt/slides/slide220.xml><?xml version="1.0" encoding="utf-8"?>
+<file path=ppt/slides/slide10.xml><?xml version="1.0" encoding="utf-8"?>
+<p:sld xmlns:a="http://schemas.openxmlformats.org/drawingml/2006/main" xmlns:r="http://schemas.openxmlformats.org/officeDocument/2006/relationships" xmlns:p="http://schemas.openxmlformats.org/presentationml/2006/main">
+  <p:cSld>
+    <p:spTree>
+      <p:nvGrpSpPr>
+        <p:cNvPr id="1" name=""/>
+        <p:cNvGrpSpPr/>
+        <p:nvPr/>
+      </p:nvGrpSpPr>
+      <p:grpSpPr>
+        <a:xfrm>
+          <a:off x="0" y="0"/>
+          <a:ext cx="0" cy="0"/>
+          <a:chOff x="0" y="0"/>
+          <a:chExt cx="0" cy="0"/>
+        </a:xfrm>
+      </p:grpSpPr>
+      <p:sp>
+        <p:nvSpPr>
+          <p:cNvPr id="2" name="Rectangle 1"/>
+          <p:cNvSpPr/>
+          <p:nvPr/>
+        </p:nvSpPr>
+        <p:spPr>
+          <a:xfrm>
+            <a:off x="0" y="0"/>
+            <a:ext cx="12191695" cy="6858000"/>
+          </a:xfrm>
+          <a:prstGeom prst="rect">
+            <a:avLst/>
+          </a:prstGeom>
+          <a:solidFill>
+            <a:srgbClr val="FFFFFF"/>
+          </a:solidFill>
+          <a:ln>
+            <a:noFill/>
+          </a:ln>
+        </p:spPr>
+        <p:txBody>
+          <a:bodyPr/>
+          <a:lstStyle/>
+          <a:p>
+            <a:endParaRPr/>
+          </a:p>
+        </p:txBody>
+      </p:sp>
+      <p:sp>
+        <p:nvSpPr>
+          <p:cNvPr id="3" name="TextBox 2"/>
+          <p:cNvSpPr txBox="1"/>
+          <p:nvPr/>
+        </p:nvSpPr>
+        <p:spPr>
+          <a:xfrm>
+            <a:off x="822960" y="502920"/>
+            <a:ext cx="10515600" cy="822960"/>
+          </a:xfrm>
+          <a:prstGeom prst="rect">
+            <a:avLst/>
+          </a:prstGeom>
+          <a:noFill/>
+        </p:spPr>
+        <p:txBody>
+          <a:bodyPr wrap="square">
+            <a:spAutoFit/>
+          </a:bodyPr>
+          <a:lstStyle/>
+          <a:p>
+            <a:pPr algn="l">
+              <a:spcAft>
+                <a:spcPts val="600"/>
+              </a:spcAft>
+            </a:pPr>
+            <a:r>
+              <a:rPr sz="2800" b="1" i="0">
+                <a:solidFill>
+                  <a:srgbClr val="2C5F2D"/>
+                </a:solidFill>
+                <a:latin typeface="Cambria"/>
+              </a:rPr>
+              <a:t>Closing the Container + Aaronic Blessing</a:t>
+            </a:r>
+          </a:p>
+        </p:txBody>
+      </p:sp>
+      <p:sp>
+        <p:nvSpPr>
+          <p:cNvPr id="4" name="TextBox 4"/>
+          <p:cNvSpPr txBox="1"/>
+          <p:nvPr/>
+        </p:nvSpPr>
+        <p:spPr>
+          <a:xfrm>
+            <a:off x="822960" y="1600200"/>
+            <a:ext cx="5669280" cy="4572000"/>
+          </a:xfrm>
+          <a:prstGeom prst="rect">
+            <a:avLst/>
+          </a:prstGeom>
+          <a:noFill/>
+        </p:spPr>
+        <p:txBody>
+          <a:bodyPr wrap="square" lIns="91440" tIns="91440" rIns="91440" bIns="91440"/>
+          <a:lstStyle/>
+          <a:p>
+            <a:pPr marL="274320" indent="-274320">
+              <a:spcAft>
+                <a:spcPts val="900"/>
+              </a:spcAft>
+            </a:pPr>
+            <a:r>
+              <a:rPr sz="2200" b="1" i="0">
+                <a:solidFill>
+                  <a:srgbClr val="97BC62"/>
+                </a:solidFill>
+                <a:latin typeface="Calibri"/>
+              </a:rPr>
+              <a:t>•  </a:t>
+            </a:r>
+            <a:r>
+              <a:rPr sz="2200" b="0" i="0">
+                <a:solidFill>
+                  <a:srgbClr val="222B22"/>
+                </a:solidFill>
+                <a:latin typeface="Calibri"/>
+              </a:rPr>
+              <a:t>We close the way we opened — the container, six steps:</a:t>
+            </a:r>
+          </a:p>
+          <a:p>
+            <a:pPr marL="685800" indent="-274320">
+              <a:spcAft>
+                <a:spcPts val="700"/>
+              </a:spcAft>
+            </a:pPr>
+            <a:r>
+              <a:rPr sz="2000" b="1" i="0">
+                <a:solidFill>
+                  <a:srgbClr val="97BC62"/>
+                </a:solidFill>
+                <a:latin typeface="Calibri"/>
+              </a:rPr>
+              <a:t>1   </a:t>
+            </a:r>
+            <a:r>
+              <a:rPr sz="2000" b="0" i="0">
+                <a:solidFill>
+                  <a:srgbClr val="222B22"/>
+                </a:solidFill>
+                <a:latin typeface="Calibri"/>
+              </a:rPr>
+              <a:t>Stand again — same circle, same posture as the open</a:t>
+            </a:r>
+          </a:p>
+          <a:p>
+            <a:pPr marL="685800" indent="-274320">
+              <a:spcAft>
+                <a:spcPts val="700"/>
+              </a:spcAft>
+            </a:pPr>
+            <a:r>
+              <a:rPr sz="2000" b="1" i="0">
+                <a:solidFill>
+                  <a:srgbClr val="97BC62"/>
+                </a:solidFill>
+                <a:latin typeface="Calibri"/>
+              </a:rPr>
+              <a:t>2   </a:t>
+            </a:r>
+            <a:r>
+              <a:rPr sz="2000" b="0" i="0">
+                <a:solidFill>
+                  <a:srgbClr val="222B22"/>
+                </a:solidFill>
+                <a:latin typeface="Calibri"/>
+              </a:rPr>
+              <a:t>One-word landing — compare it to your opening word</a:t>
+            </a:r>
+          </a:p>
+          <a:p>
+            <a:pPr marL="685800" indent="-274320">
+              <a:spcAft>
+                <a:spcPts val="700"/>
+              </a:spcAft>
+            </a:pPr>
+            <a:r>
+              <a:rPr sz="2000" b="1" i="0">
+                <a:solidFill>
+                  <a:srgbClr val="97BC62"/>
+                </a:solidFill>
+                <a:latin typeface="Calibri"/>
+              </a:rPr>
+              <a:t>3   </a:t>
+            </a:r>
+            <a:r>
+              <a:rPr sz="2000" b="0" i="0">
+                <a:solidFill>
+                  <a:srgbClr val="222B22"/>
+                </a:solidFill>
+                <a:latin typeface="Calibri"/>
+              </a:rPr>
+              <a:t>The one thing you are taking from tonight</a:t>
+            </a:r>
+          </a:p>
+          <a:p>
+            <a:pPr marL="685800" indent="-274320">
+              <a:spcAft>
+                <a:spcPts val="700"/>
+              </a:spcAft>
+            </a:pPr>
+            <a:r>
+              <a:rPr sz="2000" b="1" i="0">
+                <a:solidFill>
+                  <a:srgbClr val="97BC62"/>
+                </a:solidFill>
+                <a:latin typeface="Calibri"/>
+              </a:rPr>
+              <a:t>4   </a:t>
+            </a:r>
+            <a:r>
+              <a:rPr sz="2000" b="0" i="0">
+                <a:solidFill>
+                  <a:srgbClr val="222B22"/>
+                </a:solidFill>
+                <a:latin typeface="Calibri"/>
+              </a:rPr>
+              <a:t>The one practice — committed aloud, or modified to one you will actually keep</a:t>
+            </a:r>
+          </a:p>
+          <a:p>
+            <a:pPr marL="685800" indent="-274320">
+              <a:spcAft>
+                <a:spcPts val="700"/>
+              </a:spcAft>
+            </a:pPr>
+            <a:r>
+              <a:rPr sz="2000" b="1" i="0">
+                <a:solidFill>
+                  <a:srgbClr val="97BC62"/>
+                </a:solidFill>
+                <a:latin typeface="Calibri"/>
+              </a:rPr>
+              <a:t>5   </a:t>
+            </a:r>
+            <a:r>
+              <a:rPr sz="2000" b="0" i="0">
+                <a:solidFill>
+                  <a:srgbClr val="222B22"/>
+                </a:solidFill>
+                <a:latin typeface="Calibri"/>
+              </a:rPr>
+              <a:t>Blessings — specific, witnessed, short</a:t>
+            </a:r>
+          </a:p>
+          <a:p>
+            <a:pPr marL="685800" indent="-274320">
+              <a:spcAft>
+                <a:spcPts val="700"/>
+              </a:spcAft>
+            </a:pPr>
+            <a:r>
+              <a:rPr sz="2000" b="1" i="0">
+                <a:solidFill>
+                  <a:srgbClr val="97BC62"/>
+                </a:solidFill>
+                <a:latin typeface="Calibri"/>
+              </a:rPr>
+              <a:t>6   </a:t>
+            </a:r>
+            <a:r>
+              <a:rPr sz="2000" b="0" i="0">
+                <a:solidFill>
+                  <a:srgbClr val="222B22"/>
+                </a:solidFill>
+                <a:latin typeface="Calibri"/>
+              </a:rPr>
+              <a:t>Closing prayer — and the Aaronic blessing, spoken over each other, face to face</a:t>
+            </a:r>
+          </a:p>
+        </p:txBody>
+      </p:sp>
+      <p:sp>
+        <p:nvSpPr>
+          <p:cNvPr id="6" name="TextBox 6"/>
+          <p:cNvSpPr txBox="1"/>
+          <p:nvPr/>
+        </p:nvSpPr>
+        <p:spPr>
+          <a:xfrm>
+            <a:off x="6766560" y="1737360"/>
+            <a:ext cx="4663440" cy="2926080"/>
+          </a:xfrm>
+          <a:prstGeom prst="rect">
+            <a:avLst/>
+          </a:prstGeom>
+          <a:solidFill>
+            <a:srgbClr val="F1F6EC"/>
+          </a:solidFill>
+        </p:spPr>
+        <p:txBody>
+          <a:bodyPr wrap="square" lIns="91440" tIns="91440" rIns="91440" bIns="91440" anchor="ctr"/>
+          <a:lstStyle/>
+          <a:p>
+            <a:pPr>
+              <a:spcAft>
+                <a:spcPts val="900"/>
+              </a:spcAft>
+            </a:pPr>
+            <a:r>
+              <a:rPr sz="1200" b="1" i="0">
+                <a:solidFill>
+                  <a:srgbClr val="97BC62"/>
+                </a:solidFill>
+                <a:latin typeface="Calibri"/>
+              </a:rPr>
+              <a:t>THE AARONIC BLESSING — NUMBERS 6:24–26</a:t>
+            </a:r>
+          </a:p>
+          <a:p>
+            <a:pPr>
+              <a:spcAft>
+                <a:spcPts val="600"/>
+              </a:spcAft>
+            </a:pPr>
+            <a:r>
+              <a:rPr sz="2400" b="0" i="1">
+                <a:solidFill>
+                  <a:srgbClr val="222B22"/>
+                </a:solidFill>
+                <a:latin typeface="Cambria"/>
+              </a:rPr>
+              <a:t>“The Lord bless you and keep you;</a:t>
+            </a:r>
+          </a:p>
+          <a:p>
+            <a:pPr>
+              <a:spcAft>
+                <a:spcPts val="600"/>
+              </a:spcAft>
+            </a:pPr>
+            <a:r>
+              <a:rPr sz="2400" b="0" i="1">
+                <a:solidFill>
+                  <a:srgbClr val="222B22"/>
+                </a:solidFill>
+                <a:latin typeface="Cambria"/>
+              </a:rPr>
+              <a:t>the Lord make his face to shine upon you, and be gracious to you;</a:t>
+            </a:r>
+          </a:p>
+          <a:p>
+            <a:pPr>
+              <a:spcAft>
+                <a:spcPts val="600"/>
+              </a:spcAft>
+            </a:pPr>
+            <a:r>
+              <a:rPr sz="2400" b="0" i="1">
+                <a:solidFill>
+                  <a:srgbClr val="222B22"/>
+                </a:solidFill>
+                <a:latin typeface="Cambria"/>
+              </a:rPr>
+              <a:t>the Lord lift up his countenance upon you, and give you peace.”</a:t>
+            </a:r>
+          </a:p>
+        </p:txBody>
+      </p:sp>
+      <p:sp>
+        <p:nvSpPr>
+          <p:cNvPr id="90" name="SlideNum"/>
+          <p:cNvSpPr txBox="1"/>
+          <p:nvPr/>
+        </p:nvSpPr>
+        <p:spPr>
+          <a:xfrm>
+            <a:off x="11384280" y="6446520"/>
+            <a:ext cx="640080" cy="292608"/>
+          </a:xfrm>
+          <a:prstGeom prst="rect">
+            <a:avLst/>
+          </a:prstGeom>
+          <a:noFill/>
+        </p:spPr>
+        <p:txBody>
+          <a:bodyPr wrap="none" lIns="0" tIns="0" rIns="45720" bIns="0" anchor="ctr"/>
+          <a:lstStyle/>
+          <a:p>
+            <a:pPr algn="r"/>
+            <a:r>
+              <a:t>228</a:t>
+            </a:r>
+            <a:endParaRPr sz="1000" b="1">
+              <a:solidFill>
+                <a:srgbClr val="7A8A6E"/>
+              </a:solidFill>
+              <a:latin typeface="Calibri"/>
+            </a:endParaRPr>
+          </a:p>
+        </p:txBody>
+      </p:sp>
+    </p:spTree>
+  </p:cSld>
+  <p:clrMapOvr>
+    <a:masterClrMapping/>
+  </p:clrMapOvr>
+</p:sld>
+</file>
+
+<file path=ppt/slides/slide11.xml><?xml version="1.0" encoding="utf-8"?>
+<p:sld xmlns:a="http://schemas.openxmlformats.org/drawingml/2006/main" xmlns:r="http://schemas.openxmlformats.org/officeDocument/2006/relationships" xmlns:p="http://schemas.openxmlformats.org/presentationml/2006/main">
+  <p:cSld>
+    <p:spTree>
+      <p:nvGrpSpPr>
+        <p:cNvPr id="1" name=""/>
+        <p:cNvGrpSpPr/>
+        <p:nvPr/>
+      </p:nvGrpSpPr>
+      <p:grpSpPr>
+        <a:xfrm>
+          <a:off x="0" y="0"/>
+          <a:ext cx="0" cy="0"/>
+          <a:chOff x="0" y="0"/>
+          <a:chExt cx="0" cy="0"/>
+        </a:xfrm>
+      </p:grpSpPr>
+      <p:sp>
+        <p:nvSpPr>
+          <p:cNvPr id="2" name="Rectangle 1"/>
+          <p:cNvSpPr/>
+          <p:nvPr/>
+        </p:nvSpPr>
+        <p:spPr>
+          <a:xfrm>
+            <a:off x="0" y="0"/>
+            <a:ext cx="12191695" cy="6858000"/>
+          </a:xfrm>
+          <a:prstGeom prst="rect">
+            <a:avLst/>
+          </a:prstGeom>
+          <a:solidFill>
+            <a:srgbClr val="FFFFFF"/>
+          </a:solidFill>
+          <a:ln>
+            <a:noFill/>
+          </a:ln>
+        </p:spPr>
+        <p:txBody>
+          <a:bodyPr/>
+          <a:lstStyle/>
+          <a:p>
+            <a:endParaRPr/>
+          </a:p>
+        </p:txBody>
+      </p:sp>
+      <p:sp>
+        <p:nvSpPr>
+          <p:cNvPr id="3" name="TextBox 2"/>
+          <p:cNvSpPr txBox="1"/>
+          <p:nvPr/>
+        </p:nvSpPr>
+        <p:spPr>
+          <a:xfrm>
+            <a:off x="822960" y="502920"/>
+            <a:ext cx="10515600" cy="822960"/>
+          </a:xfrm>
+          <a:prstGeom prst="rect">
+            <a:avLst/>
+          </a:prstGeom>
+          <a:noFill/>
+        </p:spPr>
+        <p:txBody>
+          <a:bodyPr wrap="square">
+            <a:spAutoFit/>
+          </a:bodyPr>
+          <a:lstStyle/>
+          <a:p>
+            <a:pPr algn="l">
+              <a:spcAft>
+                <a:spcPts val="600"/>
+              </a:spcAft>
+            </a:pPr>
+            <a:r>
+              <a:rPr sz="2800" b="1" i="0">
+                <a:solidFill>
+                  <a:srgbClr val="2C5F2D"/>
+                </a:solidFill>
+                <a:latin typeface="Cambria"/>
+              </a:rPr>
+              <a:t>The Leader Feedback Round</a:t>
+            </a:r>
+          </a:p>
+        </p:txBody>
+      </p:sp>
+      <p:sp>
+        <p:nvSpPr>
+          <p:cNvPr id="4" name="TextBox 4"/>
+          <p:cNvSpPr txBox="1"/>
+          <p:nvPr/>
+        </p:nvSpPr>
+        <p:spPr>
+          <a:xfrm>
+            <a:off x="822960" y="1554480"/>
+            <a:ext cx="6675120" cy="4892040"/>
+          </a:xfrm>
+          <a:prstGeom prst="rect">
+            <a:avLst/>
+          </a:prstGeom>
+          <a:noFill/>
+        </p:spPr>
+        <p:txBody>
+          <a:bodyPr wrap="square" lIns="91440" tIns="91440" rIns="91440" bIns="91440"/>
+          <a:lstStyle/>
+          <a:p>
+            <a:pPr marL="274320" indent="-274320">
+              <a:spcAft>
+                <a:spcPts val="900"/>
+              </a:spcAft>
+            </a:pPr>
+            <a:r>
+              <a:rPr sz="2800" b="1" i="0">
+                <a:solidFill>
+                  <a:srgbClr val="97BC62"/>
+                </a:solidFill>
+                <a:latin typeface="Calibri"/>
+              </a:rPr>
+              <a:t>•  </a:t>
+            </a:r>
+            <a:r>
+              <a:rPr sz="2800" b="0" i="0">
+                <a:solidFill>
+                  <a:srgbClr val="222B22"/>
+                </a:solidFill>
+                <a:latin typeface="Calibri"/>
+              </a:rPr>
+              <a:t>Two rounds, same as every session — the container holder first, then the content presenter: three things each</a:t>
+            </a:r>
+          </a:p>
+          <a:p>
+            <a:pPr marL="685800" indent="-274320">
+              <a:spcAft>
+                <a:spcPts val="700"/>
+              </a:spcAft>
+            </a:pPr>
+            <a:r>
+              <a:rPr sz="2000" b="1" i="0">
+                <a:solidFill>
+                  <a:srgbClr val="97BC62"/>
+                </a:solidFill>
+                <a:latin typeface="Calibri"/>
+              </a:rPr>
+              <a:t>–  </a:t>
+            </a:r>
+            <a:r>
+              <a:rPr sz="2000" b="0" i="1">
+                <a:solidFill>
+                  <a:srgbClr val="222B22"/>
+                </a:solidFill>
+                <a:latin typeface="Calibri"/>
+              </a:rPr>
+              <a:t>“What I think went well tonight: ______”</a:t>
+            </a:r>
+          </a:p>
+          <a:p>
+            <a:pPr marL="685800" indent="-274320">
+              <a:spcAft>
+                <a:spcPts val="700"/>
+              </a:spcAft>
+            </a:pPr>
+            <a:r>
+              <a:rPr sz="2000" b="1" i="0">
+                <a:solidFill>
+                  <a:srgbClr val="97BC62"/>
+                </a:solidFill>
+                <a:latin typeface="Calibri"/>
+              </a:rPr>
+              <a:t>–  </a:t>
+            </a:r>
+            <a:r>
+              <a:rPr sz="2000" b="0" i="1">
+                <a:solidFill>
+                  <a:srgbClr val="222B22"/>
+                </a:solidFill>
+                <a:latin typeface="Calibri"/>
+              </a:rPr>
+              <a:t>“What I’d do differently next time: ______”</a:t>
+            </a:r>
+          </a:p>
+          <a:p>
+            <a:pPr marL="685800" indent="-274320">
+              <a:spcAft>
+                <a:spcPts val="700"/>
+              </a:spcAft>
+            </a:pPr>
+            <a:r>
+              <a:rPr sz="2000" b="1" i="0">
+                <a:solidFill>
+                  <a:srgbClr val="97BC62"/>
+                </a:solidFill>
+                <a:latin typeface="Calibri"/>
+              </a:rPr>
+              <a:t>–  </a:t>
+            </a:r>
+            <a:r>
+              <a:rPr sz="2000" b="0" i="1">
+                <a:solidFill>
+                  <a:srgbClr val="222B22"/>
+                </a:solidFill>
+                <a:latin typeface="Calibri"/>
+              </a:rPr>
+              <a:t>“If I were to teach tonight’s process to someone, I would tell them: ______”</a:t>
+            </a:r>
+          </a:p>
+          <a:p>
+            <a:pPr marL="274320" indent="-274320">
+              <a:spcAft>
+                <a:spcPts val="900"/>
+              </a:spcAft>
+            </a:pPr>
+            <a:r>
+              <a:rPr sz="2800" b="1" i="0">
+                <a:solidFill>
+                  <a:srgbClr val="97BC62"/>
+                </a:solidFill>
+                <a:latin typeface="Calibri"/>
+              </a:rPr>
+              <a:t>•  </a:t>
+            </a:r>
+            <a:r>
+              <a:rPr sz="2800" b="0" i="0">
+                <a:solidFill>
+                  <a:srgbClr val="222B22"/>
+                </a:solidFill>
+                <a:latin typeface="Calibri"/>
+              </a:rPr>
+              <a:t>Then the room — the same two questions about tonight</a:t>
+            </a:r>
+          </a:p>
+          <a:p>
+            <a:pPr marL="274320" indent="-274320">
+              <a:spcAft>
+                <a:spcPts val="900"/>
+              </a:spcAft>
+            </a:pPr>
+            <a:r>
+              <a:rPr sz="2800" b="1" i="0">
+                <a:solidFill>
+                  <a:srgbClr val="97BC62"/>
+                </a:solidFill>
+                <a:latin typeface="Calibri"/>
+              </a:rPr>
+              <a:t>•  </a:t>
+            </a:r>
+            <a:r>
+              <a:rPr sz="2800" b="0" i="0">
+                <a:solidFill>
+                  <a:srgbClr val="222B22"/>
+                </a:solidFill>
+                <a:latin typeface="Calibri"/>
+              </a:rPr>
+              <a:t>The leaders receive without defending — “thank you” is the whole response</a:t>
+            </a:r>
+          </a:p>
+        </p:txBody>
+      </p:sp>
+      <p:sp>
+        <p:nvSpPr>
+          <p:cNvPr id="90" name="SlideNum"/>
+          <p:cNvSpPr txBox="1"/>
+          <p:nvPr/>
+        </p:nvSpPr>
+        <p:spPr>
+          <a:xfrm>
+            <a:off x="11384280" y="6446520"/>
+            <a:ext cx="640080" cy="292608"/>
+          </a:xfrm>
+          <a:prstGeom prst="rect">
+            <a:avLst/>
+          </a:prstGeom>
+          <a:noFill/>
+        </p:spPr>
+        <p:txBody>
+          <a:bodyPr wrap="none" lIns="0" tIns="0" rIns="45720" bIns="0" anchor="ctr"/>
+          <a:lstStyle/>
+          <a:p>
+            <a:pPr algn="r"/>
+            <a:r>
+              <a:t>229</a:t>
+            </a:r>
+            <a:endParaRPr sz="1000" b="1">
+              <a:solidFill>
+                <a:srgbClr val="7A8A6E"/>
+              </a:solidFill>
+              <a:latin typeface="Calibri"/>
+            </a:endParaRPr>
+          </a:p>
+        </p:txBody>
+      </p:sp>
+      <p:pic>
+        <p:nvPicPr>
+          <p:cNvPr id="33" name="Picture 33" descr="compass on the trail - the weekly bearing check"/>
+          <p:cNvPicPr>
+            <a:picLocks noChangeAspect="1"/>
+          </p:cNvPicPr>
+          <p:nvPr/>
+        </p:nvPicPr>
+        <p:blipFill>
+          <a:blip r:embed="rId3"/>
+          <a:stretch>
+            <a:fillRect/>
+          </a:stretch>
+        </p:blipFill>
+        <p:spPr>
+          <a:xfrm>
+            <a:off x="8106160" y="1463040"/>
+            <a:ext cx="3259831" cy="4892040"/>
+          </a:xfrm>
+          <a:prstGeom prst="rect">
+            <a:avLst/>
+          </a:prstGeom>
+          <a:ln w="76200">
+            <a:solidFill>
+              <a:srgbClr val="FFFFFF"/>
+            </a:solidFill>
+          </a:ln>
+          <a:effectLst>
+            <a:outerShdw blurRad="63500" dist="25400" dir="5400000" rotWithShape="0">
+              <a:srgbClr val="000000">
+                <a:alpha val="35000"/>
+              </a:srgbClr>
+            </a:outerShdw>
+          </a:effectLst>
+        </p:spPr>
+      </p:pic>
+    </p:spTree>
+  </p:cSld>
+  <p:clrMapOvr>
+    <a:masterClrMapping/>
+  </p:clrMapOvr>
+</p:sld>
+</file>
+
+<file path=ppt/slides/slide12.xml><?xml version="1.0" encoding="utf-8"?>
+<p:sld xmlns:a="http://schemas.openxmlformats.org/drawingml/2006/main" xmlns:r="http://schemas.openxmlformats.org/officeDocument/2006/relationships" xmlns:p="http://schemas.openxmlformats.org/presentationml/2006/main">
+  <p:cSld>
+    <p:spTree>
+      <p:nvGrpSpPr>
+        <p:cNvPr id="1" name=""/>
+        <p:cNvGrpSpPr/>
+        <p:nvPr/>
+      </p:nvGrpSpPr>
+      <p:grpSpPr>
+        <a:xfrm>
+          <a:off x="0" y="0"/>
+          <a:ext cx="0" cy="0"/>
+          <a:chOff x="0" y="0"/>
+          <a:chExt cx="0" cy="0"/>
+        </a:xfrm>
+      </p:grpSpPr>
+      <p:sp>
+        <p:nvSpPr>
+          <p:cNvPr id="2" name="Rectangle 1"/>
+          <p:cNvSpPr/>
+          <p:nvPr/>
+        </p:nvSpPr>
+        <p:spPr>
+          <a:xfrm>
+            <a:off x="0" y="0"/>
+            <a:ext cx="12191695" cy="6858000"/>
+          </a:xfrm>
+          <a:prstGeom prst="rect">
+            <a:avLst/>
+          </a:prstGeom>
+          <a:solidFill>
+            <a:srgbClr val="FFFFFF"/>
+          </a:solidFill>
+          <a:ln>
+            <a:noFill/>
+          </a:ln>
+        </p:spPr>
+        <p:txBody>
+          <a:bodyPr/>
+          <a:lstStyle/>
+          <a:p>
+            <a:endParaRPr/>
+          </a:p>
+        </p:txBody>
+      </p:sp>
+      <p:sp>
+        <p:nvSpPr>
+          <p:cNvPr id="3" name="TextBox 2"/>
+          <p:cNvSpPr txBox="1"/>
+          <p:nvPr/>
+        </p:nvSpPr>
+        <p:spPr>
+          <a:xfrm>
+            <a:off x="822960" y="502920"/>
+            <a:ext cx="10515600" cy="822960"/>
+          </a:xfrm>
+          <a:prstGeom prst="rect">
+            <a:avLst/>
+          </a:prstGeom>
+          <a:noFill/>
+        </p:spPr>
+        <p:txBody>
+          <a:bodyPr wrap="square">
+            <a:spAutoFit/>
+          </a:bodyPr>
+          <a:lstStyle/>
+          <a:p>
+            <a:pPr algn="l">
+              <a:spcAft>
+                <a:spcPts val="600"/>
+              </a:spcAft>
+            </a:pPr>
+            <a:r>
+              <a:rPr sz="2800" b="1" i="0">
+                <a:solidFill>
+                  <a:srgbClr val="2C5F2D"/>
+                </a:solidFill>
+                <a:latin typeface="Cambria"/>
+              </a:rPr>
+              <a:t>Aaronic Blessing and Sending</a:t>
+            </a:r>
+          </a:p>
+        </p:txBody>
+      </p:sp>
+      <p:sp>
+        <p:nvSpPr>
+          <p:cNvPr id="4" name="TextBox 4"/>
+          <p:cNvSpPr txBox="1"/>
+          <p:nvPr/>
+        </p:nvSpPr>
+        <p:spPr>
+          <a:xfrm>
+            <a:off x="822960" y="1600200"/>
+            <a:ext cx="5669280" cy="4572000"/>
+          </a:xfrm>
+          <a:prstGeom prst="rect">
+            <a:avLst/>
+          </a:prstGeom>
+          <a:noFill/>
+        </p:spPr>
+        <p:txBody>
+          <a:bodyPr wrap="square" lIns="91440" tIns="91440" rIns="91440" bIns="91440"/>
+          <a:lstStyle/>
+          <a:p>
+            <a:pPr marL="274320" indent="-274320">
+              <a:spcAft>
+                <a:spcPts val="800"/>
+              </a:spcAft>
+            </a:pPr>
+            <a:r>
+              <a:rPr sz="2800" b="1" i="0">
+                <a:solidFill>
+                  <a:srgbClr val="97BC62"/>
+                </a:solidFill>
+                <a:latin typeface="Calibri"/>
+              </a:rPr>
+              <a:t>•  </a:t>
+            </a:r>
+            <a:r>
+              <a:rPr sz="2800" b="0" i="0">
+                <a:solidFill>
+                  <a:srgbClr val="222B22"/>
+                </a:solidFill>
+                <a:latin typeface="Calibri"/>
+              </a:rPr>
+              <a:t>“One sentence for the road: you came back tonight like people who know the way — because you do now.”</a:t>
+            </a:r>
+          </a:p>
+          <a:p>
+            <a:pPr marL="274320" indent="-274320">
+              <a:spcAft>
+                <a:spcPts val="800"/>
+              </a:spcAft>
+            </a:pPr>
+            <a:r>
+              <a:rPr sz="2800" b="1" i="0">
+                <a:solidFill>
+                  <a:srgbClr val="97BC62"/>
+                </a:solidFill>
+                <a:latin typeface="Calibri"/>
+              </a:rPr>
+              <a:t>•  </a:t>
+            </a:r>
+            <a:r>
+              <a:rPr sz="2800" b="0" i="0">
+                <a:solidFill>
+                  <a:srgbClr val="222B22"/>
+                </a:solidFill>
+                <a:latin typeface="Calibri"/>
+              </a:rPr>
+              <a:t>“Five weeks to the sending. Let us not grow weary; the season is His, and it is nearly harvest.”</a:t>
+            </a:r>
+          </a:p>
+          <a:p>
+            <a:pPr marL="274320" indent="-274320">
+              <a:spcAft>
+                <a:spcPts val="800"/>
+              </a:spcAft>
+            </a:pPr>
+            <a:r>
+              <a:rPr sz="2800" b="1" i="0">
+                <a:solidFill>
+                  <a:srgbClr val="97BC62"/>
+                </a:solidFill>
+                <a:latin typeface="Calibri"/>
+              </a:rPr>
+              <a:t>•  </a:t>
+            </a:r>
+            <a:r>
+              <a:rPr sz="2800" b="0" i="0">
+                <a:solidFill>
+                  <a:srgbClr val="222B22"/>
+                </a:solidFill>
+                <a:latin typeface="Calibri"/>
+              </a:rPr>
+              <a:t>“See you Wednesday. Week 19 — the teens have the cards.”</a:t>
+            </a:r>
+          </a:p>
+        </p:txBody>
+      </p:sp>
+      <p:sp>
+        <p:nvSpPr>
+          <p:cNvPr id="6" name="TextBox 6"/>
+          <p:cNvSpPr txBox="1"/>
+          <p:nvPr/>
+        </p:nvSpPr>
+        <p:spPr>
+          <a:xfrm>
+            <a:off x="6766560" y="1737360"/>
+            <a:ext cx="4663440" cy="2542032"/>
+          </a:xfrm>
+          <a:prstGeom prst="rect">
+            <a:avLst/>
+          </a:prstGeom>
+          <a:solidFill>
+            <a:srgbClr val="F1F6EC"/>
+          </a:solidFill>
+        </p:spPr>
+        <p:txBody>
+          <a:bodyPr wrap="square" lIns="91440" tIns="91440" rIns="91440" bIns="91440" anchor="ctr"/>
+          <a:lstStyle/>
+          <a:p>
+            <a:pPr>
+              <a:spcAft>
+                <a:spcPts val="900"/>
+              </a:spcAft>
+            </a:pPr>
+            <a:r>
+              <a:rPr sz="1200" b="1" i="0">
+                <a:solidFill>
+                  <a:srgbClr val="97BC62"/>
+                </a:solidFill>
+                <a:latin typeface="Calibri"/>
+              </a:rPr>
+              <a:t>NUMBERS 6:24–26</a:t>
+            </a:r>
+          </a:p>
+          <a:p>
+            <a:pPr>
+              <a:spcAft>
+                <a:spcPts val="600"/>
+              </a:spcAft>
+            </a:pPr>
+            <a:r>
+              <a:rPr sz="2400" b="0" i="1">
+                <a:solidFill>
+                  <a:srgbClr val="222B22"/>
+                </a:solidFill>
+                <a:latin typeface="Cambria"/>
+              </a:rPr>
+              <a:t>“The Lord bless you and keep you; the Lord make His face shine on you and be gracious to you; the Lord turn His face toward you and give you peace.”</a:t>
+            </a:r>
+          </a:p>
+        </p:txBody>
+      </p:sp>
+      <p:sp>
+        <p:nvSpPr>
+          <p:cNvPr id="90" name="SlideNum"/>
+          <p:cNvSpPr txBox="1"/>
+          <p:nvPr/>
+        </p:nvSpPr>
+        <p:spPr>
+          <a:xfrm>
+            <a:off x="11384280" y="6446520"/>
+            <a:ext cx="640080" cy="292608"/>
+          </a:xfrm>
+          <a:prstGeom prst="rect">
+            <a:avLst/>
+          </a:prstGeom>
+          <a:noFill/>
+        </p:spPr>
+        <p:txBody>
+          <a:bodyPr wrap="none" lIns="0" tIns="0" rIns="45720" bIns="0" anchor="ctr"/>
+          <a:lstStyle/>
+          <a:p>
+            <a:pPr algn="r"/>
+            <a:r>
+              <a:t>230</a:t>
+            </a:r>
+            <a:endParaRPr sz="1000" b="1">
+              <a:solidFill>
+                <a:srgbClr val="7A8A6E"/>
+              </a:solidFill>
+              <a:latin typeface="Calibri"/>
+            </a:endParaRPr>
+          </a:p>
+        </p:txBody>
+      </p:sp>
+    </p:spTree>
+  </p:cSld>
+  <p:clrMapOvr>
+    <a:masterClrMapping/>
+  </p:clrMapOvr>
+</p:sld>
+</file>
+
+<file path=ppt/slides/slide13.xml><?xml version="1.0" encoding="utf-8"?>
+<p:sld xmlns:a="http://schemas.openxmlformats.org/drawingml/2006/main" xmlns:p="http://schemas.openxmlformats.org/presentationml/2006/main" xmlns:r="http://schemas.openxmlformats.org/officeDocument/2006/relationships">
+  <p:cSld>
+    <p:spTree>
+      <p:nvGrpSpPr>
+        <p:cNvPr id="1" name=""/>
+        <p:cNvGrpSpPr/>
+        <p:nvPr/>
+      </p:nvGrpSpPr>
+      <p:grpSpPr/>
+      <p:sp>
+        <p:nvSpPr>
+          <p:cNvPr id="2" name="Rectangle 1"/>
+          <p:cNvSpPr/>
+          <p:nvPr/>
+        </p:nvSpPr>
+        <p:spPr>
+          <a:xfrm>
+            <a:off x="0" y="0"/>
+            <a:ext cx="12192000" cy="6858000"/>
+          </a:xfrm>
+          <a:prstGeom prst="rect">
+            <a:avLst/>
+          </a:prstGeom>
+          <a:solidFill>
+            <a:srgbClr val="FFFFFF"/>
+          </a:solidFill>
+          <a:ln>
+            <a:noFill/>
+          </a:ln>
+          <a:effectLst/>
+        </p:spPr>
+        <p:style>
+          <a:lnRef idx="1">
+            <a:schemeClr val="accent1"/>
+          </a:lnRef>
+          <a:fillRef idx="3">
+            <a:schemeClr val="accent1"/>
+          </a:fillRef>
+          <a:effectRef idx="2">
+            <a:schemeClr val="accent1"/>
+          </a:effectRef>
+          <a:fontRef idx="minor">
+            <a:schemeClr val="lt1"/>
+          </a:fontRef>
+        </p:style>
+        <p:txBody>
+          <a:bodyPr rtlCol="0" anchor="ctr"/>
+          <a:lstStyle/>
+          <a:p>
+            <a:pPr algn="ctr"/>
+          </a:p>
+        </p:txBody>
+      </p:sp>
+      <p:sp>
+        <p:nvSpPr>
+          <p:cNvPr id="3" name="TextBox 2"/>
+          <p:cNvSpPr txBox="1"/>
+          <p:nvPr/>
+        </p:nvSpPr>
+        <p:spPr>
+          <a:xfrm>
+            <a:off x="822960" y="502920"/>
+            <a:ext cx="10515600" cy="822960"/>
+          </a:xfrm>
+          <a:prstGeom prst="rect">
+            <a:avLst/>
+          </a:prstGeom>
+          <a:noFill/>
+        </p:spPr>
+        <p:txBody>
+          <a:bodyPr wrap="square">
+            <a:spAutoFit/>
+          </a:bodyPr>
+          <a:lstStyle/>
+          <a:p>
+            <a:r>
+              <a:rPr sz="2800" b="1">
+                <a:solidFill>
+                  <a:srgbClr val="2C5F2D"/>
+                </a:solidFill>
+                <a:latin typeface="Cambria"/>
+              </a:rPr>
+              <a:t>Where We Are — the Four Connects</a:t>
+            </a:r>
+          </a:p>
+        </p:txBody>
+      </p:sp>
+      <p:pic>
+        <p:nvPicPr>
+          <p:cNvPr id="4" name="Picture 3" descr="four-connects.png"/>
+          <p:cNvPicPr>
+            <a:picLocks noChangeAspect="1"/>
+          </p:cNvPicPr>
+          <p:nvPr/>
+        </p:nvPicPr>
+        <p:blipFill>
+          <a:blip r:embed="rId2"/>
+          <a:stretch>
+            <a:fillRect/>
+          </a:stretch>
+        </p:blipFill>
+        <p:spPr>
+          <a:xfrm>
+            <a:off x="932688" y="1645920"/>
+            <a:ext cx="10332720" cy="3708663"/>
+          </a:xfrm>
+          <a:prstGeom prst="rect">
+            <a:avLst/>
+          </a:prstGeom>
+        </p:spPr>
+      </p:pic>
+      <p:sp>
+        <p:nvSpPr>
+          <p:cNvPr id="5" name="TextBox 4"/>
+          <p:cNvSpPr txBox="1"/>
+          <p:nvPr/>
+        </p:nvSpPr>
+        <p:spPr>
+          <a:xfrm>
+            <a:off x="822960" y="5623560"/>
+            <a:ext cx="10515600" cy="914400"/>
+          </a:xfrm>
+          <a:prstGeom prst="rect">
+            <a:avLst/>
+          </a:prstGeom>
+          <a:noFill/>
+        </p:spPr>
+        <p:txBody>
+          <a:bodyPr wrap="square">
+            <a:spAutoFit/>
+          </a:bodyPr>
+          <a:lstStyle/>
+          <a:p>
+            <a:r>
+              <a:rPr sz="1800" b="0">
+                <a:solidFill>
+                  <a:srgbClr val="222B22"/>
+                </a:solidFill>
+                <a:latin typeface="Calibri"/>
+              </a:rPr>
+              <a:t>Session 18 returns to the whole map — </a:t>
+            </a:r>
+            <a:r>
+              <a:rPr sz="1800" b="1">
+                <a:solidFill>
+                  <a:srgbClr val="2C5F2D"/>
+                </a:solidFill>
+                <a:latin typeface="Calibri"/>
+              </a:rPr>
+              <a:t>all four Connects</a:t>
+            </a:r>
+            <a:r>
+              <a:rPr sz="1800" b="0">
+                <a:solidFill>
+                  <a:srgbClr val="222B22"/>
+                </a:solidFill>
+                <a:latin typeface="Calibri"/>
+              </a:rPr>
+              <a:t>, for the final stretch. Each connection makes the next one real (Matt. 22:37–40).</a:t>
+            </a:r>
+          </a:p>
+        </p:txBody>
+      </p:sp>
+      <p:sp>
+        <p:nvSpPr>
+          <p:cNvPr id="90" name="SlideNum"/>
+          <p:cNvSpPr txBox="1"/>
+          <p:nvPr/>
+        </p:nvSpPr>
+        <p:spPr>
+          <a:xfrm>
+            <a:off x="11384280" y="6446520"/>
+            <a:ext cx="640080" cy="292608"/>
+          </a:xfrm>
+          <a:prstGeom prst="rect">
+            <a:avLst/>
+          </a:prstGeom>
+          <a:noFill/>
+        </p:spPr>
+        <p:txBody>
+          <a:bodyPr wrap="none" lIns="0" tIns="0" rIns="45720" bIns="0" anchor="ctr"/>
+          <a:lstStyle/>
+          <a:p>
+            <a:pPr algn="r"/>
+            <a:r>
+              <a:t>220a</a:t>
+            </a:r>
+            <a:endParaRPr sz="1000" b="1">
+              <a:solidFill>
+                <a:srgbClr val="7A8A6E"/>
+              </a:solidFill>
+              <a:latin typeface="Calibri"/>
+            </a:endParaRPr>
+          </a:p>
+        </p:txBody>
+      </p:sp>
+    </p:spTree>
+  </p:cSld>
+  <p:clrMapOvr>
+    <a:masterClrMapping/>
+  </p:clrMapOvr>
+</p:sld>
+</file>
+
+<file path=ppt/slides/slide14.xml><?xml version="1.0" encoding="utf-8"?>
+<p:sld xmlns:a="http://schemas.openxmlformats.org/drawingml/2006/main" xmlns:p="http://schemas.openxmlformats.org/presentationml/2006/main" xmlns:r="http://schemas.openxmlformats.org/officeDocument/2006/relationships">
+  <p:cSld>
+    <p:spTree>
+      <p:nvGrpSpPr>
+        <p:cNvPr id="1" name=""/>
+        <p:cNvGrpSpPr/>
+        <p:nvPr/>
+      </p:nvGrpSpPr>
+      <p:grpSpPr/>
+      <p:sp>
+        <p:nvSpPr>
+          <p:cNvPr id="2" name="Rectangle 1"/>
+          <p:cNvSpPr/>
+          <p:nvPr/>
+        </p:nvSpPr>
+        <p:spPr>
+          <a:xfrm>
+            <a:off x="0" y="0"/>
+            <a:ext cx="12192000" cy="6858000"/>
+          </a:xfrm>
+          <a:prstGeom prst="rect">
+            <a:avLst/>
+          </a:prstGeom>
+          <a:solidFill>
+            <a:srgbClr val="FFFFFF"/>
+          </a:solidFill>
+          <a:ln>
+            <a:noFill/>
+          </a:ln>
+          <a:effectLst/>
+        </p:spPr>
+        <p:style>
+          <a:lnRef idx="1">
+            <a:schemeClr val="accent1"/>
+          </a:lnRef>
+          <a:fillRef idx="3">
+            <a:schemeClr val="accent1"/>
+          </a:fillRef>
+          <a:effectRef idx="2">
+            <a:schemeClr val="accent1"/>
+          </a:effectRef>
+          <a:fontRef idx="minor">
+            <a:schemeClr val="lt1"/>
+          </a:fontRef>
+        </p:style>
+        <p:txBody>
+          <a:bodyPr rtlCol="0" anchor="ctr"/>
+          <a:lstStyle/>
+          <a:p>
+            <a:pPr algn="ctr"/>
+          </a:p>
+        </p:txBody>
+      </p:sp>
+      <p:sp>
+        <p:nvSpPr>
+          <p:cNvPr id="3" name="TextBox 2"/>
+          <p:cNvSpPr txBox="1"/>
+          <p:nvPr/>
+        </p:nvSpPr>
+        <p:spPr>
+          <a:xfrm>
+            <a:off x="822960" y="502920"/>
+            <a:ext cx="10515600" cy="822960"/>
+          </a:xfrm>
+          <a:prstGeom prst="rect">
+            <a:avLst/>
+          </a:prstGeom>
+          <a:noFill/>
+        </p:spPr>
+        <p:txBody>
+          <a:bodyPr wrap="square">
+            <a:spAutoFit/>
+          </a:bodyPr>
+          <a:lstStyle/>
+          <a:p>
+            <a:r>
+              <a:rPr sz="2800" b="1">
+                <a:solidFill>
+                  <a:srgbClr val="2C5F2D"/>
+                </a:solidFill>
+                <a:latin typeface="Cambria"/>
+              </a:rPr>
+              <a:t>The Take-Home Sheet — the Daily Rhythm</a:t>
+            </a:r>
+          </a:p>
+        </p:txBody>
+      </p:sp>
+      <p:pic>
+        <p:nvPicPr>
+          <p:cNvPr id="4" name="Picture 3" descr="s18_part1.png"/>
+          <p:cNvPicPr>
+            <a:picLocks noChangeAspect="1"/>
+          </p:cNvPicPr>
+          <p:nvPr/>
+        </p:nvPicPr>
+        <p:blipFill>
+          <a:blip r:embed="rId2"/>
+          <a:stretch>
+            <a:fillRect/>
+          </a:stretch>
+        </p:blipFill>
+        <p:spPr>
+          <a:xfrm>
+            <a:off x="1798167" y="1463040"/>
+            <a:ext cx="8595360" cy="4039819"/>
+          </a:xfrm>
+          <a:prstGeom prst="rect">
+            <a:avLst/>
+          </a:prstGeom>
+          <a:ln w="12700">
+            <a:solidFill>
+              <a:srgbClr val="C8C8C8"/>
+            </a:solidFill>
+          </a:ln>
+        </p:spPr>
+      </p:pic>
+      <p:sp>
+        <p:nvSpPr>
+          <p:cNvPr id="5" name="TextBox 4"/>
+          <p:cNvSpPr txBox="1"/>
+          <p:nvPr/>
+        </p:nvSpPr>
+        <p:spPr>
+          <a:xfrm>
+            <a:off x="822960" y="6355080"/>
+            <a:ext cx="10515600" cy="411480"/>
+          </a:xfrm>
+          <a:prstGeom prst="rect">
+            <a:avLst/>
+          </a:prstGeom>
+          <a:noFill/>
+        </p:spPr>
+        <p:txBody>
+          <a:bodyPr wrap="square">
+            <a:spAutoFit/>
+          </a:bodyPr>
+          <a:lstStyle/>
+          <a:p>
+            <a:r>
+              <a:rPr sz="1400" i="1">
+                <a:solidFill>
+                  <a:srgbClr val="595959"/>
+                </a:solidFill>
+                <a:latin typeface="Calibri"/>
+              </a:rPr>
+              <a:t>Handed out now — this is the sheet in your hands.</a:t>
+            </a:r>
+          </a:p>
+        </p:txBody>
+      </p:sp>
+      <p:sp>
+        <p:nvSpPr>
+          <p:cNvPr id="90" name="SlideNum"/>
+          <p:cNvSpPr txBox="1"/>
+          <p:nvPr/>
+        </p:nvSpPr>
+        <p:spPr>
+          <a:xfrm>
+            <a:off x="11384280" y="6446520"/>
+            <a:ext cx="640080" cy="292608"/>
+          </a:xfrm>
+          <a:prstGeom prst="rect">
+            <a:avLst/>
+          </a:prstGeom>
+          <a:noFill/>
+        </p:spPr>
+        <p:txBody>
+          <a:bodyPr wrap="none" lIns="0" tIns="0" rIns="45720" bIns="0" anchor="ctr"/>
+          <a:lstStyle/>
+          <a:p>
+            <a:pPr algn="r"/>
+            <a:r>
+              <a:t>227</a:t>
+            </a:r>
+            <a:endParaRPr sz="1000" b="1">
+              <a:solidFill>
+                <a:srgbClr val="7A8A6E"/>
+              </a:solidFill>
+              <a:latin typeface="Calibri"/>
+            </a:endParaRPr>
+          </a:p>
+        </p:txBody>
+      </p:sp>
+    </p:spTree>
+  </p:cSld>
+  <p:clrMapOvr>
+    <a:masterClrMapping/>
+  </p:clrMapOvr>
+</p:sld>
+</file>
+
+<file path=ppt/slides/slide15.xml><?xml version="1.0" encoding="utf-8"?>
+<p:sld xmlns:a="http://schemas.openxmlformats.org/drawingml/2006/main" xmlns:p="http://schemas.openxmlformats.org/presentationml/2006/main" xmlns:r="http://schemas.openxmlformats.org/officeDocument/2006/relationships">
+  <p:cSld>
+    <p:spTree>
+      <p:nvGrpSpPr>
+        <p:cNvPr id="1" name=""/>
+        <p:cNvGrpSpPr/>
+        <p:nvPr/>
+      </p:nvGrpSpPr>
+      <p:grpSpPr/>
+      <p:sp>
+        <p:nvSpPr>
+          <p:cNvPr id="2" name="Rectangle 1"/>
+          <p:cNvSpPr/>
+          <p:nvPr/>
+        </p:nvSpPr>
+        <p:spPr>
+          <a:xfrm>
+            <a:off x="0" y="0"/>
+            <a:ext cx="12192000" cy="6858000"/>
+          </a:xfrm>
+          <a:prstGeom prst="rect">
+            <a:avLst/>
+          </a:prstGeom>
+          <a:solidFill>
+            <a:srgbClr val="FFFFFF"/>
+          </a:solidFill>
+          <a:ln>
+            <a:noFill/>
+          </a:ln>
+          <a:effectLst/>
+        </p:spPr>
+        <p:style>
+          <a:lnRef idx="1">
+            <a:schemeClr val="accent1"/>
+          </a:lnRef>
+          <a:fillRef idx="3">
+            <a:schemeClr val="accent1"/>
+          </a:fillRef>
+          <a:effectRef idx="2">
+            <a:schemeClr val="accent1"/>
+          </a:effectRef>
+          <a:fontRef idx="minor">
+            <a:schemeClr val="lt1"/>
+          </a:fontRef>
+        </p:style>
+        <p:txBody>
+          <a:bodyPr rtlCol="0" anchor="ctr"/>
+          <a:lstStyle/>
+          <a:p>
+            <a:pPr algn="ctr"/>
+          </a:p>
+        </p:txBody>
+      </p:sp>
+      <p:sp>
+        <p:nvSpPr>
+          <p:cNvPr id="3" name="TextBox 2"/>
+          <p:cNvSpPr txBox="1"/>
+          <p:nvPr/>
+        </p:nvSpPr>
+        <p:spPr>
+          <a:xfrm>
+            <a:off x="822960" y="502920"/>
+            <a:ext cx="10515600" cy="822960"/>
+          </a:xfrm>
+          <a:prstGeom prst="rect">
+            <a:avLst/>
+          </a:prstGeom>
+          <a:noFill/>
+        </p:spPr>
+        <p:txBody>
+          <a:bodyPr wrap="square">
+            <a:spAutoFit/>
+          </a:bodyPr>
+          <a:lstStyle/>
+          <a:p>
+            <a:r>
+              <a:rPr sz="2800" b="1">
+                <a:solidFill>
+                  <a:srgbClr val="2C5F2D"/>
+                </a:solidFill>
+                <a:latin typeface="Cambria"/>
+              </a:rPr>
+              <a:t>The Take-Home Sheet — the Four Parts</a:t>
+            </a:r>
+          </a:p>
+        </p:txBody>
+      </p:sp>
+      <p:pic>
+        <p:nvPicPr>
+          <p:cNvPr id="4" name="Picture 3" descr="s18_part2.png"/>
+          <p:cNvPicPr>
+            <a:picLocks noChangeAspect="1"/>
+          </p:cNvPicPr>
+          <p:nvPr/>
+        </p:nvPicPr>
+        <p:blipFill>
+          <a:blip r:embed="rId2"/>
+          <a:stretch>
+            <a:fillRect/>
+          </a:stretch>
+        </p:blipFill>
+        <p:spPr>
+          <a:xfrm>
+            <a:off x="2433167" y="1463040"/>
+            <a:ext cx="7325360" cy="4709160"/>
+          </a:xfrm>
+          <a:prstGeom prst="rect">
+            <a:avLst/>
+          </a:prstGeom>
+          <a:ln w="12700">
+            <a:solidFill>
+              <a:srgbClr val="C8C8C8"/>
+            </a:solidFill>
+          </a:ln>
+        </p:spPr>
+      </p:pic>
+      <p:sp>
+        <p:nvSpPr>
+          <p:cNvPr id="5" name="TextBox 4"/>
+          <p:cNvSpPr txBox="1"/>
+          <p:nvPr/>
+        </p:nvSpPr>
+        <p:spPr>
+          <a:xfrm>
+            <a:off x="822960" y="6355080"/>
+            <a:ext cx="10515600" cy="411480"/>
+          </a:xfrm>
+          <a:prstGeom prst="rect">
+            <a:avLst/>
+          </a:prstGeom>
+          <a:noFill/>
+        </p:spPr>
+        <p:txBody>
+          <a:bodyPr wrap="square">
+            <a:spAutoFit/>
+          </a:bodyPr>
+          <a:lstStyle/>
+          <a:p>
+            <a:r>
+              <a:rPr sz="1400" i="1">
+                <a:solidFill>
+                  <a:srgbClr val="595959"/>
+                </a:solidFill>
+                <a:latin typeface="Calibri"/>
+              </a:rPr>
+              <a:t>One practice at a time — and a partner expecting you at the end of week one.</a:t>
+            </a:r>
+          </a:p>
+        </p:txBody>
+      </p:sp>
+      <p:sp>
+        <p:nvSpPr>
+          <p:cNvPr id="90" name="SlideNum"/>
+          <p:cNvSpPr txBox="1"/>
+          <p:nvPr/>
+        </p:nvSpPr>
+        <p:spPr>
+          <a:xfrm>
+            <a:off x="11384280" y="6446520"/>
+            <a:ext cx="640080" cy="292608"/>
+          </a:xfrm>
+          <a:prstGeom prst="rect">
+            <a:avLst/>
+          </a:prstGeom>
+          <a:noFill/>
+        </p:spPr>
+        <p:txBody>
+          <a:bodyPr wrap="none" lIns="0" tIns="0" rIns="45720" bIns="0" anchor="ctr"/>
+          <a:lstStyle/>
+          <a:p>
+            <a:pPr algn="r"/>
+            <a:r>
+              <a:t>227a</a:t>
+            </a:r>
+            <a:endParaRPr sz="1000" b="1">
+              <a:solidFill>
+                <a:srgbClr val="7A8A6E"/>
+              </a:solidFill>
+              <a:latin typeface="Calibri"/>
+            </a:endParaRPr>
+          </a:p>
+        </p:txBody>
+      </p:sp>
+    </p:spTree>
+  </p:cSld>
+  <p:clrMapOvr>
+    <a:masterClrMapping/>
+  </p:clrMapOvr>
+</p:sld>
+</file>
+
+<file path=ppt/slides/slide2.xml><?xml version="1.0" encoding="utf-8"?>
 <p:sld xmlns:a="http://schemas.openxmlformats.org/drawingml/2006/main" xmlns:r="http://schemas.openxmlformats.org/officeDocument/2006/relationships" xmlns:p="http://schemas.openxmlformats.org/presentationml/2006/main">
   <p:cSld>
     <p:spTree>
@@ -5032,7 +6777,7 @@
 </p:sld>
 </file>
 
-<file path=ppt/slides/slide221.xml><?xml version="1.0" encoding="utf-8"?>
+<file path=ppt/slides/slide3.xml><?xml version="1.0" encoding="utf-8"?>
 <p:sld xmlns:a="http://schemas.openxmlformats.org/drawingml/2006/main" xmlns:r="http://schemas.openxmlformats.org/officeDocument/2006/relationships" xmlns:p="http://schemas.openxmlformats.org/presentationml/2006/main">
   <p:cSld>
     <p:spTree>
@@ -5433,7 +7178,7 @@
 </p:sld>
 </file>
 
-<file path=ppt/slides/slide222.xml><?xml version="1.0" encoding="utf-8"?>
+<file path=ppt/slides/slide4.xml><?xml version="1.0" encoding="utf-8"?>
 <p:sld xmlns:a="http://schemas.openxmlformats.org/drawingml/2006/main" xmlns:r="http://schemas.openxmlformats.org/officeDocument/2006/relationships" xmlns:p="http://schemas.openxmlformats.org/presentationml/2006/main">
   <p:cSld>
     <p:spTree>
@@ -5780,7 +7525,7 @@
 </p:sld>
 </file>
 
-<file path=ppt/slides/slide223.xml><?xml version="1.0" encoding="utf-8"?>
+<file path=ppt/slides/slide5.xml><?xml version="1.0" encoding="utf-8"?>
 <p:sld xmlns:a="http://schemas.openxmlformats.org/drawingml/2006/main" xmlns:r="http://schemas.openxmlformats.org/officeDocument/2006/relationships" xmlns:p="http://schemas.openxmlformats.org/presentationml/2006/main">
   <p:cSld>
     <p:spTree>
@@ -6107,7 +7852,7 @@
 </p:sld>
 </file>
 
-<file path=ppt/slides/slide224.xml><?xml version="1.0" encoding="utf-8"?>
+<file path=ppt/slides/slide6.xml><?xml version="1.0" encoding="utf-8"?>
 <p:sld xmlns:a="http://schemas.openxmlformats.org/drawingml/2006/main" xmlns:r="http://schemas.openxmlformats.org/officeDocument/2006/relationships" xmlns:p="http://schemas.openxmlformats.org/presentationml/2006/main">
   <p:cSld>
     <p:spTree>
@@ -6462,7 +8207,7 @@
 </p:sld>
 </file>
 
-<file path=ppt/slides/slide225.xml><?xml version="1.0" encoding="utf-8"?>
+<file path=ppt/slides/slide7.xml><?xml version="1.0" encoding="utf-8"?>
 <p:sld xmlns:a="http://schemas.openxmlformats.org/drawingml/2006/main" xmlns:r="http://schemas.openxmlformats.org/officeDocument/2006/relationships" xmlns:p="http://schemas.openxmlformats.org/presentationml/2006/main">
   <p:cSld>
     <p:spTree>
@@ -6759,7 +8504,7 @@
 </p:sld>
 </file>
 
-<file path=ppt/slides/slide226.xml><?xml version="1.0" encoding="utf-8"?>
+<file path=ppt/slides/slide8.xml><?xml version="1.0" encoding="utf-8"?>
 <p:sld xmlns:a="http://schemas.openxmlformats.org/drawingml/2006/main" xmlns:r="http://schemas.openxmlformats.org/officeDocument/2006/relationships" xmlns:p="http://schemas.openxmlformats.org/presentationml/2006/main">
   <p:cSld>
     <p:spTree>
@@ -7034,1220 +8779,6 @@
           </a:effectLst>
         </p:spPr>
       </p:pic>
-    </p:spTree>
-  </p:cSld>
-  <p:clrMapOvr>
-    <a:masterClrMapping/>
-  </p:clrMapOvr>
-</p:sld>
-</file>
-
-<file path=ppt/slides/slide227.xml><?xml version="1.0" encoding="utf-8"?>
-<p:sld xmlns:a="http://schemas.openxmlformats.org/drawingml/2006/main" xmlns:r="http://schemas.openxmlformats.org/officeDocument/2006/relationships" xmlns:p="http://schemas.openxmlformats.org/presentationml/2006/main">
-  <p:cSld>
-    <p:spTree>
-      <p:nvGrpSpPr>
-        <p:cNvPr id="1" name=""/>
-        <p:cNvGrpSpPr/>
-        <p:nvPr/>
-      </p:nvGrpSpPr>
-      <p:grpSpPr>
-        <a:xfrm>
-          <a:off x="0" y="0"/>
-          <a:ext cx="0" cy="0"/>
-          <a:chOff x="0" y="0"/>
-          <a:chExt cx="0" cy="0"/>
-        </a:xfrm>
-      </p:grpSpPr>
-      <p:sp>
-        <p:nvSpPr>
-          <p:cNvPr id="2" name="Rectangle 1"/>
-          <p:cNvSpPr/>
-          <p:nvPr/>
-        </p:nvSpPr>
-        <p:spPr>
-          <a:xfrm>
-            <a:off x="0" y="0"/>
-            <a:ext cx="12191695" cy="6858000"/>
-          </a:xfrm>
-          <a:prstGeom prst="rect">
-            <a:avLst/>
-          </a:prstGeom>
-          <a:solidFill>
-            <a:srgbClr val="FFFFFF"/>
-          </a:solidFill>
-          <a:ln>
-            <a:noFill/>
-          </a:ln>
-        </p:spPr>
-        <p:txBody>
-          <a:bodyPr/>
-          <a:lstStyle/>
-          <a:p>
-            <a:endParaRPr/>
-          </a:p>
-        </p:txBody>
-      </p:sp>
-      <p:sp>
-        <p:nvSpPr>
-          <p:cNvPr id="3" name="TextBox 2"/>
-          <p:cNvSpPr txBox="1"/>
-          <p:nvPr/>
-        </p:nvSpPr>
-        <p:spPr>
-          <a:xfrm>
-            <a:off x="822960" y="502920"/>
-            <a:ext cx="10515600" cy="822960"/>
-          </a:xfrm>
-          <a:prstGeom prst="rect">
-            <a:avLst/>
-          </a:prstGeom>
-          <a:noFill/>
-        </p:spPr>
-        <p:txBody>
-          <a:bodyPr wrap="square">
-            <a:spAutoFit/>
-          </a:bodyPr>
-          <a:lstStyle/>
-          <a:p>
-            <a:pPr algn="l">
-              <a:spcAft>
-                <a:spcPts val="600"/>
-              </a:spcAft>
-            </a:pPr>
-            <a:r>
-              <a:rPr sz="2800" b="1" i="0">
-                <a:solidFill>
-                  <a:srgbClr val="2C5F2D"/>
-                </a:solidFill>
-                <a:latin typeface="Cambria"/>
-              </a:rPr>
-              <a:t>Your Take-Home Card — This Session’s Practice</a:t>
-            </a:r>
-          </a:p>
-        </p:txBody>
-      </p:sp>
-      <p:sp>
-        <p:nvSpPr>
-          <p:cNvPr id="90" name="SlideNum"/>
-          <p:cNvSpPr txBox="1"/>
-          <p:nvPr/>
-        </p:nvSpPr>
-        <p:spPr>
-          <a:xfrm>
-            <a:off x="11384280" y="6446520"/>
-            <a:ext cx="640080" cy="292608"/>
-          </a:xfrm>
-          <a:prstGeom prst="rect">
-            <a:avLst/>
-          </a:prstGeom>
-          <a:noFill/>
-        </p:spPr>
-        <p:txBody>
-          <a:bodyPr wrap="none" lIns="0" tIns="0" rIns="45720" bIns="0" anchor="ctr"/>
-          <a:lstStyle/>
-          <a:p>
-            <a:pPr algn="r"/>
-            <a:r>
-              <a:t>227</a:t>
-            </a:r>
-            <a:endParaRPr sz="1000" b="1">
-              <a:solidFill>
-                <a:srgbClr val="7A8A6E"/>
-              </a:solidFill>
-              <a:latin typeface="Calibri"/>
-            </a:endParaRPr>
-          </a:p>
-        </p:txBody>
-      </p:sp>
-      <p:pic>
-        <p:nvPicPr>
-          <p:cNvPr id="270" name="CardImage" descr="the Week 18 check-off card, as handed out"/>
-          <p:cNvPicPr>
-            <a:picLocks noChangeAspect="1"/>
-          </p:cNvPicPr>
-          <p:nvPr/>
-        </p:nvPicPr>
-        <p:blipFill>
-          <a:blip r:embed="rId3"/>
-          <a:stretch>
-            <a:fillRect/>
-          </a:stretch>
-        </p:blipFill>
-        <p:spPr>
-          <a:xfrm>
-            <a:off x="1158087" y="1554480"/>
-            <a:ext cx="9875520" cy="3898231"/>
-          </a:xfrm>
-          <a:prstGeom prst="rect">
-            <a:avLst/>
-          </a:prstGeom>
-          <a:ln w="76200">
-            <a:solidFill>
-              <a:srgbClr val="FFFFFF"/>
-            </a:solidFill>
-          </a:ln>
-          <a:effectLst>
-            <a:outerShdw blurRad="63500" dist="25400" dir="5400000" rotWithShape="0">
-              <a:srgbClr val="000000">
-                <a:alpha val="35000"/>
-              </a:srgbClr>
-            </a:outerShdw>
-          </a:effectLst>
-        </p:spPr>
-      </p:pic>
-      <p:sp>
-        <p:nvSpPr>
-          <p:cNvPr id="271" name="Caption"/>
-          <p:cNvSpPr txBox="1"/>
-          <p:nvPr/>
-        </p:nvSpPr>
-        <p:spPr>
-          <a:xfrm>
-            <a:off x="822960" y="5635591"/>
-            <a:ext cx="10515600" cy="457200"/>
-          </a:xfrm>
-          <a:prstGeom prst="rect">
-            <a:avLst/>
-          </a:prstGeom>
-          <a:noFill/>
-        </p:spPr>
-        <p:txBody>
-          <a:bodyPr wrap="square"/>
-          <a:lstStyle/>
-          <a:p>
-            <a:pPr algn="ctr"/>
-            <a:r>
-              <a:rPr sz="1800" b="0" i="1">
-                <a:solidFill>
-                  <a:srgbClr val="222B22"/>
-                </a:solidFill>
-                <a:latin typeface="Calibri"/>
-              </a:rPr>
-              <a:t>Handed out now — fridge, mirror, journal pocket.</a:t>
-            </a:r>
-          </a:p>
-        </p:txBody>
-      </p:sp>
-    </p:spTree>
-  </p:cSld>
-  <p:clrMapOvr>
-    <a:masterClrMapping/>
-  </p:clrMapOvr>
-</p:sld>
-</file>
-
-<file path=ppt/slides/slide228.xml><?xml version="1.0" encoding="utf-8"?>
-<p:sld xmlns:a="http://schemas.openxmlformats.org/drawingml/2006/main" xmlns:r="http://schemas.openxmlformats.org/officeDocument/2006/relationships" xmlns:p="http://schemas.openxmlformats.org/presentationml/2006/main">
-  <p:cSld>
-    <p:spTree>
-      <p:nvGrpSpPr>
-        <p:cNvPr id="1" name=""/>
-        <p:cNvGrpSpPr/>
-        <p:nvPr/>
-      </p:nvGrpSpPr>
-      <p:grpSpPr>
-        <a:xfrm>
-          <a:off x="0" y="0"/>
-          <a:ext cx="0" cy="0"/>
-          <a:chOff x="0" y="0"/>
-          <a:chExt cx="0" cy="0"/>
-        </a:xfrm>
-      </p:grpSpPr>
-      <p:sp>
-        <p:nvSpPr>
-          <p:cNvPr id="2" name="Rectangle 1"/>
-          <p:cNvSpPr/>
-          <p:nvPr/>
-        </p:nvSpPr>
-        <p:spPr>
-          <a:xfrm>
-            <a:off x="0" y="0"/>
-            <a:ext cx="12191695" cy="6858000"/>
-          </a:xfrm>
-          <a:prstGeom prst="rect">
-            <a:avLst/>
-          </a:prstGeom>
-          <a:solidFill>
-            <a:srgbClr val="FFFFFF"/>
-          </a:solidFill>
-          <a:ln>
-            <a:noFill/>
-          </a:ln>
-        </p:spPr>
-        <p:txBody>
-          <a:bodyPr/>
-          <a:lstStyle/>
-          <a:p>
-            <a:endParaRPr/>
-          </a:p>
-        </p:txBody>
-      </p:sp>
-      <p:sp>
-        <p:nvSpPr>
-          <p:cNvPr id="3" name="TextBox 2"/>
-          <p:cNvSpPr txBox="1"/>
-          <p:nvPr/>
-        </p:nvSpPr>
-        <p:spPr>
-          <a:xfrm>
-            <a:off x="822960" y="502920"/>
-            <a:ext cx="10515600" cy="822960"/>
-          </a:xfrm>
-          <a:prstGeom prst="rect">
-            <a:avLst/>
-          </a:prstGeom>
-          <a:noFill/>
-        </p:spPr>
-        <p:txBody>
-          <a:bodyPr wrap="square">
-            <a:spAutoFit/>
-          </a:bodyPr>
-          <a:lstStyle/>
-          <a:p>
-            <a:pPr algn="l">
-              <a:spcAft>
-                <a:spcPts val="600"/>
-              </a:spcAft>
-            </a:pPr>
-            <a:r>
-              <a:rPr sz="2800" b="1" i="0">
-                <a:solidFill>
-                  <a:srgbClr val="2C5F2D"/>
-                </a:solidFill>
-                <a:latin typeface="Cambria"/>
-              </a:rPr>
-              <a:t>Closing the Container + Aaronic Blessing</a:t>
-            </a:r>
-          </a:p>
-        </p:txBody>
-      </p:sp>
-      <p:sp>
-        <p:nvSpPr>
-          <p:cNvPr id="4" name="TextBox 4"/>
-          <p:cNvSpPr txBox="1"/>
-          <p:nvPr/>
-        </p:nvSpPr>
-        <p:spPr>
-          <a:xfrm>
-            <a:off x="822960" y="1600200"/>
-            <a:ext cx="5669280" cy="4572000"/>
-          </a:xfrm>
-          <a:prstGeom prst="rect">
-            <a:avLst/>
-          </a:prstGeom>
-          <a:noFill/>
-        </p:spPr>
-        <p:txBody>
-          <a:bodyPr wrap="square" lIns="91440" tIns="91440" rIns="91440" bIns="91440"/>
-          <a:lstStyle/>
-          <a:p>
-            <a:pPr marL="274320" indent="-274320">
-              <a:spcAft>
-                <a:spcPts val="900"/>
-              </a:spcAft>
-            </a:pPr>
-            <a:r>
-              <a:rPr sz="2200" b="1" i="0">
-                <a:solidFill>
-                  <a:srgbClr val="97BC62"/>
-                </a:solidFill>
-                <a:latin typeface="Calibri"/>
-              </a:rPr>
-              <a:t>•  </a:t>
-            </a:r>
-            <a:r>
-              <a:rPr sz="2200" b="0" i="0">
-                <a:solidFill>
-                  <a:srgbClr val="222B22"/>
-                </a:solidFill>
-                <a:latin typeface="Calibri"/>
-              </a:rPr>
-              <a:t>We close the way we opened — the container, six steps:</a:t>
-            </a:r>
-          </a:p>
-          <a:p>
-            <a:pPr marL="685800" indent="-274320">
-              <a:spcAft>
-                <a:spcPts val="700"/>
-              </a:spcAft>
-            </a:pPr>
-            <a:r>
-              <a:rPr sz="2000" b="1" i="0">
-                <a:solidFill>
-                  <a:srgbClr val="97BC62"/>
-                </a:solidFill>
-                <a:latin typeface="Calibri"/>
-              </a:rPr>
-              <a:t>1   </a:t>
-            </a:r>
-            <a:r>
-              <a:rPr sz="2000" b="0" i="0">
-                <a:solidFill>
-                  <a:srgbClr val="222B22"/>
-                </a:solidFill>
-                <a:latin typeface="Calibri"/>
-              </a:rPr>
-              <a:t>Stand again — same circle, same posture as the open</a:t>
-            </a:r>
-          </a:p>
-          <a:p>
-            <a:pPr marL="685800" indent="-274320">
-              <a:spcAft>
-                <a:spcPts val="700"/>
-              </a:spcAft>
-            </a:pPr>
-            <a:r>
-              <a:rPr sz="2000" b="1" i="0">
-                <a:solidFill>
-                  <a:srgbClr val="97BC62"/>
-                </a:solidFill>
-                <a:latin typeface="Calibri"/>
-              </a:rPr>
-              <a:t>2   </a:t>
-            </a:r>
-            <a:r>
-              <a:rPr sz="2000" b="0" i="0">
-                <a:solidFill>
-                  <a:srgbClr val="222B22"/>
-                </a:solidFill>
-                <a:latin typeface="Calibri"/>
-              </a:rPr>
-              <a:t>One-word landing — compare it to your opening word</a:t>
-            </a:r>
-          </a:p>
-          <a:p>
-            <a:pPr marL="685800" indent="-274320">
-              <a:spcAft>
-                <a:spcPts val="700"/>
-              </a:spcAft>
-            </a:pPr>
-            <a:r>
-              <a:rPr sz="2000" b="1" i="0">
-                <a:solidFill>
-                  <a:srgbClr val="97BC62"/>
-                </a:solidFill>
-                <a:latin typeface="Calibri"/>
-              </a:rPr>
-              <a:t>3   </a:t>
-            </a:r>
-            <a:r>
-              <a:rPr sz="2000" b="0" i="0">
-                <a:solidFill>
-                  <a:srgbClr val="222B22"/>
-                </a:solidFill>
-                <a:latin typeface="Calibri"/>
-              </a:rPr>
-              <a:t>The one thing you are taking from tonight</a:t>
-            </a:r>
-          </a:p>
-          <a:p>
-            <a:pPr marL="685800" indent="-274320">
-              <a:spcAft>
-                <a:spcPts val="700"/>
-              </a:spcAft>
-            </a:pPr>
-            <a:r>
-              <a:rPr sz="2000" b="1" i="0">
-                <a:solidFill>
-                  <a:srgbClr val="97BC62"/>
-                </a:solidFill>
-                <a:latin typeface="Calibri"/>
-              </a:rPr>
-              <a:t>4   </a:t>
-            </a:r>
-            <a:r>
-              <a:rPr sz="2000" b="0" i="0">
-                <a:solidFill>
-                  <a:srgbClr val="222B22"/>
-                </a:solidFill>
-                <a:latin typeface="Calibri"/>
-              </a:rPr>
-              <a:t>The one practice — committed aloud, or modified to one you will actually keep</a:t>
-            </a:r>
-          </a:p>
-          <a:p>
-            <a:pPr marL="685800" indent="-274320">
-              <a:spcAft>
-                <a:spcPts val="700"/>
-              </a:spcAft>
-            </a:pPr>
-            <a:r>
-              <a:rPr sz="2000" b="1" i="0">
-                <a:solidFill>
-                  <a:srgbClr val="97BC62"/>
-                </a:solidFill>
-                <a:latin typeface="Calibri"/>
-              </a:rPr>
-              <a:t>5   </a:t>
-            </a:r>
-            <a:r>
-              <a:rPr sz="2000" b="0" i="0">
-                <a:solidFill>
-                  <a:srgbClr val="222B22"/>
-                </a:solidFill>
-                <a:latin typeface="Calibri"/>
-              </a:rPr>
-              <a:t>Blessings — specific, witnessed, short</a:t>
-            </a:r>
-          </a:p>
-          <a:p>
-            <a:pPr marL="685800" indent="-274320">
-              <a:spcAft>
-                <a:spcPts val="700"/>
-              </a:spcAft>
-            </a:pPr>
-            <a:r>
-              <a:rPr sz="2000" b="1" i="0">
-                <a:solidFill>
-                  <a:srgbClr val="97BC62"/>
-                </a:solidFill>
-                <a:latin typeface="Calibri"/>
-              </a:rPr>
-              <a:t>6   </a:t>
-            </a:r>
-            <a:r>
-              <a:rPr sz="2000" b="0" i="0">
-                <a:solidFill>
-                  <a:srgbClr val="222B22"/>
-                </a:solidFill>
-                <a:latin typeface="Calibri"/>
-              </a:rPr>
-              <a:t>Closing prayer — and the Aaronic blessing, spoken over each other, face to face</a:t>
-            </a:r>
-          </a:p>
-        </p:txBody>
-      </p:sp>
-      <p:sp>
-        <p:nvSpPr>
-          <p:cNvPr id="6" name="TextBox 6"/>
-          <p:cNvSpPr txBox="1"/>
-          <p:nvPr/>
-        </p:nvSpPr>
-        <p:spPr>
-          <a:xfrm>
-            <a:off x="6766560" y="1737360"/>
-            <a:ext cx="4663440" cy="2926080"/>
-          </a:xfrm>
-          <a:prstGeom prst="rect">
-            <a:avLst/>
-          </a:prstGeom>
-          <a:solidFill>
-            <a:srgbClr val="F1F6EC"/>
-          </a:solidFill>
-        </p:spPr>
-        <p:txBody>
-          <a:bodyPr wrap="square" lIns="91440" tIns="91440" rIns="91440" bIns="91440" anchor="ctr"/>
-          <a:lstStyle/>
-          <a:p>
-            <a:pPr>
-              <a:spcAft>
-                <a:spcPts val="900"/>
-              </a:spcAft>
-            </a:pPr>
-            <a:r>
-              <a:rPr sz="1200" b="1" i="0">
-                <a:solidFill>
-                  <a:srgbClr val="97BC62"/>
-                </a:solidFill>
-                <a:latin typeface="Calibri"/>
-              </a:rPr>
-              <a:t>THE AARONIC BLESSING — NUMBERS 6:24–26</a:t>
-            </a:r>
-          </a:p>
-          <a:p>
-            <a:pPr>
-              <a:spcAft>
-                <a:spcPts val="600"/>
-              </a:spcAft>
-            </a:pPr>
-            <a:r>
-              <a:rPr sz="2400" b="0" i="1">
-                <a:solidFill>
-                  <a:srgbClr val="222B22"/>
-                </a:solidFill>
-                <a:latin typeface="Cambria"/>
-              </a:rPr>
-              <a:t>“The Lord bless you and keep you;</a:t>
-            </a:r>
-          </a:p>
-          <a:p>
-            <a:pPr>
-              <a:spcAft>
-                <a:spcPts val="600"/>
-              </a:spcAft>
-            </a:pPr>
-            <a:r>
-              <a:rPr sz="2400" b="0" i="1">
-                <a:solidFill>
-                  <a:srgbClr val="222B22"/>
-                </a:solidFill>
-                <a:latin typeface="Cambria"/>
-              </a:rPr>
-              <a:t>the Lord make his face to shine upon you, and be gracious to you;</a:t>
-            </a:r>
-          </a:p>
-          <a:p>
-            <a:pPr>
-              <a:spcAft>
-                <a:spcPts val="600"/>
-              </a:spcAft>
-            </a:pPr>
-            <a:r>
-              <a:rPr sz="2400" b="0" i="1">
-                <a:solidFill>
-                  <a:srgbClr val="222B22"/>
-                </a:solidFill>
-                <a:latin typeface="Cambria"/>
-              </a:rPr>
-              <a:t>the Lord lift up his countenance upon you, and give you peace.”</a:t>
-            </a:r>
-          </a:p>
-        </p:txBody>
-      </p:sp>
-      <p:sp>
-        <p:nvSpPr>
-          <p:cNvPr id="90" name="SlideNum"/>
-          <p:cNvSpPr txBox="1"/>
-          <p:nvPr/>
-        </p:nvSpPr>
-        <p:spPr>
-          <a:xfrm>
-            <a:off x="11384280" y="6446520"/>
-            <a:ext cx="640080" cy="292608"/>
-          </a:xfrm>
-          <a:prstGeom prst="rect">
-            <a:avLst/>
-          </a:prstGeom>
-          <a:noFill/>
-        </p:spPr>
-        <p:txBody>
-          <a:bodyPr wrap="none" lIns="0" tIns="0" rIns="45720" bIns="0" anchor="ctr"/>
-          <a:lstStyle/>
-          <a:p>
-            <a:pPr algn="r"/>
-            <a:r>
-              <a:t>228</a:t>
-            </a:r>
-            <a:endParaRPr sz="1000" b="1">
-              <a:solidFill>
-                <a:srgbClr val="7A8A6E"/>
-              </a:solidFill>
-              <a:latin typeface="Calibri"/>
-            </a:endParaRPr>
-          </a:p>
-        </p:txBody>
-      </p:sp>
-    </p:spTree>
-  </p:cSld>
-  <p:clrMapOvr>
-    <a:masterClrMapping/>
-  </p:clrMapOvr>
-</p:sld>
-</file>
-
-<file path=ppt/slides/slide229.xml><?xml version="1.0" encoding="utf-8"?>
-<p:sld xmlns:a="http://schemas.openxmlformats.org/drawingml/2006/main" xmlns:r="http://schemas.openxmlformats.org/officeDocument/2006/relationships" xmlns:p="http://schemas.openxmlformats.org/presentationml/2006/main">
-  <p:cSld>
-    <p:spTree>
-      <p:nvGrpSpPr>
-        <p:cNvPr id="1" name=""/>
-        <p:cNvGrpSpPr/>
-        <p:nvPr/>
-      </p:nvGrpSpPr>
-      <p:grpSpPr>
-        <a:xfrm>
-          <a:off x="0" y="0"/>
-          <a:ext cx="0" cy="0"/>
-          <a:chOff x="0" y="0"/>
-          <a:chExt cx="0" cy="0"/>
-        </a:xfrm>
-      </p:grpSpPr>
-      <p:sp>
-        <p:nvSpPr>
-          <p:cNvPr id="2" name="Rectangle 1"/>
-          <p:cNvSpPr/>
-          <p:nvPr/>
-        </p:nvSpPr>
-        <p:spPr>
-          <a:xfrm>
-            <a:off x="0" y="0"/>
-            <a:ext cx="12191695" cy="6858000"/>
-          </a:xfrm>
-          <a:prstGeom prst="rect">
-            <a:avLst/>
-          </a:prstGeom>
-          <a:solidFill>
-            <a:srgbClr val="FFFFFF"/>
-          </a:solidFill>
-          <a:ln>
-            <a:noFill/>
-          </a:ln>
-        </p:spPr>
-        <p:txBody>
-          <a:bodyPr/>
-          <a:lstStyle/>
-          <a:p>
-            <a:endParaRPr/>
-          </a:p>
-        </p:txBody>
-      </p:sp>
-      <p:sp>
-        <p:nvSpPr>
-          <p:cNvPr id="3" name="TextBox 2"/>
-          <p:cNvSpPr txBox="1"/>
-          <p:nvPr/>
-        </p:nvSpPr>
-        <p:spPr>
-          <a:xfrm>
-            <a:off x="822960" y="502920"/>
-            <a:ext cx="10515600" cy="822960"/>
-          </a:xfrm>
-          <a:prstGeom prst="rect">
-            <a:avLst/>
-          </a:prstGeom>
-          <a:noFill/>
-        </p:spPr>
-        <p:txBody>
-          <a:bodyPr wrap="square">
-            <a:spAutoFit/>
-          </a:bodyPr>
-          <a:lstStyle/>
-          <a:p>
-            <a:pPr algn="l">
-              <a:spcAft>
-                <a:spcPts val="600"/>
-              </a:spcAft>
-            </a:pPr>
-            <a:r>
-              <a:rPr sz="2800" b="1" i="0">
-                <a:solidFill>
-                  <a:srgbClr val="2C5F2D"/>
-                </a:solidFill>
-                <a:latin typeface="Cambria"/>
-              </a:rPr>
-              <a:t>The Leader Feedback Round</a:t>
-            </a:r>
-          </a:p>
-        </p:txBody>
-      </p:sp>
-      <p:sp>
-        <p:nvSpPr>
-          <p:cNvPr id="4" name="TextBox 4"/>
-          <p:cNvSpPr txBox="1"/>
-          <p:nvPr/>
-        </p:nvSpPr>
-        <p:spPr>
-          <a:xfrm>
-            <a:off x="822960" y="1554480"/>
-            <a:ext cx="6675120" cy="4892040"/>
-          </a:xfrm>
-          <a:prstGeom prst="rect">
-            <a:avLst/>
-          </a:prstGeom>
-          <a:noFill/>
-        </p:spPr>
-        <p:txBody>
-          <a:bodyPr wrap="square" lIns="91440" tIns="91440" rIns="91440" bIns="91440"/>
-          <a:lstStyle/>
-          <a:p>
-            <a:pPr marL="274320" indent="-274320">
-              <a:spcAft>
-                <a:spcPts val="900"/>
-              </a:spcAft>
-            </a:pPr>
-            <a:r>
-              <a:rPr sz="2800" b="1" i="0">
-                <a:solidFill>
-                  <a:srgbClr val="97BC62"/>
-                </a:solidFill>
-                <a:latin typeface="Calibri"/>
-              </a:rPr>
-              <a:t>•  </a:t>
-            </a:r>
-            <a:r>
-              <a:rPr sz="2800" b="0" i="0">
-                <a:solidFill>
-                  <a:srgbClr val="222B22"/>
-                </a:solidFill>
-                <a:latin typeface="Calibri"/>
-              </a:rPr>
-              <a:t>Two rounds, same as every session — the container holder first, then the content presenter: three things each</a:t>
-            </a:r>
-          </a:p>
-          <a:p>
-            <a:pPr marL="685800" indent="-274320">
-              <a:spcAft>
-                <a:spcPts val="700"/>
-              </a:spcAft>
-            </a:pPr>
-            <a:r>
-              <a:rPr sz="2000" b="1" i="0">
-                <a:solidFill>
-                  <a:srgbClr val="97BC62"/>
-                </a:solidFill>
-                <a:latin typeface="Calibri"/>
-              </a:rPr>
-              <a:t>–  </a:t>
-            </a:r>
-            <a:r>
-              <a:rPr sz="2000" b="0" i="1">
-                <a:solidFill>
-                  <a:srgbClr val="222B22"/>
-                </a:solidFill>
-                <a:latin typeface="Calibri"/>
-              </a:rPr>
-              <a:t>“What I think went well tonight: ______”</a:t>
-            </a:r>
-          </a:p>
-          <a:p>
-            <a:pPr marL="685800" indent="-274320">
-              <a:spcAft>
-                <a:spcPts val="700"/>
-              </a:spcAft>
-            </a:pPr>
-            <a:r>
-              <a:rPr sz="2000" b="1" i="0">
-                <a:solidFill>
-                  <a:srgbClr val="97BC62"/>
-                </a:solidFill>
-                <a:latin typeface="Calibri"/>
-              </a:rPr>
-              <a:t>–  </a:t>
-            </a:r>
-            <a:r>
-              <a:rPr sz="2000" b="0" i="1">
-                <a:solidFill>
-                  <a:srgbClr val="222B22"/>
-                </a:solidFill>
-                <a:latin typeface="Calibri"/>
-              </a:rPr>
-              <a:t>“What I’d do differently next time: ______”</a:t>
-            </a:r>
-          </a:p>
-          <a:p>
-            <a:pPr marL="685800" indent="-274320">
-              <a:spcAft>
-                <a:spcPts val="700"/>
-              </a:spcAft>
-            </a:pPr>
-            <a:r>
-              <a:rPr sz="2000" b="1" i="0">
-                <a:solidFill>
-                  <a:srgbClr val="97BC62"/>
-                </a:solidFill>
-                <a:latin typeface="Calibri"/>
-              </a:rPr>
-              <a:t>–  </a:t>
-            </a:r>
-            <a:r>
-              <a:rPr sz="2000" b="0" i="1">
-                <a:solidFill>
-                  <a:srgbClr val="222B22"/>
-                </a:solidFill>
-                <a:latin typeface="Calibri"/>
-              </a:rPr>
-              <a:t>“If I were to teach tonight’s process to someone, I would tell them: ______”</a:t>
-            </a:r>
-          </a:p>
-          <a:p>
-            <a:pPr marL="274320" indent="-274320">
-              <a:spcAft>
-                <a:spcPts val="900"/>
-              </a:spcAft>
-            </a:pPr>
-            <a:r>
-              <a:rPr sz="2800" b="1" i="0">
-                <a:solidFill>
-                  <a:srgbClr val="97BC62"/>
-                </a:solidFill>
-                <a:latin typeface="Calibri"/>
-              </a:rPr>
-              <a:t>•  </a:t>
-            </a:r>
-            <a:r>
-              <a:rPr sz="2800" b="0" i="0">
-                <a:solidFill>
-                  <a:srgbClr val="222B22"/>
-                </a:solidFill>
-                <a:latin typeface="Calibri"/>
-              </a:rPr>
-              <a:t>Then the room — the same two questions about tonight</a:t>
-            </a:r>
-          </a:p>
-          <a:p>
-            <a:pPr marL="274320" indent="-274320">
-              <a:spcAft>
-                <a:spcPts val="900"/>
-              </a:spcAft>
-            </a:pPr>
-            <a:r>
-              <a:rPr sz="2800" b="1" i="0">
-                <a:solidFill>
-                  <a:srgbClr val="97BC62"/>
-                </a:solidFill>
-                <a:latin typeface="Calibri"/>
-              </a:rPr>
-              <a:t>•  </a:t>
-            </a:r>
-            <a:r>
-              <a:rPr sz="2800" b="0" i="0">
-                <a:solidFill>
-                  <a:srgbClr val="222B22"/>
-                </a:solidFill>
-                <a:latin typeface="Calibri"/>
-              </a:rPr>
-              <a:t>The leaders receive without defending — “thank you” is the whole response</a:t>
-            </a:r>
-          </a:p>
-        </p:txBody>
-      </p:sp>
-      <p:sp>
-        <p:nvSpPr>
-          <p:cNvPr id="90" name="SlideNum"/>
-          <p:cNvSpPr txBox="1"/>
-          <p:nvPr/>
-        </p:nvSpPr>
-        <p:spPr>
-          <a:xfrm>
-            <a:off x="11384280" y="6446520"/>
-            <a:ext cx="640080" cy="292608"/>
-          </a:xfrm>
-          <a:prstGeom prst="rect">
-            <a:avLst/>
-          </a:prstGeom>
-          <a:noFill/>
-        </p:spPr>
-        <p:txBody>
-          <a:bodyPr wrap="none" lIns="0" tIns="0" rIns="45720" bIns="0" anchor="ctr"/>
-          <a:lstStyle/>
-          <a:p>
-            <a:pPr algn="r"/>
-            <a:r>
-              <a:t>229</a:t>
-            </a:r>
-            <a:endParaRPr sz="1000" b="1">
-              <a:solidFill>
-                <a:srgbClr val="7A8A6E"/>
-              </a:solidFill>
-              <a:latin typeface="Calibri"/>
-            </a:endParaRPr>
-          </a:p>
-        </p:txBody>
-      </p:sp>
-      <p:pic>
-        <p:nvPicPr>
-          <p:cNvPr id="33" name="Picture 33" descr="compass on the trail - the weekly bearing check"/>
-          <p:cNvPicPr>
-            <a:picLocks noChangeAspect="1"/>
-          </p:cNvPicPr>
-          <p:nvPr/>
-        </p:nvPicPr>
-        <p:blipFill>
-          <a:blip r:embed="rId3"/>
-          <a:stretch>
-            <a:fillRect/>
-          </a:stretch>
-        </p:blipFill>
-        <p:spPr>
-          <a:xfrm>
-            <a:off x="8106160" y="1463040"/>
-            <a:ext cx="3259831" cy="4892040"/>
-          </a:xfrm>
-          <a:prstGeom prst="rect">
-            <a:avLst/>
-          </a:prstGeom>
-          <a:ln w="76200">
-            <a:solidFill>
-              <a:srgbClr val="FFFFFF"/>
-            </a:solidFill>
-          </a:ln>
-          <a:effectLst>
-            <a:outerShdw blurRad="63500" dist="25400" dir="5400000" rotWithShape="0">
-              <a:srgbClr val="000000">
-                <a:alpha val="35000"/>
-              </a:srgbClr>
-            </a:outerShdw>
-          </a:effectLst>
-        </p:spPr>
-      </p:pic>
-    </p:spTree>
-  </p:cSld>
-  <p:clrMapOvr>
-    <a:masterClrMapping/>
-  </p:clrMapOvr>
-</p:sld>
-</file>
-
-<file path=ppt/slides/slide230.xml><?xml version="1.0" encoding="utf-8"?>
-<p:sld xmlns:a="http://schemas.openxmlformats.org/drawingml/2006/main" xmlns:r="http://schemas.openxmlformats.org/officeDocument/2006/relationships" xmlns:p="http://schemas.openxmlformats.org/presentationml/2006/main">
-  <p:cSld>
-    <p:spTree>
-      <p:nvGrpSpPr>
-        <p:cNvPr id="1" name=""/>
-        <p:cNvGrpSpPr/>
-        <p:nvPr/>
-      </p:nvGrpSpPr>
-      <p:grpSpPr>
-        <a:xfrm>
-          <a:off x="0" y="0"/>
-          <a:ext cx="0" cy="0"/>
-          <a:chOff x="0" y="0"/>
-          <a:chExt cx="0" cy="0"/>
-        </a:xfrm>
-      </p:grpSpPr>
-      <p:sp>
-        <p:nvSpPr>
-          <p:cNvPr id="2" name="Rectangle 1"/>
-          <p:cNvSpPr/>
-          <p:nvPr/>
-        </p:nvSpPr>
-        <p:spPr>
-          <a:xfrm>
-            <a:off x="0" y="0"/>
-            <a:ext cx="12191695" cy="6858000"/>
-          </a:xfrm>
-          <a:prstGeom prst="rect">
-            <a:avLst/>
-          </a:prstGeom>
-          <a:solidFill>
-            <a:srgbClr val="FFFFFF"/>
-          </a:solidFill>
-          <a:ln>
-            <a:noFill/>
-          </a:ln>
-        </p:spPr>
-        <p:txBody>
-          <a:bodyPr/>
-          <a:lstStyle/>
-          <a:p>
-            <a:endParaRPr/>
-          </a:p>
-        </p:txBody>
-      </p:sp>
-      <p:sp>
-        <p:nvSpPr>
-          <p:cNvPr id="3" name="TextBox 2"/>
-          <p:cNvSpPr txBox="1"/>
-          <p:nvPr/>
-        </p:nvSpPr>
-        <p:spPr>
-          <a:xfrm>
-            <a:off x="822960" y="502920"/>
-            <a:ext cx="10515600" cy="822960"/>
-          </a:xfrm>
-          <a:prstGeom prst="rect">
-            <a:avLst/>
-          </a:prstGeom>
-          <a:noFill/>
-        </p:spPr>
-        <p:txBody>
-          <a:bodyPr wrap="square">
-            <a:spAutoFit/>
-          </a:bodyPr>
-          <a:lstStyle/>
-          <a:p>
-            <a:pPr algn="l">
-              <a:spcAft>
-                <a:spcPts val="600"/>
-              </a:spcAft>
-            </a:pPr>
-            <a:r>
-              <a:rPr sz="2800" b="1" i="0">
-                <a:solidFill>
-                  <a:srgbClr val="2C5F2D"/>
-                </a:solidFill>
-                <a:latin typeface="Cambria"/>
-              </a:rPr>
-              <a:t>Aaronic Blessing and Sending</a:t>
-            </a:r>
-          </a:p>
-        </p:txBody>
-      </p:sp>
-      <p:sp>
-        <p:nvSpPr>
-          <p:cNvPr id="4" name="TextBox 4"/>
-          <p:cNvSpPr txBox="1"/>
-          <p:nvPr/>
-        </p:nvSpPr>
-        <p:spPr>
-          <a:xfrm>
-            <a:off x="822960" y="1600200"/>
-            <a:ext cx="5669280" cy="4572000"/>
-          </a:xfrm>
-          <a:prstGeom prst="rect">
-            <a:avLst/>
-          </a:prstGeom>
-          <a:noFill/>
-        </p:spPr>
-        <p:txBody>
-          <a:bodyPr wrap="square" lIns="91440" tIns="91440" rIns="91440" bIns="91440"/>
-          <a:lstStyle/>
-          <a:p>
-            <a:pPr marL="274320" indent="-274320">
-              <a:spcAft>
-                <a:spcPts val="800"/>
-              </a:spcAft>
-            </a:pPr>
-            <a:r>
-              <a:rPr sz="2800" b="1" i="0">
-                <a:solidFill>
-                  <a:srgbClr val="97BC62"/>
-                </a:solidFill>
-                <a:latin typeface="Calibri"/>
-              </a:rPr>
-              <a:t>•  </a:t>
-            </a:r>
-            <a:r>
-              <a:rPr sz="2800" b="0" i="0">
-                <a:solidFill>
-                  <a:srgbClr val="222B22"/>
-                </a:solidFill>
-                <a:latin typeface="Calibri"/>
-              </a:rPr>
-              <a:t>“One sentence for the road: you came back tonight like people who know the way — because you do now.”</a:t>
-            </a:r>
-          </a:p>
-          <a:p>
-            <a:pPr marL="274320" indent="-274320">
-              <a:spcAft>
-                <a:spcPts val="800"/>
-              </a:spcAft>
-            </a:pPr>
-            <a:r>
-              <a:rPr sz="2800" b="1" i="0">
-                <a:solidFill>
-                  <a:srgbClr val="97BC62"/>
-                </a:solidFill>
-                <a:latin typeface="Calibri"/>
-              </a:rPr>
-              <a:t>•  </a:t>
-            </a:r>
-            <a:r>
-              <a:rPr sz="2800" b="0" i="0">
-                <a:solidFill>
-                  <a:srgbClr val="222B22"/>
-                </a:solidFill>
-                <a:latin typeface="Calibri"/>
-              </a:rPr>
-              <a:t>“Five weeks to the sending. Let us not grow weary; the season is His, and it is nearly harvest.”</a:t>
-            </a:r>
-          </a:p>
-          <a:p>
-            <a:pPr marL="274320" indent="-274320">
-              <a:spcAft>
-                <a:spcPts val="800"/>
-              </a:spcAft>
-            </a:pPr>
-            <a:r>
-              <a:rPr sz="2800" b="1" i="0">
-                <a:solidFill>
-                  <a:srgbClr val="97BC62"/>
-                </a:solidFill>
-                <a:latin typeface="Calibri"/>
-              </a:rPr>
-              <a:t>•  </a:t>
-            </a:r>
-            <a:r>
-              <a:rPr sz="2800" b="0" i="0">
-                <a:solidFill>
-                  <a:srgbClr val="222B22"/>
-                </a:solidFill>
-                <a:latin typeface="Calibri"/>
-              </a:rPr>
-              <a:t>“See you Wednesday. Week 19 — the teens have the cards.”</a:t>
-            </a:r>
-          </a:p>
-        </p:txBody>
-      </p:sp>
-      <p:sp>
-        <p:nvSpPr>
-          <p:cNvPr id="6" name="TextBox 6"/>
-          <p:cNvSpPr txBox="1"/>
-          <p:nvPr/>
-        </p:nvSpPr>
-        <p:spPr>
-          <a:xfrm>
-            <a:off x="6766560" y="1737360"/>
-            <a:ext cx="4663440" cy="2542032"/>
-          </a:xfrm>
-          <a:prstGeom prst="rect">
-            <a:avLst/>
-          </a:prstGeom>
-          <a:solidFill>
-            <a:srgbClr val="F1F6EC"/>
-          </a:solidFill>
-        </p:spPr>
-        <p:txBody>
-          <a:bodyPr wrap="square" lIns="91440" tIns="91440" rIns="91440" bIns="91440" anchor="ctr"/>
-          <a:lstStyle/>
-          <a:p>
-            <a:pPr>
-              <a:spcAft>
-                <a:spcPts val="900"/>
-              </a:spcAft>
-            </a:pPr>
-            <a:r>
-              <a:rPr sz="1200" b="1" i="0">
-                <a:solidFill>
-                  <a:srgbClr val="97BC62"/>
-                </a:solidFill>
-                <a:latin typeface="Calibri"/>
-              </a:rPr>
-              <a:t>NUMBERS 6:24–26</a:t>
-            </a:r>
-          </a:p>
-          <a:p>
-            <a:pPr>
-              <a:spcAft>
-                <a:spcPts val="600"/>
-              </a:spcAft>
-            </a:pPr>
-            <a:r>
-              <a:rPr sz="2400" b="0" i="1">
-                <a:solidFill>
-                  <a:srgbClr val="222B22"/>
-                </a:solidFill>
-                <a:latin typeface="Cambria"/>
-              </a:rPr>
-              <a:t>“The Lord bless you and keep you; the Lord make His face shine on you and be gracious to you; the Lord turn His face toward you and give you peace.”</a:t>
-            </a:r>
-          </a:p>
-        </p:txBody>
-      </p:sp>
-      <p:sp>
-        <p:nvSpPr>
-          <p:cNvPr id="90" name="SlideNum"/>
-          <p:cNvSpPr txBox="1"/>
-          <p:nvPr/>
-        </p:nvSpPr>
-        <p:spPr>
-          <a:xfrm>
-            <a:off x="11384280" y="6446520"/>
-            <a:ext cx="640080" cy="292608"/>
-          </a:xfrm>
-          <a:prstGeom prst="rect">
-            <a:avLst/>
-          </a:prstGeom>
-          <a:noFill/>
-        </p:spPr>
-        <p:txBody>
-          <a:bodyPr wrap="none" lIns="0" tIns="0" rIns="45720" bIns="0" anchor="ctr"/>
-          <a:lstStyle/>
-          <a:p>
-            <a:pPr algn="r"/>
-            <a:r>
-              <a:t>230</a:t>
-            </a:r>
-            <a:endParaRPr sz="1000" b="1">
-              <a:solidFill>
-                <a:srgbClr val="7A8A6E"/>
-              </a:solidFill>
-              <a:latin typeface="Calibri"/>
-            </a:endParaRPr>
-          </a:p>
-        </p:txBody>
-      </p:sp>
     </p:spTree>
   </p:cSld>
   <p:clrMapOvr>

--- a/_implementation-notes/evening-series/FotH Evening Session 18 Slides DRAFT v1.pptx
+++ b/_implementation-notes/evening-series/FotH Evening Session 18 Slides DRAFT v1.pptx
@@ -4921,6 +4921,390 @@
 </file>
 
 <file path=ppt/slides/slide10.xml><?xml version="1.0" encoding="utf-8"?>
+<p:sld xmlns:a="http://schemas.openxmlformats.org/drawingml/2006/main" xmlns:p="http://schemas.openxmlformats.org/presentationml/2006/main" xmlns:r="http://schemas.openxmlformats.org/officeDocument/2006/relationships">
+  <p:cSld>
+    <p:spTree>
+      <p:nvGrpSpPr>
+        <p:cNvPr id="1" name=""/>
+        <p:cNvGrpSpPr/>
+        <p:nvPr/>
+      </p:nvGrpSpPr>
+      <p:grpSpPr/>
+      <p:sp>
+        <p:nvSpPr>
+          <p:cNvPr id="2" name="Rectangle 1"/>
+          <p:cNvSpPr/>
+          <p:nvPr/>
+        </p:nvSpPr>
+        <p:spPr>
+          <a:xfrm>
+            <a:off x="0" y="0"/>
+            <a:ext cx="12192000" cy="6858000"/>
+          </a:xfrm>
+          <a:prstGeom prst="rect">
+            <a:avLst/>
+          </a:prstGeom>
+          <a:solidFill>
+            <a:srgbClr val="FFFFFF"/>
+          </a:solidFill>
+          <a:ln>
+            <a:noFill/>
+          </a:ln>
+          <a:effectLst/>
+        </p:spPr>
+        <p:style>
+          <a:lnRef idx="1">
+            <a:schemeClr val="accent1"/>
+          </a:lnRef>
+          <a:fillRef idx="3">
+            <a:schemeClr val="accent1"/>
+          </a:fillRef>
+          <a:effectRef idx="2">
+            <a:schemeClr val="accent1"/>
+          </a:effectRef>
+          <a:fontRef idx="minor">
+            <a:schemeClr val="lt1"/>
+          </a:fontRef>
+        </p:style>
+        <p:txBody>
+          <a:bodyPr rtlCol="0" anchor="ctr"/>
+          <a:lstStyle/>
+          <a:p>
+            <a:pPr algn="ctr"/>
+          </a:p>
+        </p:txBody>
+      </p:sp>
+      <p:sp>
+        <p:nvSpPr>
+          <p:cNvPr id="3" name="TextBox 2"/>
+          <p:cNvSpPr txBox="1"/>
+          <p:nvPr/>
+        </p:nvSpPr>
+        <p:spPr>
+          <a:xfrm>
+            <a:off x="822960" y="502920"/>
+            <a:ext cx="10515600" cy="822960"/>
+          </a:xfrm>
+          <a:prstGeom prst="rect">
+            <a:avLst/>
+          </a:prstGeom>
+          <a:noFill/>
+        </p:spPr>
+        <p:txBody>
+          <a:bodyPr wrap="square">
+            <a:spAutoFit/>
+          </a:bodyPr>
+          <a:lstStyle/>
+          <a:p>
+            <a:r>
+              <a:rPr sz="2800" b="1">
+                <a:solidFill>
+                  <a:srgbClr val="2C5F2D"/>
+                </a:solidFill>
+                <a:latin typeface="Cambria"/>
+              </a:rPr>
+              <a:t>The Take-Home Sheet — the Daily Rhythm</a:t>
+            </a:r>
+          </a:p>
+        </p:txBody>
+      </p:sp>
+      <p:pic>
+        <p:nvPicPr>
+          <p:cNvPr id="4" name="Picture 3" descr="s18_part1.png"/>
+          <p:cNvPicPr>
+            <a:picLocks noChangeAspect="1"/>
+          </p:cNvPicPr>
+          <p:nvPr/>
+        </p:nvPicPr>
+        <p:blipFill>
+          <a:blip r:embed="rId2"/>
+          <a:stretch>
+            <a:fillRect/>
+          </a:stretch>
+        </p:blipFill>
+        <p:spPr>
+          <a:xfrm>
+            <a:off x="1798167" y="1463040"/>
+            <a:ext cx="8595360" cy="4039819"/>
+          </a:xfrm>
+          <a:prstGeom prst="rect">
+            <a:avLst/>
+          </a:prstGeom>
+          <a:ln w="12700">
+            <a:solidFill>
+              <a:srgbClr val="C8C8C8"/>
+            </a:solidFill>
+          </a:ln>
+        </p:spPr>
+      </p:pic>
+      <p:sp>
+        <p:nvSpPr>
+          <p:cNvPr id="5" name="TextBox 4"/>
+          <p:cNvSpPr txBox="1"/>
+          <p:nvPr/>
+        </p:nvSpPr>
+        <p:spPr>
+          <a:xfrm>
+            <a:off x="822960" y="6355080"/>
+            <a:ext cx="10515600" cy="411480"/>
+          </a:xfrm>
+          <a:prstGeom prst="rect">
+            <a:avLst/>
+          </a:prstGeom>
+          <a:noFill/>
+        </p:spPr>
+        <p:txBody>
+          <a:bodyPr wrap="square">
+            <a:spAutoFit/>
+          </a:bodyPr>
+          <a:lstStyle/>
+          <a:p>
+            <a:r>
+              <a:rPr sz="1400" i="1">
+                <a:solidFill>
+                  <a:srgbClr val="595959"/>
+                </a:solidFill>
+                <a:latin typeface="Calibri"/>
+              </a:rPr>
+              <a:t>Handed out now — this is the sheet in your hands.</a:t>
+            </a:r>
+          </a:p>
+        </p:txBody>
+      </p:sp>
+      <p:sp>
+        <p:nvSpPr>
+          <p:cNvPr id="90" name="SlideNum"/>
+          <p:cNvSpPr txBox="1"/>
+          <p:nvPr/>
+        </p:nvSpPr>
+        <p:spPr>
+          <a:xfrm>
+            <a:off x="11384280" y="6446520"/>
+            <a:ext cx="640080" cy="292608"/>
+          </a:xfrm>
+          <a:prstGeom prst="rect">
+            <a:avLst/>
+          </a:prstGeom>
+          <a:noFill/>
+        </p:spPr>
+        <p:txBody>
+          <a:bodyPr wrap="none" lIns="0" tIns="0" rIns="45720" bIns="0" anchor="ctr"/>
+          <a:lstStyle/>
+          <a:p>
+            <a:pPr algn="r"/>
+            <a:r>
+              <a:t>227</a:t>
+            </a:r>
+            <a:endParaRPr sz="1000" b="1">
+              <a:solidFill>
+                <a:srgbClr val="7A8A6E"/>
+              </a:solidFill>
+              <a:latin typeface="Calibri"/>
+            </a:endParaRPr>
+          </a:p>
+        </p:txBody>
+      </p:sp>
+    </p:spTree>
+  </p:cSld>
+  <p:clrMapOvr>
+    <a:masterClrMapping/>
+  </p:clrMapOvr>
+</p:sld>
+</file>
+
+<file path=ppt/slides/slide11.xml><?xml version="1.0" encoding="utf-8"?>
+<p:sld xmlns:a="http://schemas.openxmlformats.org/drawingml/2006/main" xmlns:p="http://schemas.openxmlformats.org/presentationml/2006/main" xmlns:r="http://schemas.openxmlformats.org/officeDocument/2006/relationships">
+  <p:cSld>
+    <p:spTree>
+      <p:nvGrpSpPr>
+        <p:cNvPr id="1" name=""/>
+        <p:cNvGrpSpPr/>
+        <p:nvPr/>
+      </p:nvGrpSpPr>
+      <p:grpSpPr/>
+      <p:sp>
+        <p:nvSpPr>
+          <p:cNvPr id="2" name="Rectangle 1"/>
+          <p:cNvSpPr/>
+          <p:nvPr/>
+        </p:nvSpPr>
+        <p:spPr>
+          <a:xfrm>
+            <a:off x="0" y="0"/>
+            <a:ext cx="12192000" cy="6858000"/>
+          </a:xfrm>
+          <a:prstGeom prst="rect">
+            <a:avLst/>
+          </a:prstGeom>
+          <a:solidFill>
+            <a:srgbClr val="FFFFFF"/>
+          </a:solidFill>
+          <a:ln>
+            <a:noFill/>
+          </a:ln>
+          <a:effectLst/>
+        </p:spPr>
+        <p:style>
+          <a:lnRef idx="1">
+            <a:schemeClr val="accent1"/>
+          </a:lnRef>
+          <a:fillRef idx="3">
+            <a:schemeClr val="accent1"/>
+          </a:fillRef>
+          <a:effectRef idx="2">
+            <a:schemeClr val="accent1"/>
+          </a:effectRef>
+          <a:fontRef idx="minor">
+            <a:schemeClr val="lt1"/>
+          </a:fontRef>
+        </p:style>
+        <p:txBody>
+          <a:bodyPr rtlCol="0" anchor="ctr"/>
+          <a:lstStyle/>
+          <a:p>
+            <a:pPr algn="ctr"/>
+          </a:p>
+        </p:txBody>
+      </p:sp>
+      <p:sp>
+        <p:nvSpPr>
+          <p:cNvPr id="3" name="TextBox 2"/>
+          <p:cNvSpPr txBox="1"/>
+          <p:nvPr/>
+        </p:nvSpPr>
+        <p:spPr>
+          <a:xfrm>
+            <a:off x="822960" y="502920"/>
+            <a:ext cx="10515600" cy="822960"/>
+          </a:xfrm>
+          <a:prstGeom prst="rect">
+            <a:avLst/>
+          </a:prstGeom>
+          <a:noFill/>
+        </p:spPr>
+        <p:txBody>
+          <a:bodyPr wrap="square">
+            <a:spAutoFit/>
+          </a:bodyPr>
+          <a:lstStyle/>
+          <a:p>
+            <a:r>
+              <a:rPr sz="2800" b="1">
+                <a:solidFill>
+                  <a:srgbClr val="2C5F2D"/>
+                </a:solidFill>
+                <a:latin typeface="Cambria"/>
+              </a:rPr>
+              <a:t>The Take-Home Sheet — the Four Parts</a:t>
+            </a:r>
+          </a:p>
+        </p:txBody>
+      </p:sp>
+      <p:pic>
+        <p:nvPicPr>
+          <p:cNvPr id="4" name="Picture 3" descr="s18_part2.png"/>
+          <p:cNvPicPr>
+            <a:picLocks noChangeAspect="1"/>
+          </p:cNvPicPr>
+          <p:nvPr/>
+        </p:nvPicPr>
+        <p:blipFill>
+          <a:blip r:embed="rId2"/>
+          <a:stretch>
+            <a:fillRect/>
+          </a:stretch>
+        </p:blipFill>
+        <p:spPr>
+          <a:xfrm>
+            <a:off x="2433167" y="1463040"/>
+            <a:ext cx="7325360" cy="4709160"/>
+          </a:xfrm>
+          <a:prstGeom prst="rect">
+            <a:avLst/>
+          </a:prstGeom>
+          <a:ln w="12700">
+            <a:solidFill>
+              <a:srgbClr val="C8C8C8"/>
+            </a:solidFill>
+          </a:ln>
+        </p:spPr>
+      </p:pic>
+      <p:sp>
+        <p:nvSpPr>
+          <p:cNvPr id="5" name="TextBox 4"/>
+          <p:cNvSpPr txBox="1"/>
+          <p:nvPr/>
+        </p:nvSpPr>
+        <p:spPr>
+          <a:xfrm>
+            <a:off x="822960" y="6355080"/>
+            <a:ext cx="10515600" cy="411480"/>
+          </a:xfrm>
+          <a:prstGeom prst="rect">
+            <a:avLst/>
+          </a:prstGeom>
+          <a:noFill/>
+        </p:spPr>
+        <p:txBody>
+          <a:bodyPr wrap="square">
+            <a:spAutoFit/>
+          </a:bodyPr>
+          <a:lstStyle/>
+          <a:p>
+            <a:r>
+              <a:rPr sz="1400" i="1">
+                <a:solidFill>
+                  <a:srgbClr val="595959"/>
+                </a:solidFill>
+                <a:latin typeface="Calibri"/>
+              </a:rPr>
+              <a:t>One practice at a time — and a partner expecting you at the end of week one.</a:t>
+            </a:r>
+          </a:p>
+        </p:txBody>
+      </p:sp>
+      <p:sp>
+        <p:nvSpPr>
+          <p:cNvPr id="90" name="SlideNum"/>
+          <p:cNvSpPr txBox="1"/>
+          <p:nvPr/>
+        </p:nvSpPr>
+        <p:spPr>
+          <a:xfrm>
+            <a:off x="11384280" y="6446520"/>
+            <a:ext cx="640080" cy="292608"/>
+          </a:xfrm>
+          <a:prstGeom prst="rect">
+            <a:avLst/>
+          </a:prstGeom>
+          <a:noFill/>
+        </p:spPr>
+        <p:txBody>
+          <a:bodyPr wrap="none" lIns="0" tIns="0" rIns="45720" bIns="0" anchor="ctr"/>
+          <a:lstStyle/>
+          <a:p>
+            <a:pPr algn="r"/>
+            <a:r>
+              <a:t>227a</a:t>
+            </a:r>
+            <a:endParaRPr sz="1000" b="1">
+              <a:solidFill>
+                <a:srgbClr val="7A8A6E"/>
+              </a:solidFill>
+              <a:latin typeface="Calibri"/>
+            </a:endParaRPr>
+          </a:p>
+        </p:txBody>
+      </p:sp>
+    </p:spTree>
+  </p:cSld>
+  <p:clrMapOvr>
+    <a:masterClrMapping/>
+  </p:clrMapOvr>
+</p:sld>
+</file>
+
+<file path=ppt/slides/slide12.xml><?xml version="1.0" encoding="utf-8"?>
 <p:sld xmlns:a="http://schemas.openxmlformats.org/drawingml/2006/main" xmlns:r="http://schemas.openxmlformats.org/officeDocument/2006/relationships" xmlns:p="http://schemas.openxmlformats.org/presentationml/2006/main">
   <p:cSld>
     <p:spTree>
@@ -5329,7 +5713,7 @@
 </p:sld>
 </file>
 
-<file path=ppt/slides/slide11.xml><?xml version="1.0" encoding="utf-8"?>
+<file path=ppt/slides/slide13.xml><?xml version="1.0" encoding="utf-8"?>
 <p:sld xmlns:a="http://schemas.openxmlformats.org/drawingml/2006/main" xmlns:r="http://schemas.openxmlformats.org/officeDocument/2006/relationships" xmlns:p="http://schemas.openxmlformats.org/presentationml/2006/main">
   <p:cSld>
     <p:spTree>
@@ -5662,7 +6046,7 @@
 </p:sld>
 </file>
 
-<file path=ppt/slides/slide12.xml><?xml version="1.0" encoding="utf-8"?>
+<file path=ppt/slides/slide14.xml><?xml version="1.0" encoding="utf-8"?>
 <p:sld xmlns:a="http://schemas.openxmlformats.org/drawingml/2006/main" xmlns:r="http://schemas.openxmlformats.org/officeDocument/2006/relationships" xmlns:p="http://schemas.openxmlformats.org/presentationml/2006/main">
   <p:cSld>
     <p:spTree>
@@ -5921,595 +6305,6 @@
             <a:pPr algn="r"/>
             <a:r>
               <a:t>230</a:t>
-            </a:r>
-            <a:endParaRPr sz="1000" b="1">
-              <a:solidFill>
-                <a:srgbClr val="7A8A6E"/>
-              </a:solidFill>
-              <a:latin typeface="Calibri"/>
-            </a:endParaRPr>
-          </a:p>
-        </p:txBody>
-      </p:sp>
-    </p:spTree>
-  </p:cSld>
-  <p:clrMapOvr>
-    <a:masterClrMapping/>
-  </p:clrMapOvr>
-</p:sld>
-</file>
-
-<file path=ppt/slides/slide13.xml><?xml version="1.0" encoding="utf-8"?>
-<p:sld xmlns:a="http://schemas.openxmlformats.org/drawingml/2006/main" xmlns:p="http://schemas.openxmlformats.org/presentationml/2006/main" xmlns:r="http://schemas.openxmlformats.org/officeDocument/2006/relationships">
-  <p:cSld>
-    <p:spTree>
-      <p:nvGrpSpPr>
-        <p:cNvPr id="1" name=""/>
-        <p:cNvGrpSpPr/>
-        <p:nvPr/>
-      </p:nvGrpSpPr>
-      <p:grpSpPr/>
-      <p:sp>
-        <p:nvSpPr>
-          <p:cNvPr id="2" name="Rectangle 1"/>
-          <p:cNvSpPr/>
-          <p:nvPr/>
-        </p:nvSpPr>
-        <p:spPr>
-          <a:xfrm>
-            <a:off x="0" y="0"/>
-            <a:ext cx="12192000" cy="6858000"/>
-          </a:xfrm>
-          <a:prstGeom prst="rect">
-            <a:avLst/>
-          </a:prstGeom>
-          <a:solidFill>
-            <a:srgbClr val="FFFFFF"/>
-          </a:solidFill>
-          <a:ln>
-            <a:noFill/>
-          </a:ln>
-          <a:effectLst/>
-        </p:spPr>
-        <p:style>
-          <a:lnRef idx="1">
-            <a:schemeClr val="accent1"/>
-          </a:lnRef>
-          <a:fillRef idx="3">
-            <a:schemeClr val="accent1"/>
-          </a:fillRef>
-          <a:effectRef idx="2">
-            <a:schemeClr val="accent1"/>
-          </a:effectRef>
-          <a:fontRef idx="minor">
-            <a:schemeClr val="lt1"/>
-          </a:fontRef>
-        </p:style>
-        <p:txBody>
-          <a:bodyPr rtlCol="0" anchor="ctr"/>
-          <a:lstStyle/>
-          <a:p>
-            <a:pPr algn="ctr"/>
-          </a:p>
-        </p:txBody>
-      </p:sp>
-      <p:sp>
-        <p:nvSpPr>
-          <p:cNvPr id="3" name="TextBox 2"/>
-          <p:cNvSpPr txBox="1"/>
-          <p:nvPr/>
-        </p:nvSpPr>
-        <p:spPr>
-          <a:xfrm>
-            <a:off x="822960" y="502920"/>
-            <a:ext cx="10515600" cy="822960"/>
-          </a:xfrm>
-          <a:prstGeom prst="rect">
-            <a:avLst/>
-          </a:prstGeom>
-          <a:noFill/>
-        </p:spPr>
-        <p:txBody>
-          <a:bodyPr wrap="square">
-            <a:spAutoFit/>
-          </a:bodyPr>
-          <a:lstStyle/>
-          <a:p>
-            <a:r>
-              <a:rPr sz="2800" b="1">
-                <a:solidFill>
-                  <a:srgbClr val="2C5F2D"/>
-                </a:solidFill>
-                <a:latin typeface="Cambria"/>
-              </a:rPr>
-              <a:t>Where We Are — the Four Connects</a:t>
-            </a:r>
-          </a:p>
-        </p:txBody>
-      </p:sp>
-      <p:pic>
-        <p:nvPicPr>
-          <p:cNvPr id="4" name="Picture 3" descr="four-connects.png"/>
-          <p:cNvPicPr>
-            <a:picLocks noChangeAspect="1"/>
-          </p:cNvPicPr>
-          <p:nvPr/>
-        </p:nvPicPr>
-        <p:blipFill>
-          <a:blip r:embed="rId2"/>
-          <a:stretch>
-            <a:fillRect/>
-          </a:stretch>
-        </p:blipFill>
-        <p:spPr>
-          <a:xfrm>
-            <a:off x="932688" y="1645920"/>
-            <a:ext cx="10332720" cy="3708663"/>
-          </a:xfrm>
-          <a:prstGeom prst="rect">
-            <a:avLst/>
-          </a:prstGeom>
-        </p:spPr>
-      </p:pic>
-      <p:sp>
-        <p:nvSpPr>
-          <p:cNvPr id="5" name="TextBox 4"/>
-          <p:cNvSpPr txBox="1"/>
-          <p:nvPr/>
-        </p:nvSpPr>
-        <p:spPr>
-          <a:xfrm>
-            <a:off x="822960" y="5623560"/>
-            <a:ext cx="10515600" cy="914400"/>
-          </a:xfrm>
-          <a:prstGeom prst="rect">
-            <a:avLst/>
-          </a:prstGeom>
-          <a:noFill/>
-        </p:spPr>
-        <p:txBody>
-          <a:bodyPr wrap="square">
-            <a:spAutoFit/>
-          </a:bodyPr>
-          <a:lstStyle/>
-          <a:p>
-            <a:r>
-              <a:rPr sz="1800" b="0">
-                <a:solidFill>
-                  <a:srgbClr val="222B22"/>
-                </a:solidFill>
-                <a:latin typeface="Calibri"/>
-              </a:rPr>
-              <a:t>Session 18 returns to the whole map — </a:t>
-            </a:r>
-            <a:r>
-              <a:rPr sz="1800" b="1">
-                <a:solidFill>
-                  <a:srgbClr val="2C5F2D"/>
-                </a:solidFill>
-                <a:latin typeface="Calibri"/>
-              </a:rPr>
-              <a:t>all four Connects</a:t>
-            </a:r>
-            <a:r>
-              <a:rPr sz="1800" b="0">
-                <a:solidFill>
-                  <a:srgbClr val="222B22"/>
-                </a:solidFill>
-                <a:latin typeface="Calibri"/>
-              </a:rPr>
-              <a:t>, for the final stretch. Each connection makes the next one real (Matt. 22:37–40).</a:t>
-            </a:r>
-          </a:p>
-        </p:txBody>
-      </p:sp>
-      <p:sp>
-        <p:nvSpPr>
-          <p:cNvPr id="90" name="SlideNum"/>
-          <p:cNvSpPr txBox="1"/>
-          <p:nvPr/>
-        </p:nvSpPr>
-        <p:spPr>
-          <a:xfrm>
-            <a:off x="11384280" y="6446520"/>
-            <a:ext cx="640080" cy="292608"/>
-          </a:xfrm>
-          <a:prstGeom prst="rect">
-            <a:avLst/>
-          </a:prstGeom>
-          <a:noFill/>
-        </p:spPr>
-        <p:txBody>
-          <a:bodyPr wrap="none" lIns="0" tIns="0" rIns="45720" bIns="0" anchor="ctr"/>
-          <a:lstStyle/>
-          <a:p>
-            <a:pPr algn="r"/>
-            <a:r>
-              <a:t>220a</a:t>
-            </a:r>
-            <a:endParaRPr sz="1000" b="1">
-              <a:solidFill>
-                <a:srgbClr val="7A8A6E"/>
-              </a:solidFill>
-              <a:latin typeface="Calibri"/>
-            </a:endParaRPr>
-          </a:p>
-        </p:txBody>
-      </p:sp>
-    </p:spTree>
-  </p:cSld>
-  <p:clrMapOvr>
-    <a:masterClrMapping/>
-  </p:clrMapOvr>
-</p:sld>
-</file>
-
-<file path=ppt/slides/slide14.xml><?xml version="1.0" encoding="utf-8"?>
-<p:sld xmlns:a="http://schemas.openxmlformats.org/drawingml/2006/main" xmlns:p="http://schemas.openxmlformats.org/presentationml/2006/main" xmlns:r="http://schemas.openxmlformats.org/officeDocument/2006/relationships">
-  <p:cSld>
-    <p:spTree>
-      <p:nvGrpSpPr>
-        <p:cNvPr id="1" name=""/>
-        <p:cNvGrpSpPr/>
-        <p:nvPr/>
-      </p:nvGrpSpPr>
-      <p:grpSpPr/>
-      <p:sp>
-        <p:nvSpPr>
-          <p:cNvPr id="2" name="Rectangle 1"/>
-          <p:cNvSpPr/>
-          <p:nvPr/>
-        </p:nvSpPr>
-        <p:spPr>
-          <a:xfrm>
-            <a:off x="0" y="0"/>
-            <a:ext cx="12192000" cy="6858000"/>
-          </a:xfrm>
-          <a:prstGeom prst="rect">
-            <a:avLst/>
-          </a:prstGeom>
-          <a:solidFill>
-            <a:srgbClr val="FFFFFF"/>
-          </a:solidFill>
-          <a:ln>
-            <a:noFill/>
-          </a:ln>
-          <a:effectLst/>
-        </p:spPr>
-        <p:style>
-          <a:lnRef idx="1">
-            <a:schemeClr val="accent1"/>
-          </a:lnRef>
-          <a:fillRef idx="3">
-            <a:schemeClr val="accent1"/>
-          </a:fillRef>
-          <a:effectRef idx="2">
-            <a:schemeClr val="accent1"/>
-          </a:effectRef>
-          <a:fontRef idx="minor">
-            <a:schemeClr val="lt1"/>
-          </a:fontRef>
-        </p:style>
-        <p:txBody>
-          <a:bodyPr rtlCol="0" anchor="ctr"/>
-          <a:lstStyle/>
-          <a:p>
-            <a:pPr algn="ctr"/>
-          </a:p>
-        </p:txBody>
-      </p:sp>
-      <p:sp>
-        <p:nvSpPr>
-          <p:cNvPr id="3" name="TextBox 2"/>
-          <p:cNvSpPr txBox="1"/>
-          <p:nvPr/>
-        </p:nvSpPr>
-        <p:spPr>
-          <a:xfrm>
-            <a:off x="822960" y="502920"/>
-            <a:ext cx="10515600" cy="822960"/>
-          </a:xfrm>
-          <a:prstGeom prst="rect">
-            <a:avLst/>
-          </a:prstGeom>
-          <a:noFill/>
-        </p:spPr>
-        <p:txBody>
-          <a:bodyPr wrap="square">
-            <a:spAutoFit/>
-          </a:bodyPr>
-          <a:lstStyle/>
-          <a:p>
-            <a:r>
-              <a:rPr sz="2800" b="1">
-                <a:solidFill>
-                  <a:srgbClr val="2C5F2D"/>
-                </a:solidFill>
-                <a:latin typeface="Cambria"/>
-              </a:rPr>
-              <a:t>The Take-Home Sheet — the Daily Rhythm</a:t>
-            </a:r>
-          </a:p>
-        </p:txBody>
-      </p:sp>
-      <p:pic>
-        <p:nvPicPr>
-          <p:cNvPr id="4" name="Picture 3" descr="s18_part1.png"/>
-          <p:cNvPicPr>
-            <a:picLocks noChangeAspect="1"/>
-          </p:cNvPicPr>
-          <p:nvPr/>
-        </p:nvPicPr>
-        <p:blipFill>
-          <a:blip r:embed="rId2"/>
-          <a:stretch>
-            <a:fillRect/>
-          </a:stretch>
-        </p:blipFill>
-        <p:spPr>
-          <a:xfrm>
-            <a:off x="1798167" y="1463040"/>
-            <a:ext cx="8595360" cy="4039819"/>
-          </a:xfrm>
-          <a:prstGeom prst="rect">
-            <a:avLst/>
-          </a:prstGeom>
-          <a:ln w="12700">
-            <a:solidFill>
-              <a:srgbClr val="C8C8C8"/>
-            </a:solidFill>
-          </a:ln>
-        </p:spPr>
-      </p:pic>
-      <p:sp>
-        <p:nvSpPr>
-          <p:cNvPr id="5" name="TextBox 4"/>
-          <p:cNvSpPr txBox="1"/>
-          <p:nvPr/>
-        </p:nvSpPr>
-        <p:spPr>
-          <a:xfrm>
-            <a:off x="822960" y="6355080"/>
-            <a:ext cx="10515600" cy="411480"/>
-          </a:xfrm>
-          <a:prstGeom prst="rect">
-            <a:avLst/>
-          </a:prstGeom>
-          <a:noFill/>
-        </p:spPr>
-        <p:txBody>
-          <a:bodyPr wrap="square">
-            <a:spAutoFit/>
-          </a:bodyPr>
-          <a:lstStyle/>
-          <a:p>
-            <a:r>
-              <a:rPr sz="1400" i="1">
-                <a:solidFill>
-                  <a:srgbClr val="595959"/>
-                </a:solidFill>
-                <a:latin typeface="Calibri"/>
-              </a:rPr>
-              <a:t>Handed out now — this is the sheet in your hands.</a:t>
-            </a:r>
-          </a:p>
-        </p:txBody>
-      </p:sp>
-      <p:sp>
-        <p:nvSpPr>
-          <p:cNvPr id="90" name="SlideNum"/>
-          <p:cNvSpPr txBox="1"/>
-          <p:nvPr/>
-        </p:nvSpPr>
-        <p:spPr>
-          <a:xfrm>
-            <a:off x="11384280" y="6446520"/>
-            <a:ext cx="640080" cy="292608"/>
-          </a:xfrm>
-          <a:prstGeom prst="rect">
-            <a:avLst/>
-          </a:prstGeom>
-          <a:noFill/>
-        </p:spPr>
-        <p:txBody>
-          <a:bodyPr wrap="none" lIns="0" tIns="0" rIns="45720" bIns="0" anchor="ctr"/>
-          <a:lstStyle/>
-          <a:p>
-            <a:pPr algn="r"/>
-            <a:r>
-              <a:t>227</a:t>
-            </a:r>
-            <a:endParaRPr sz="1000" b="1">
-              <a:solidFill>
-                <a:srgbClr val="7A8A6E"/>
-              </a:solidFill>
-              <a:latin typeface="Calibri"/>
-            </a:endParaRPr>
-          </a:p>
-        </p:txBody>
-      </p:sp>
-    </p:spTree>
-  </p:cSld>
-  <p:clrMapOvr>
-    <a:masterClrMapping/>
-  </p:clrMapOvr>
-</p:sld>
-</file>
-
-<file path=ppt/slides/slide15.xml><?xml version="1.0" encoding="utf-8"?>
-<p:sld xmlns:a="http://schemas.openxmlformats.org/drawingml/2006/main" xmlns:p="http://schemas.openxmlformats.org/presentationml/2006/main" xmlns:r="http://schemas.openxmlformats.org/officeDocument/2006/relationships">
-  <p:cSld>
-    <p:spTree>
-      <p:nvGrpSpPr>
-        <p:cNvPr id="1" name=""/>
-        <p:cNvGrpSpPr/>
-        <p:nvPr/>
-      </p:nvGrpSpPr>
-      <p:grpSpPr/>
-      <p:sp>
-        <p:nvSpPr>
-          <p:cNvPr id="2" name="Rectangle 1"/>
-          <p:cNvSpPr/>
-          <p:nvPr/>
-        </p:nvSpPr>
-        <p:spPr>
-          <a:xfrm>
-            <a:off x="0" y="0"/>
-            <a:ext cx="12192000" cy="6858000"/>
-          </a:xfrm>
-          <a:prstGeom prst="rect">
-            <a:avLst/>
-          </a:prstGeom>
-          <a:solidFill>
-            <a:srgbClr val="FFFFFF"/>
-          </a:solidFill>
-          <a:ln>
-            <a:noFill/>
-          </a:ln>
-          <a:effectLst/>
-        </p:spPr>
-        <p:style>
-          <a:lnRef idx="1">
-            <a:schemeClr val="accent1"/>
-          </a:lnRef>
-          <a:fillRef idx="3">
-            <a:schemeClr val="accent1"/>
-          </a:fillRef>
-          <a:effectRef idx="2">
-            <a:schemeClr val="accent1"/>
-          </a:effectRef>
-          <a:fontRef idx="minor">
-            <a:schemeClr val="lt1"/>
-          </a:fontRef>
-        </p:style>
-        <p:txBody>
-          <a:bodyPr rtlCol="0" anchor="ctr"/>
-          <a:lstStyle/>
-          <a:p>
-            <a:pPr algn="ctr"/>
-          </a:p>
-        </p:txBody>
-      </p:sp>
-      <p:sp>
-        <p:nvSpPr>
-          <p:cNvPr id="3" name="TextBox 2"/>
-          <p:cNvSpPr txBox="1"/>
-          <p:nvPr/>
-        </p:nvSpPr>
-        <p:spPr>
-          <a:xfrm>
-            <a:off x="822960" y="502920"/>
-            <a:ext cx="10515600" cy="822960"/>
-          </a:xfrm>
-          <a:prstGeom prst="rect">
-            <a:avLst/>
-          </a:prstGeom>
-          <a:noFill/>
-        </p:spPr>
-        <p:txBody>
-          <a:bodyPr wrap="square">
-            <a:spAutoFit/>
-          </a:bodyPr>
-          <a:lstStyle/>
-          <a:p>
-            <a:r>
-              <a:rPr sz="2800" b="1">
-                <a:solidFill>
-                  <a:srgbClr val="2C5F2D"/>
-                </a:solidFill>
-                <a:latin typeface="Cambria"/>
-              </a:rPr>
-              <a:t>The Take-Home Sheet — the Four Parts</a:t>
-            </a:r>
-          </a:p>
-        </p:txBody>
-      </p:sp>
-      <p:pic>
-        <p:nvPicPr>
-          <p:cNvPr id="4" name="Picture 3" descr="s18_part2.png"/>
-          <p:cNvPicPr>
-            <a:picLocks noChangeAspect="1"/>
-          </p:cNvPicPr>
-          <p:nvPr/>
-        </p:nvPicPr>
-        <p:blipFill>
-          <a:blip r:embed="rId2"/>
-          <a:stretch>
-            <a:fillRect/>
-          </a:stretch>
-        </p:blipFill>
-        <p:spPr>
-          <a:xfrm>
-            <a:off x="2433167" y="1463040"/>
-            <a:ext cx="7325360" cy="4709160"/>
-          </a:xfrm>
-          <a:prstGeom prst="rect">
-            <a:avLst/>
-          </a:prstGeom>
-          <a:ln w="12700">
-            <a:solidFill>
-              <a:srgbClr val="C8C8C8"/>
-            </a:solidFill>
-          </a:ln>
-        </p:spPr>
-      </p:pic>
-      <p:sp>
-        <p:nvSpPr>
-          <p:cNvPr id="5" name="TextBox 4"/>
-          <p:cNvSpPr txBox="1"/>
-          <p:nvPr/>
-        </p:nvSpPr>
-        <p:spPr>
-          <a:xfrm>
-            <a:off x="822960" y="6355080"/>
-            <a:ext cx="10515600" cy="411480"/>
-          </a:xfrm>
-          <a:prstGeom prst="rect">
-            <a:avLst/>
-          </a:prstGeom>
-          <a:noFill/>
-        </p:spPr>
-        <p:txBody>
-          <a:bodyPr wrap="square">
-            <a:spAutoFit/>
-          </a:bodyPr>
-          <a:lstStyle/>
-          <a:p>
-            <a:r>
-              <a:rPr sz="1400" i="1">
-                <a:solidFill>
-                  <a:srgbClr val="595959"/>
-                </a:solidFill>
-                <a:latin typeface="Calibri"/>
-              </a:rPr>
-              <a:t>One practice at a time — and a partner expecting you at the end of week one.</a:t>
-            </a:r>
-          </a:p>
-        </p:txBody>
-      </p:sp>
-      <p:sp>
-        <p:nvSpPr>
-          <p:cNvPr id="90" name="SlideNum"/>
-          <p:cNvSpPr txBox="1"/>
-          <p:nvPr/>
-        </p:nvSpPr>
-        <p:spPr>
-          <a:xfrm>
-            <a:off x="11384280" y="6446520"/>
-            <a:ext cx="640080" cy="292608"/>
-          </a:xfrm>
-          <a:prstGeom prst="rect">
-            <a:avLst/>
-          </a:prstGeom>
-          <a:noFill/>
-        </p:spPr>
-        <p:txBody>
-          <a:bodyPr wrap="none" lIns="0" tIns="0" rIns="45720" bIns="0" anchor="ctr"/>
-          <a:lstStyle/>
-          <a:p>
-            <a:pPr algn="r"/>
-            <a:r>
-              <a:t>227a</a:t>
             </a:r>
             <a:endParaRPr sz="1000" b="1">
               <a:solidFill>
@@ -6778,6 +6573,211 @@
 </file>
 
 <file path=ppt/slides/slide3.xml><?xml version="1.0" encoding="utf-8"?>
+<p:sld xmlns:a="http://schemas.openxmlformats.org/drawingml/2006/main" xmlns:p="http://schemas.openxmlformats.org/presentationml/2006/main" xmlns:r="http://schemas.openxmlformats.org/officeDocument/2006/relationships">
+  <p:cSld>
+    <p:spTree>
+      <p:nvGrpSpPr>
+        <p:cNvPr id="1" name=""/>
+        <p:cNvGrpSpPr/>
+        <p:nvPr/>
+      </p:nvGrpSpPr>
+      <p:grpSpPr/>
+      <p:sp>
+        <p:nvSpPr>
+          <p:cNvPr id="2" name="Rectangle 1"/>
+          <p:cNvSpPr/>
+          <p:nvPr/>
+        </p:nvSpPr>
+        <p:spPr>
+          <a:xfrm>
+            <a:off x="0" y="0"/>
+            <a:ext cx="12192000" cy="6858000"/>
+          </a:xfrm>
+          <a:prstGeom prst="rect">
+            <a:avLst/>
+          </a:prstGeom>
+          <a:solidFill>
+            <a:srgbClr val="FFFFFF"/>
+          </a:solidFill>
+          <a:ln>
+            <a:noFill/>
+          </a:ln>
+          <a:effectLst/>
+        </p:spPr>
+        <p:style>
+          <a:lnRef idx="1">
+            <a:schemeClr val="accent1"/>
+          </a:lnRef>
+          <a:fillRef idx="3">
+            <a:schemeClr val="accent1"/>
+          </a:fillRef>
+          <a:effectRef idx="2">
+            <a:schemeClr val="accent1"/>
+          </a:effectRef>
+          <a:fontRef idx="minor">
+            <a:schemeClr val="lt1"/>
+          </a:fontRef>
+        </p:style>
+        <p:txBody>
+          <a:bodyPr rtlCol="0" anchor="ctr"/>
+          <a:lstStyle/>
+          <a:p>
+            <a:pPr algn="ctr"/>
+          </a:p>
+        </p:txBody>
+      </p:sp>
+      <p:sp>
+        <p:nvSpPr>
+          <p:cNvPr id="3" name="TextBox 2"/>
+          <p:cNvSpPr txBox="1"/>
+          <p:nvPr/>
+        </p:nvSpPr>
+        <p:spPr>
+          <a:xfrm>
+            <a:off x="822960" y="502920"/>
+            <a:ext cx="10515600" cy="822960"/>
+          </a:xfrm>
+          <a:prstGeom prst="rect">
+            <a:avLst/>
+          </a:prstGeom>
+          <a:noFill/>
+        </p:spPr>
+        <p:txBody>
+          <a:bodyPr wrap="square">
+            <a:spAutoFit/>
+          </a:bodyPr>
+          <a:lstStyle/>
+          <a:p>
+            <a:r>
+              <a:rPr sz="2800" b="1">
+                <a:solidFill>
+                  <a:srgbClr val="2C5F2D"/>
+                </a:solidFill>
+                <a:latin typeface="Cambria"/>
+              </a:rPr>
+              <a:t>Where We Are — the Four Connects</a:t>
+            </a:r>
+          </a:p>
+        </p:txBody>
+      </p:sp>
+      <p:sp>
+        <p:nvSpPr>
+          <p:cNvPr id="5" name="TextBox 4"/>
+          <p:cNvSpPr txBox="1"/>
+          <p:nvPr/>
+        </p:nvSpPr>
+        <p:spPr>
+          <a:xfrm>
+            <a:off x="822960" y="5623560"/>
+            <a:ext cx="10515600" cy="914400"/>
+          </a:xfrm>
+          <a:prstGeom prst="rect">
+            <a:avLst/>
+          </a:prstGeom>
+          <a:noFill/>
+        </p:spPr>
+        <p:txBody>
+          <a:bodyPr wrap="square">
+            <a:spAutoFit/>
+          </a:bodyPr>
+          <a:lstStyle/>
+          <a:p>
+            <a:r>
+              <a:rPr sz="1800" b="0">
+                <a:solidFill>
+                  <a:srgbClr val="222B22"/>
+                </a:solidFill>
+                <a:latin typeface="Calibri"/>
+              </a:rPr>
+              <a:t>Session 18 returns to the whole map — </a:t>
+            </a:r>
+            <a:r>
+              <a:rPr sz="1800" b="1">
+                <a:solidFill>
+                  <a:srgbClr val="2C5F2D"/>
+                </a:solidFill>
+                <a:latin typeface="Calibri"/>
+              </a:rPr>
+              <a:t>all four Connects</a:t>
+            </a:r>
+            <a:r>
+              <a:rPr sz="1800" b="0">
+                <a:solidFill>
+                  <a:srgbClr val="222B22"/>
+                </a:solidFill>
+                <a:latin typeface="Calibri"/>
+              </a:rPr>
+              <a:t>, for the final stretch. Each connection makes the next one real (Matt. 22:37–40).</a:t>
+            </a:r>
+          </a:p>
+        </p:txBody>
+      </p:sp>
+      <p:sp>
+        <p:nvSpPr>
+          <p:cNvPr id="90" name="SlideNum"/>
+          <p:cNvSpPr txBox="1"/>
+          <p:nvPr/>
+        </p:nvSpPr>
+        <p:spPr>
+          <a:xfrm>
+            <a:off x="11384280" y="6446520"/>
+            <a:ext cx="640080" cy="292608"/>
+          </a:xfrm>
+          <a:prstGeom prst="rect">
+            <a:avLst/>
+          </a:prstGeom>
+          <a:noFill/>
+        </p:spPr>
+        <p:txBody>
+          <a:bodyPr wrap="none" lIns="0" tIns="0" rIns="45720" bIns="0" anchor="ctr"/>
+          <a:lstStyle/>
+          <a:p>
+            <a:pPr algn="r"/>
+            <a:r>
+              <a:t>220a</a:t>
+            </a:r>
+            <a:endParaRPr sz="1000" b="1">
+              <a:solidFill>
+                <a:srgbClr val="7A8A6E"/>
+              </a:solidFill>
+              <a:latin typeface="Calibri"/>
+            </a:endParaRPr>
+          </a:p>
+        </p:txBody>
+      </p:sp>
+      <p:pic>
+        <p:nvPicPr>
+          <p:cNvPr id="91" name="Picture 90" descr="four-connects.png"/>
+          <p:cNvPicPr>
+            <a:picLocks noChangeAspect="1"/>
+          </p:cNvPicPr>
+          <p:nvPr/>
+        </p:nvPicPr>
+        <p:blipFill>
+          <a:blip r:embed="rId4"/>
+          <a:stretch>
+            <a:fillRect/>
+          </a:stretch>
+        </p:blipFill>
+        <p:spPr>
+          <a:xfrm>
+            <a:off x="932688" y="1645920"/>
+            <a:ext cx="10332720" cy="3708663"/>
+          </a:xfrm>
+          <a:prstGeom prst="rect">
+            <a:avLst/>
+          </a:prstGeom>
+        </p:spPr>
+      </p:pic>
+    </p:spTree>
+  </p:cSld>
+  <p:clrMapOvr>
+    <a:masterClrMapping/>
+  </p:clrMapOvr>
+</p:sld>
+</file>
+
+<file path=ppt/slides/slide4.xml><?xml version="1.0" encoding="utf-8"?>
 <p:sld xmlns:a="http://schemas.openxmlformats.org/drawingml/2006/main" xmlns:r="http://schemas.openxmlformats.org/officeDocument/2006/relationships" xmlns:p="http://schemas.openxmlformats.org/presentationml/2006/main">
   <p:cSld>
     <p:spTree>
@@ -7178,353 +7178,6 @@
 </p:sld>
 </file>
 
-<file path=ppt/slides/slide4.xml><?xml version="1.0" encoding="utf-8"?>
-<p:sld xmlns:a="http://schemas.openxmlformats.org/drawingml/2006/main" xmlns:r="http://schemas.openxmlformats.org/officeDocument/2006/relationships" xmlns:p="http://schemas.openxmlformats.org/presentationml/2006/main">
-  <p:cSld>
-    <p:spTree>
-      <p:nvGrpSpPr>
-        <p:cNvPr id="1" name=""/>
-        <p:cNvGrpSpPr/>
-        <p:nvPr/>
-      </p:nvGrpSpPr>
-      <p:grpSpPr>
-        <a:xfrm>
-          <a:off x="0" y="0"/>
-          <a:ext cx="0" cy="0"/>
-          <a:chOff x="0" y="0"/>
-          <a:chExt cx="0" cy="0"/>
-        </a:xfrm>
-      </p:grpSpPr>
-      <p:sp>
-        <p:nvSpPr>
-          <p:cNvPr id="2" name="Rectangle 1"/>
-          <p:cNvSpPr/>
-          <p:nvPr/>
-        </p:nvSpPr>
-        <p:spPr>
-          <a:xfrm>
-            <a:off x="0" y="0"/>
-            <a:ext cx="12191695" cy="6858000"/>
-          </a:xfrm>
-          <a:prstGeom prst="rect">
-            <a:avLst/>
-          </a:prstGeom>
-          <a:solidFill>
-            <a:srgbClr val="FFFFFF"/>
-          </a:solidFill>
-          <a:ln>
-            <a:noFill/>
-          </a:ln>
-        </p:spPr>
-        <p:txBody>
-          <a:bodyPr/>
-          <a:lstStyle/>
-          <a:p>
-            <a:endParaRPr/>
-          </a:p>
-        </p:txBody>
-      </p:sp>
-      <p:sp>
-        <p:nvSpPr>
-          <p:cNvPr id="3" name="TextBox 2"/>
-          <p:cNvSpPr txBox="1"/>
-          <p:nvPr/>
-        </p:nvSpPr>
-        <p:spPr>
-          <a:xfrm>
-            <a:off x="822960" y="502920"/>
-            <a:ext cx="10515600" cy="822960"/>
-          </a:xfrm>
-          <a:prstGeom prst="rect">
-            <a:avLst/>
-          </a:prstGeom>
-          <a:noFill/>
-        </p:spPr>
-        <p:txBody>
-          <a:bodyPr wrap="square">
-            <a:spAutoFit/>
-          </a:bodyPr>
-          <a:lstStyle/>
-          <a:p>
-            <a:pPr algn="l">
-              <a:spcAft>
-                <a:spcPts val="600"/>
-              </a:spcAft>
-            </a:pPr>
-            <a:r>
-              <a:rPr sz="2800" b="1" i="0">
-                <a:solidFill>
-                  <a:srgbClr val="2C5F2D"/>
-                </a:solidFill>
-                <a:latin typeface="Cambria"/>
-              </a:rPr>
-              <a:t>Opening Container — the Eight Steps</a:t>
-            </a:r>
-          </a:p>
-        </p:txBody>
-      </p:sp>
-      <p:sp>
-        <p:nvSpPr>
-          <p:cNvPr id="4" name="TextBox 4"/>
-          <p:cNvSpPr txBox="1"/>
-          <p:nvPr/>
-        </p:nvSpPr>
-        <p:spPr>
-          <a:xfrm>
-            <a:off x="822960" y="1554480"/>
-            <a:ext cx="10515600" cy="4892040"/>
-          </a:xfrm>
-          <a:prstGeom prst="rect">
-            <a:avLst/>
-          </a:prstGeom>
-          <a:noFill/>
-        </p:spPr>
-        <p:txBody>
-          <a:bodyPr wrap="square" lIns="91440" tIns="91440" rIns="91440" bIns="91440"/>
-          <a:lstStyle/>
-          <a:p>
-            <a:pPr marL="342900" indent="-342900">
-              <a:spcAft>
-                <a:spcPts val="650"/>
-              </a:spcAft>
-            </a:pPr>
-            <a:r>
-              <a:rPr sz="2400" b="1" i="0">
-                <a:solidFill>
-                  <a:srgbClr val="97BC62"/>
-                </a:solidFill>
-                <a:latin typeface="Calibri"/>
-              </a:rPr>
-              <a:t>1   </a:t>
-            </a:r>
-            <a:r>
-              <a:rPr sz="2400" b="0" i="0">
-                <a:solidFill>
-                  <a:srgbClr val="222B22"/>
-                </a:solidFill>
-                <a:latin typeface="Calibri"/>
-              </a:rPr>
-              <a:t>Welcome — five minutes to open the container</a:t>
-            </a:r>
-          </a:p>
-          <a:p>
-            <a:pPr marL="342900" indent="-342900">
-              <a:spcAft>
-                <a:spcPts val="650"/>
-              </a:spcAft>
-            </a:pPr>
-            <a:r>
-              <a:rPr sz="2400" b="1" i="0">
-                <a:solidFill>
-                  <a:srgbClr val="97BC62"/>
-                </a:solidFill>
-                <a:latin typeface="Calibri"/>
-              </a:rPr>
-              <a:t>2   </a:t>
-            </a:r>
-            <a:r>
-              <a:rPr sz="2400" b="0" i="0">
-                <a:solidFill>
-                  <a:srgbClr val="222B22"/>
-                </a:solidFill>
-                <a:latin typeface="Calibri"/>
-              </a:rPr>
-              <a:t>Phones silenced and put away</a:t>
-            </a:r>
-          </a:p>
-          <a:p>
-            <a:pPr marL="342900" indent="-342900">
-              <a:spcAft>
-                <a:spcPts val="650"/>
-              </a:spcAft>
-            </a:pPr>
-            <a:r>
-              <a:rPr sz="2400" b="1" i="0">
-                <a:solidFill>
-                  <a:srgbClr val="97BC62"/>
-                </a:solidFill>
-                <a:latin typeface="Calibri"/>
-              </a:rPr>
-              <a:t>3   </a:t>
-            </a:r>
-            <a:r>
-              <a:rPr sz="2400" b="0" i="0">
-                <a:solidFill>
-                  <a:srgbClr val="222B22"/>
-                </a:solidFill>
-                <a:latin typeface="Calibri"/>
-              </a:rPr>
-              <a:t>Stand in a circle</a:t>
-            </a:r>
-          </a:p>
-          <a:p>
-            <a:pPr marL="342900" indent="-342900">
-              <a:spcAft>
-                <a:spcPts val="650"/>
-              </a:spcAft>
-            </a:pPr>
-            <a:r>
-              <a:rPr sz="2400" b="1" i="0">
-                <a:solidFill>
-                  <a:srgbClr val="97BC62"/>
-                </a:solidFill>
-                <a:latin typeface="Calibri"/>
-              </a:rPr>
-              <a:t>4   </a:t>
-            </a:r>
-            <a:r>
-              <a:rPr sz="2400" b="0" i="0">
-                <a:solidFill>
-                  <a:srgbClr val="222B22"/>
-                </a:solidFill>
-                <a:latin typeface="Calibri"/>
-              </a:rPr>
-              <a:t>One-word check-in — how you actually are, right now</a:t>
-            </a:r>
-          </a:p>
-          <a:p>
-            <a:pPr marL="342900" indent="-342900">
-              <a:spcAft>
-                <a:spcPts val="650"/>
-              </a:spcAft>
-            </a:pPr>
-            <a:r>
-              <a:rPr sz="2400" b="1" i="0">
-                <a:solidFill>
-                  <a:srgbClr val="97BC62"/>
-                </a:solidFill>
-                <a:latin typeface="Calibri"/>
-              </a:rPr>
-              <a:t>5   </a:t>
-            </a:r>
-            <a:r>
-              <a:rPr sz="2400" b="0" i="0">
-                <a:solidFill>
-                  <a:srgbClr val="222B22"/>
-                </a:solidFill>
-                <a:latin typeface="Calibri"/>
-              </a:rPr>
-              <a:t>Put out / bring in — set something down; bring a blessing in</a:t>
-            </a:r>
-          </a:p>
-          <a:p>
-            <a:pPr marL="342900" indent="-342900">
-              <a:spcAft>
-                <a:spcPts val="650"/>
-              </a:spcAft>
-            </a:pPr>
-            <a:r>
-              <a:rPr sz="2400" b="1" i="0">
-                <a:solidFill>
-                  <a:srgbClr val="97BC62"/>
-                </a:solidFill>
-                <a:latin typeface="Calibri"/>
-              </a:rPr>
-              <a:t>6   </a:t>
-            </a:r>
-            <a:r>
-              <a:rPr sz="2400" b="0" i="0">
-                <a:solidFill>
-                  <a:srgbClr val="222B22"/>
-                </a:solidFill>
-                <a:latin typeface="Calibri"/>
-              </a:rPr>
-              <a:t>Spoken commitment: “I am here. I am paying attention. I am willing to be moved.”</a:t>
-            </a:r>
-          </a:p>
-          <a:p>
-            <a:pPr marL="342900" indent="-342900">
-              <a:spcAft>
-                <a:spcPts val="650"/>
-              </a:spcAft>
-            </a:pPr>
-            <a:r>
-              <a:rPr sz="2400" b="1" i="0">
-                <a:solidFill>
-                  <a:srgbClr val="97BC62"/>
-                </a:solidFill>
-                <a:latin typeface="Calibri"/>
-              </a:rPr>
-              <a:t>7   </a:t>
-            </a:r>
-            <a:r>
-              <a:rPr sz="2400" b="0" i="0">
-                <a:solidFill>
-                  <a:srgbClr val="222B22"/>
-                </a:solidFill>
-                <a:latin typeface="Calibri"/>
-              </a:rPr>
-              <a:t>Opening prayer — “Holy Spirit, you are welcome here. Speak. We are listening.”</a:t>
-            </a:r>
-          </a:p>
-          <a:p>
-            <a:pPr marL="342900" indent="-342900">
-              <a:spcAft>
-                <a:spcPts val="650"/>
-              </a:spcAft>
-            </a:pPr>
-            <a:r>
-              <a:rPr sz="2400" b="1" i="0">
-                <a:solidFill>
-                  <a:srgbClr val="97BC62"/>
-                </a:solidFill>
-                <a:latin typeface="Calibri"/>
-              </a:rPr>
-              <a:t>8   </a:t>
-            </a:r>
-            <a:r>
-              <a:rPr sz="2400" b="0" i="0">
-                <a:solidFill>
-                  <a:srgbClr val="222B22"/>
-                </a:solidFill>
-                <a:latin typeface="Calibri"/>
-              </a:rPr>
-              <a:t>Sit. Begin.</a:t>
-            </a:r>
-          </a:p>
-        </p:txBody>
-      </p:sp>
-      <p:sp>
-        <p:nvSpPr>
-          <p:cNvPr id="90" name="SlideNum"/>
-          <p:cNvSpPr txBox="1"/>
-          <p:nvPr/>
-        </p:nvSpPr>
-        <p:spPr>
-          <a:xfrm>
-            <a:off x="11384280" y="6446520"/>
-            <a:ext cx="640080" cy="292608"/>
-          </a:xfrm>
-          <a:prstGeom prst="rect">
-            <a:avLst/>
-          </a:prstGeom>
-          <a:noFill/>
-        </p:spPr>
-        <p:txBody>
-          <a:bodyPr wrap="none" lIns="0" tIns="0" rIns="45720" bIns="0" anchor="ctr"/>
-          <a:lstStyle/>
-          <a:p>
-            <a:pPr algn="r"/>
-            <a:r>
-              <a:t>222</a:t>
-            </a:r>
-            <a:endParaRPr sz="1000" b="1">
-              <a:solidFill>
-                <a:srgbClr val="7A8A6E"/>
-              </a:solidFill>
-              <a:latin typeface="Calibri"/>
-            </a:endParaRPr>
-          </a:p>
-        </p:txBody>
-      </p:sp>
-    </p:spTree>
-  </p:cSld>
-  <p:clrMapOvr>
-    <a:masterClrMapping/>
-  </p:clrMapOvr>
-</p:sld>
-</file>
-
 <file path=ppt/slides/slide5.xml><?xml version="1.0" encoding="utf-8"?>
 <p:sld xmlns:a="http://schemas.openxmlformats.org/drawingml/2006/main" xmlns:r="http://schemas.openxmlformats.org/officeDocument/2006/relationships" xmlns:p="http://schemas.openxmlformats.org/presentationml/2006/main">
   <p:cSld>
@@ -7605,6 +7258,353 @@
                 </a:solidFill>
                 <a:latin typeface="Cambria"/>
               </a:rPr>
+              <a:t>Opening Container — the Eight Steps</a:t>
+            </a:r>
+          </a:p>
+        </p:txBody>
+      </p:sp>
+      <p:sp>
+        <p:nvSpPr>
+          <p:cNvPr id="4" name="TextBox 4"/>
+          <p:cNvSpPr txBox="1"/>
+          <p:nvPr/>
+        </p:nvSpPr>
+        <p:spPr>
+          <a:xfrm>
+            <a:off x="822960" y="1554480"/>
+            <a:ext cx="10515600" cy="4892040"/>
+          </a:xfrm>
+          <a:prstGeom prst="rect">
+            <a:avLst/>
+          </a:prstGeom>
+          <a:noFill/>
+        </p:spPr>
+        <p:txBody>
+          <a:bodyPr wrap="square" lIns="91440" tIns="91440" rIns="91440" bIns="91440"/>
+          <a:lstStyle/>
+          <a:p>
+            <a:pPr marL="342900" indent="-342900">
+              <a:spcAft>
+                <a:spcPts val="650"/>
+              </a:spcAft>
+            </a:pPr>
+            <a:r>
+              <a:rPr sz="2400" b="1" i="0">
+                <a:solidFill>
+                  <a:srgbClr val="97BC62"/>
+                </a:solidFill>
+                <a:latin typeface="Calibri"/>
+              </a:rPr>
+              <a:t>1   </a:t>
+            </a:r>
+            <a:r>
+              <a:rPr sz="2400" b="0" i="0">
+                <a:solidFill>
+                  <a:srgbClr val="222B22"/>
+                </a:solidFill>
+                <a:latin typeface="Calibri"/>
+              </a:rPr>
+              <a:t>Welcome — five minutes to open the container</a:t>
+            </a:r>
+          </a:p>
+          <a:p>
+            <a:pPr marL="342900" indent="-342900">
+              <a:spcAft>
+                <a:spcPts val="650"/>
+              </a:spcAft>
+            </a:pPr>
+            <a:r>
+              <a:rPr sz="2400" b="1" i="0">
+                <a:solidFill>
+                  <a:srgbClr val="97BC62"/>
+                </a:solidFill>
+                <a:latin typeface="Calibri"/>
+              </a:rPr>
+              <a:t>2   </a:t>
+            </a:r>
+            <a:r>
+              <a:rPr sz="2400" b="0" i="0">
+                <a:solidFill>
+                  <a:srgbClr val="222B22"/>
+                </a:solidFill>
+                <a:latin typeface="Calibri"/>
+              </a:rPr>
+              <a:t>Phones silenced and put away</a:t>
+            </a:r>
+          </a:p>
+          <a:p>
+            <a:pPr marL="342900" indent="-342900">
+              <a:spcAft>
+                <a:spcPts val="650"/>
+              </a:spcAft>
+            </a:pPr>
+            <a:r>
+              <a:rPr sz="2400" b="1" i="0">
+                <a:solidFill>
+                  <a:srgbClr val="97BC62"/>
+                </a:solidFill>
+                <a:latin typeface="Calibri"/>
+              </a:rPr>
+              <a:t>3   </a:t>
+            </a:r>
+            <a:r>
+              <a:rPr sz="2400" b="0" i="0">
+                <a:solidFill>
+                  <a:srgbClr val="222B22"/>
+                </a:solidFill>
+                <a:latin typeface="Calibri"/>
+              </a:rPr>
+              <a:t>Stand in a circle</a:t>
+            </a:r>
+          </a:p>
+          <a:p>
+            <a:pPr marL="342900" indent="-342900">
+              <a:spcAft>
+                <a:spcPts val="650"/>
+              </a:spcAft>
+            </a:pPr>
+            <a:r>
+              <a:rPr sz="2400" b="1" i="0">
+                <a:solidFill>
+                  <a:srgbClr val="97BC62"/>
+                </a:solidFill>
+                <a:latin typeface="Calibri"/>
+              </a:rPr>
+              <a:t>4   </a:t>
+            </a:r>
+            <a:r>
+              <a:rPr sz="2400" b="0" i="0">
+                <a:solidFill>
+                  <a:srgbClr val="222B22"/>
+                </a:solidFill>
+                <a:latin typeface="Calibri"/>
+              </a:rPr>
+              <a:t>One-word check-in — how you actually are, right now</a:t>
+            </a:r>
+          </a:p>
+          <a:p>
+            <a:pPr marL="342900" indent="-342900">
+              <a:spcAft>
+                <a:spcPts val="650"/>
+              </a:spcAft>
+            </a:pPr>
+            <a:r>
+              <a:rPr sz="2400" b="1" i="0">
+                <a:solidFill>
+                  <a:srgbClr val="97BC62"/>
+                </a:solidFill>
+                <a:latin typeface="Calibri"/>
+              </a:rPr>
+              <a:t>5   </a:t>
+            </a:r>
+            <a:r>
+              <a:rPr sz="2400" b="0" i="0">
+                <a:solidFill>
+                  <a:srgbClr val="222B22"/>
+                </a:solidFill>
+                <a:latin typeface="Calibri"/>
+              </a:rPr>
+              <a:t>Put out / bring in — set something down; bring a blessing in</a:t>
+            </a:r>
+          </a:p>
+          <a:p>
+            <a:pPr marL="342900" indent="-342900">
+              <a:spcAft>
+                <a:spcPts val="650"/>
+              </a:spcAft>
+            </a:pPr>
+            <a:r>
+              <a:rPr sz="2400" b="1" i="0">
+                <a:solidFill>
+                  <a:srgbClr val="97BC62"/>
+                </a:solidFill>
+                <a:latin typeface="Calibri"/>
+              </a:rPr>
+              <a:t>6   </a:t>
+            </a:r>
+            <a:r>
+              <a:rPr sz="2400" b="0" i="0">
+                <a:solidFill>
+                  <a:srgbClr val="222B22"/>
+                </a:solidFill>
+                <a:latin typeface="Calibri"/>
+              </a:rPr>
+              <a:t>Spoken commitment: “I am here. I am paying attention. I am willing to be moved.”</a:t>
+            </a:r>
+          </a:p>
+          <a:p>
+            <a:pPr marL="342900" indent="-342900">
+              <a:spcAft>
+                <a:spcPts val="650"/>
+              </a:spcAft>
+            </a:pPr>
+            <a:r>
+              <a:rPr sz="2400" b="1" i="0">
+                <a:solidFill>
+                  <a:srgbClr val="97BC62"/>
+                </a:solidFill>
+                <a:latin typeface="Calibri"/>
+              </a:rPr>
+              <a:t>7   </a:t>
+            </a:r>
+            <a:r>
+              <a:rPr sz="2400" b="0" i="0">
+                <a:solidFill>
+                  <a:srgbClr val="222B22"/>
+                </a:solidFill>
+                <a:latin typeface="Calibri"/>
+              </a:rPr>
+              <a:t>Opening prayer — “Holy Spirit, you are welcome here. Speak. We are listening.”</a:t>
+            </a:r>
+          </a:p>
+          <a:p>
+            <a:pPr marL="342900" indent="-342900">
+              <a:spcAft>
+                <a:spcPts val="650"/>
+              </a:spcAft>
+            </a:pPr>
+            <a:r>
+              <a:rPr sz="2400" b="1" i="0">
+                <a:solidFill>
+                  <a:srgbClr val="97BC62"/>
+                </a:solidFill>
+                <a:latin typeface="Calibri"/>
+              </a:rPr>
+              <a:t>8   </a:t>
+            </a:r>
+            <a:r>
+              <a:rPr sz="2400" b="0" i="0">
+                <a:solidFill>
+                  <a:srgbClr val="222B22"/>
+                </a:solidFill>
+                <a:latin typeface="Calibri"/>
+              </a:rPr>
+              <a:t>Sit. Begin.</a:t>
+            </a:r>
+          </a:p>
+        </p:txBody>
+      </p:sp>
+      <p:sp>
+        <p:nvSpPr>
+          <p:cNvPr id="90" name="SlideNum"/>
+          <p:cNvSpPr txBox="1"/>
+          <p:nvPr/>
+        </p:nvSpPr>
+        <p:spPr>
+          <a:xfrm>
+            <a:off x="11384280" y="6446520"/>
+            <a:ext cx="640080" cy="292608"/>
+          </a:xfrm>
+          <a:prstGeom prst="rect">
+            <a:avLst/>
+          </a:prstGeom>
+          <a:noFill/>
+        </p:spPr>
+        <p:txBody>
+          <a:bodyPr wrap="none" lIns="0" tIns="0" rIns="45720" bIns="0" anchor="ctr"/>
+          <a:lstStyle/>
+          <a:p>
+            <a:pPr algn="r"/>
+            <a:r>
+              <a:t>222</a:t>
+            </a:r>
+            <a:endParaRPr sz="1000" b="1">
+              <a:solidFill>
+                <a:srgbClr val="7A8A6E"/>
+              </a:solidFill>
+              <a:latin typeface="Calibri"/>
+            </a:endParaRPr>
+          </a:p>
+        </p:txBody>
+      </p:sp>
+    </p:spTree>
+  </p:cSld>
+  <p:clrMapOvr>
+    <a:masterClrMapping/>
+  </p:clrMapOvr>
+</p:sld>
+</file>
+
+<file path=ppt/slides/slide6.xml><?xml version="1.0" encoding="utf-8"?>
+<p:sld xmlns:a="http://schemas.openxmlformats.org/drawingml/2006/main" xmlns:r="http://schemas.openxmlformats.org/officeDocument/2006/relationships" xmlns:p="http://schemas.openxmlformats.org/presentationml/2006/main">
+  <p:cSld>
+    <p:spTree>
+      <p:nvGrpSpPr>
+        <p:cNvPr id="1" name=""/>
+        <p:cNvGrpSpPr/>
+        <p:nvPr/>
+      </p:nvGrpSpPr>
+      <p:grpSpPr>
+        <a:xfrm>
+          <a:off x="0" y="0"/>
+          <a:ext cx="0" cy="0"/>
+          <a:chOff x="0" y="0"/>
+          <a:chExt cx="0" cy="0"/>
+        </a:xfrm>
+      </p:grpSpPr>
+      <p:sp>
+        <p:nvSpPr>
+          <p:cNvPr id="2" name="Rectangle 1"/>
+          <p:cNvSpPr/>
+          <p:nvPr/>
+        </p:nvSpPr>
+        <p:spPr>
+          <a:xfrm>
+            <a:off x="0" y="0"/>
+            <a:ext cx="12191695" cy="6858000"/>
+          </a:xfrm>
+          <a:prstGeom prst="rect">
+            <a:avLst/>
+          </a:prstGeom>
+          <a:solidFill>
+            <a:srgbClr val="FFFFFF"/>
+          </a:solidFill>
+          <a:ln>
+            <a:noFill/>
+          </a:ln>
+        </p:spPr>
+        <p:txBody>
+          <a:bodyPr/>
+          <a:lstStyle/>
+          <a:p>
+            <a:endParaRPr/>
+          </a:p>
+        </p:txBody>
+      </p:sp>
+      <p:sp>
+        <p:nvSpPr>
+          <p:cNvPr id="3" name="TextBox 2"/>
+          <p:cNvSpPr txBox="1"/>
+          <p:nvPr/>
+        </p:nvSpPr>
+        <p:spPr>
+          <a:xfrm>
+            <a:off x="822960" y="502920"/>
+            <a:ext cx="10515600" cy="822960"/>
+          </a:xfrm>
+          <a:prstGeom prst="rect">
+            <a:avLst/>
+          </a:prstGeom>
+          <a:noFill/>
+        </p:spPr>
+        <p:txBody>
+          <a:bodyPr wrap="square">
+            <a:spAutoFit/>
+          </a:bodyPr>
+          <a:lstStyle/>
+          <a:p>
+            <a:pPr algn="l">
+              <a:spcAft>
+                <a:spcPts val="600"/>
+              </a:spcAft>
+            </a:pPr>
+            <a:r>
+              <a:rPr sz="2800" b="1" i="0">
+                <a:solidFill>
+                  <a:srgbClr val="2C5F2D"/>
+                </a:solidFill>
+                <a:latin typeface="Cambria"/>
+              </a:rPr>
               <a:t>Not Growing Weary — Galatians 6:9 and Philippians 1:6</a:t>
             </a:r>
           </a:p>
@@ -7852,7 +7852,7 @@
 </p:sld>
 </file>
 
-<file path=ppt/slides/slide6.xml><?xml version="1.0" encoding="utf-8"?>
+<file path=ppt/slides/slide7.xml><?xml version="1.0" encoding="utf-8"?>
 <p:sld xmlns:a="http://schemas.openxmlformats.org/drawingml/2006/main" xmlns:r="http://schemas.openxmlformats.org/officeDocument/2006/relationships" xmlns:p="http://schemas.openxmlformats.org/presentationml/2006/main">
   <p:cSld>
     <p:spTree>
@@ -8207,7 +8207,7 @@
 </p:sld>
 </file>
 
-<file path=ppt/slides/slide7.xml><?xml version="1.0" encoding="utf-8"?>
+<file path=ppt/slides/slide8.xml><?xml version="1.0" encoding="utf-8"?>
 <p:sld xmlns:a="http://schemas.openxmlformats.org/drawingml/2006/main" xmlns:r="http://schemas.openxmlformats.org/officeDocument/2006/relationships" xmlns:p="http://schemas.openxmlformats.org/presentationml/2006/main">
   <p:cSld>
     <p:spTree>
@@ -8504,7 +8504,7 @@
 </p:sld>
 </file>
 
-<file path=ppt/slides/slide8.xml><?xml version="1.0" encoding="utf-8"?>
+<file path=ppt/slides/slide9.xml><?xml version="1.0" encoding="utf-8"?>
 <p:sld xmlns:a="http://schemas.openxmlformats.org/drawingml/2006/main" xmlns:r="http://schemas.openxmlformats.org/officeDocument/2006/relationships" xmlns:p="http://schemas.openxmlformats.org/presentationml/2006/main">
   <p:cSld>
     <p:spTree>

--- a/_implementation-notes/evening-series/FotH Evening Session 18 Slides DRAFT v1.pptx
+++ b/_implementation-notes/evening-series/FotH Evening Session 18 Slides DRAFT v1.pptx
@@ -6754,7 +6754,7 @@
           <p:nvPr/>
         </p:nvPicPr>
         <p:blipFill>
-          <a:blip r:embed="rId4"/>
+          <a:blip r:embed="rId5"/>
           <a:stretch>
             <a:fillRect/>
           </a:stretch>

--- a/_implementation-notes/evening-series/FotH Evening Session 18 Slides DRAFT v1.pptx
+++ b/_implementation-notes/evening-series/FotH Evening Session 18 Slides DRAFT v1.pptx
@@ -5093,7 +5093,7 @@
           <a:p>
             <a:pPr algn="r"/>
             <a:r>
-              <a:t>227</a:t>
+              <a:t>262</a:t>
             </a:r>
             <a:endParaRPr sz="1000" b="1">
               <a:solidFill>
@@ -5285,7 +5285,7 @@
           <a:p>
             <a:pPr algn="r"/>
             <a:r>
-              <a:t>227a</a:t>
+              <a:t>263</a:t>
             </a:r>
             <a:endParaRPr sz="1000" b="1">
               <a:solidFill>
@@ -5694,7 +5694,7 @@
           <a:p>
             <a:pPr algn="r"/>
             <a:r>
-              <a:t>228</a:t>
+              <a:t>264</a:t>
             </a:r>
             <a:endParaRPr sz="1000" b="1">
               <a:solidFill>
@@ -5991,7 +5991,7 @@
           <a:p>
             <a:pPr algn="r"/>
             <a:r>
-              <a:t>229</a:t>
+              <a:t>265</a:t>
             </a:r>
             <a:endParaRPr sz="1000" b="1">
               <a:solidFill>
@@ -6304,7 +6304,7 @@
           <a:p>
             <a:pPr algn="r"/>
             <a:r>
-              <a:t>230</a:t>
+              <a:t>266</a:t>
             </a:r>
             <a:endParaRPr sz="1000" b="1">
               <a:solidFill>
@@ -6553,7 +6553,7 @@
           <a:p>
             <a:pPr algn="r"/>
             <a:r>
-              <a:t>220</a:t>
+              <a:t>254</a:t>
             </a:r>
             <a:endParaRPr sz="1000" b="1">
               <a:solidFill>
@@ -6734,7 +6734,7 @@
           <a:p>
             <a:pPr algn="r"/>
             <a:r>
-              <a:t>220a</a:t>
+              <a:t>255</a:t>
             </a:r>
             <a:endParaRPr sz="1000" b="1">
               <a:solidFill>
@@ -7123,7 +7123,7 @@
           <a:p>
             <a:pPr algn="r"/>
             <a:r>
-              <a:t>221</a:t>
+              <a:t>256</a:t>
             </a:r>
             <a:endParaRPr sz="1000" b="1">
               <a:solidFill>
@@ -7506,7 +7506,7 @@
           <a:p>
             <a:pPr algn="r"/>
             <a:r>
-              <a:t>222</a:t>
+              <a:t>257</a:t>
             </a:r>
             <a:endParaRPr sz="1000" b="1">
               <a:solidFill>
@@ -7833,7 +7833,7 @@
           <a:p>
             <a:pPr algn="r"/>
             <a:r>
-              <a:t>223</a:t>
+              <a:t>258</a:t>
             </a:r>
             <a:endParaRPr sz="1000" b="1">
               <a:solidFill>
@@ -8105,7 +8105,7 @@
           <a:p>
             <a:pPr algn="r"/>
             <a:r>
-              <a:t>224</a:t>
+              <a:t>259</a:t>
             </a:r>
             <a:endParaRPr sz="1000" b="1">
               <a:solidFill>
@@ -8485,7 +8485,7 @@
           <a:p>
             <a:pPr algn="r"/>
             <a:r>
-              <a:t>225</a:t>
+              <a:t>260</a:t>
             </a:r>
             <a:endParaRPr sz="1000" b="1">
               <a:solidFill>
@@ -8732,7 +8732,7 @@
           <a:p>
             <a:pPr algn="r"/>
             <a:r>
-              <a:t>226</a:t>
+              <a:t>261</a:t>
             </a:r>
             <a:endParaRPr sz="1000" b="1">
               <a:solidFill>

--- a/_implementation-notes/evening-series/FotH Evening Session 18 Slides DRAFT v1.pptx
+++ b/_implementation-notes/evening-series/FotH Evening Session 18 Slides DRAFT v1.pptx
@@ -6754,7 +6754,7 @@
           <p:nvPr/>
         </p:nvPicPr>
         <p:blipFill>
-          <a:blip r:embed="rId5"/>
+          <a:blip r:embed="rId6"/>
           <a:stretch>
             <a:fillRect/>
           </a:stretch>

--- a/_implementation-notes/evening-series/FotH Evening Session 18 Slides DRAFT v1.pptx
+++ b/_implementation-notes/evening-series/FotH Evening Session 18 Slides DRAFT v1.pptx
@@ -1400,7 +1400,7 @@
           <a:p>
             <a:r>
               <a:rPr lang="en-US" sz="1200"/>
-              <a:t>CUES: This script carries the school clock for Session 21, but the Week 21 plan runs food 6:00, session 6:30–5:30 — confirm the times in the family email before announcing.</a:t>
+              <a:t>CUES: This script carries the school clock for Session 21, but the Week 21 plan runs food 6:00, session 6:30–8:30 — confirm the times in the family email before announcing.</a:t>
             </a:r>
           </a:p>
           <a:p>
@@ -8383,7 +8383,7 @@
                 </a:solidFill>
                 <a:latin typeface="Calibri"/>
               </a:rPr>
-              <a:t>Week 21 — Sending and Blessing: whole families, a longer evening — two hours, 4:15 to 6:15</a:t>
+              <a:t>Week 21 — Sending and Blessing: whole families, a longer evening — two hours, 6:30 to 8:30</a:t>
             </a:r>
           </a:p>
           <a:p>

--- a/_implementation-notes/evening-series/FotH Evening Session 18 Slides DRAFT v1.pptx
+++ b/_implementation-notes/evening-series/FotH Evening Session 18 Slides DRAFT v1.pptx
@@ -5093,7 +5093,7 @@
           <a:p>
             <a:pPr algn="r"/>
             <a:r>
-              <a:t>262</a:t>
+              <a:t>263</a:t>
             </a:r>
             <a:endParaRPr sz="1000" b="1">
               <a:solidFill>
@@ -5285,7 +5285,7 @@
           <a:p>
             <a:pPr algn="r"/>
             <a:r>
-              <a:t>263</a:t>
+              <a:t>264</a:t>
             </a:r>
             <a:endParaRPr sz="1000" b="1">
               <a:solidFill>
@@ -5694,7 +5694,7 @@
           <a:p>
             <a:pPr algn="r"/>
             <a:r>
-              <a:t>264</a:t>
+              <a:t>265</a:t>
             </a:r>
             <a:endParaRPr sz="1000" b="1">
               <a:solidFill>
@@ -5991,7 +5991,7 @@
           <a:p>
             <a:pPr algn="r"/>
             <a:r>
-              <a:t>265</a:t>
+              <a:t>266</a:t>
             </a:r>
             <a:endParaRPr sz="1000" b="1">
               <a:solidFill>
@@ -6304,7 +6304,7 @@
           <a:p>
             <a:pPr algn="r"/>
             <a:r>
-              <a:t>266</a:t>
+              <a:t>267</a:t>
             </a:r>
             <a:endParaRPr sz="1000" b="1">
               <a:solidFill>
@@ -6553,7 +6553,7 @@
           <a:p>
             <a:pPr algn="r"/>
             <a:r>
-              <a:t>254</a:t>
+              <a:t>255</a:t>
             </a:r>
             <a:endParaRPr sz="1000" b="1">
               <a:solidFill>
@@ -6734,7 +6734,7 @@
           <a:p>
             <a:pPr algn="r"/>
             <a:r>
-              <a:t>255</a:t>
+              <a:t>256</a:t>
             </a:r>
             <a:endParaRPr sz="1000" b="1">
               <a:solidFill>
@@ -7123,7 +7123,7 @@
           <a:p>
             <a:pPr algn="r"/>
             <a:r>
-              <a:t>256</a:t>
+              <a:t>257</a:t>
             </a:r>
             <a:endParaRPr sz="1000" b="1">
               <a:solidFill>
@@ -7506,7 +7506,7 @@
           <a:p>
             <a:pPr algn="r"/>
             <a:r>
-              <a:t>257</a:t>
+              <a:t>258</a:t>
             </a:r>
             <a:endParaRPr sz="1000" b="1">
               <a:solidFill>
@@ -7833,7 +7833,7 @@
           <a:p>
             <a:pPr algn="r"/>
             <a:r>
-              <a:t>258</a:t>
+              <a:t>259</a:t>
             </a:r>
             <a:endParaRPr sz="1000" b="1">
               <a:solidFill>
@@ -8105,7 +8105,7 @@
           <a:p>
             <a:pPr algn="r"/>
             <a:r>
-              <a:t>259</a:t>
+              <a:t>260</a:t>
             </a:r>
             <a:endParaRPr sz="1000" b="1">
               <a:solidFill>
@@ -8485,7 +8485,7 @@
           <a:p>
             <a:pPr algn="r"/>
             <a:r>
-              <a:t>260</a:t>
+              <a:t>261</a:t>
             </a:r>
             <a:endParaRPr sz="1000" b="1">
               <a:solidFill>
@@ -8732,7 +8732,7 @@
           <a:p>
             <a:pPr algn="r"/>
             <a:r>
-              <a:t>261</a:t>
+              <a:t>262</a:t>
             </a:r>
             <a:endParaRPr sz="1000" b="1">
               <a:solidFill>

--- a/_implementation-notes/evening-series/FotH Evening Session 18 Slides DRAFT v1.pptx
+++ b/_implementation-notes/evening-series/FotH Evening Session 18 Slides DRAFT v1.pptx
@@ -1529,38 +1529,37 @@
           <a:lstStyle/>
           <a:p>
             <a:r>
-              <a:rPr lang="en-US" sz="1200"/>
               <a:t>S18 · 8:28–8:30 · LEAD: CONTAINER HOLDER CIRCLE</a:t>
             </a:r>
           </a:p>
           <a:p>
             <a:r>
-              <a:rPr lang="en-US" sz="1200"/>
               <a:t>BEATS:</a:t>
             </a:r>
           </a:p>
           <a:p>
             <a:r>
-              <a:rPr lang="en-US" sz="1200"/>
               <a:t>1. The Companion-in-Formation runs closing steps 1–5: stand; one-word landing (compare to the opening word — the contrast is data); the one thing; the one practice (the card, as built); the blessings.</a:t>
             </a:r>
           </a:p>
           <a:p>
             <a:r>
-              <a:rPr lang="en-US" sz="1200"/>
               <a:t>2. Expect the blessings step to lean toward the seniors today — let it.</a:t>
             </a:r>
           </a:p>
           <a:p>
             <a:r>
-              <a:rPr lang="en-US" sz="1200"/>
               <a:t>3. Hold the Aaronic blessing — today it comes AFTER the feedback round, on the final slide.</a:t>
             </a:r>
           </a:p>
           <a:p>
             <a:r>
-              <a:rPr lang="en-US" sz="1200"/>
               <a:t>CUES: Blessing form = one short, specific, witnessed sentence of what someone saw the Father doing in another person today — not a speech.</a:t>
+            </a:r>
+          </a:p>
+          <a:p>
+            <a:r>
+              <a:t>BLESSINGS: eyes on the person, not the screen — nothing to read; say what is on your heart for them, specific and short.</a:t>
             </a:r>
           </a:p>
         </p:txBody>
@@ -5555,7 +5554,7 @@
                 </a:solidFill>
                 <a:latin typeface="Calibri"/>
               </a:rPr>
-              <a:t>Blessings — specific, witnessed, short</a:t>
+              <a:t>Blessings — eyes on the person, not the screen: say what is on your heart for them. Specific, witnessed, short</a:t>
             </a:r>
           </a:p>
           <a:p>

--- a/_implementation-notes/evening-series/FotH Evening Session 18 Slides DRAFT v1.pptx
+++ b/_implementation-notes/evening-series/FotH Evening Session 18 Slides DRAFT v1.pptx
@@ -5092,7 +5092,7 @@
           <a:p>
             <a:pPr algn="r"/>
             <a:r>
-              <a:t>263</a:t>
+              <a:t>264</a:t>
             </a:r>
             <a:endParaRPr sz="1000" b="1">
               <a:solidFill>
@@ -5284,7 +5284,7 @@
           <a:p>
             <a:pPr algn="r"/>
             <a:r>
-              <a:t>264</a:t>
+              <a:t>265</a:t>
             </a:r>
             <a:endParaRPr sz="1000" b="1">
               <a:solidFill>
@@ -5693,7 +5693,7 @@
           <a:p>
             <a:pPr algn="r"/>
             <a:r>
-              <a:t>265</a:t>
+              <a:t>266</a:t>
             </a:r>
             <a:endParaRPr sz="1000" b="1">
               <a:solidFill>
@@ -5990,7 +5990,7 @@
           <a:p>
             <a:pPr algn="r"/>
             <a:r>
-              <a:t>266</a:t>
+              <a:t>267</a:t>
             </a:r>
             <a:endParaRPr sz="1000" b="1">
               <a:solidFill>
@@ -6303,7 +6303,7 @@
           <a:p>
             <a:pPr algn="r"/>
             <a:r>
-              <a:t>267</a:t>
+              <a:t>268</a:t>
             </a:r>
             <a:endParaRPr sz="1000" b="1">
               <a:solidFill>
@@ -6552,7 +6552,7 @@
           <a:p>
             <a:pPr algn="r"/>
             <a:r>
-              <a:t>255</a:t>
+              <a:t>256</a:t>
             </a:r>
             <a:endParaRPr sz="1000" b="1">
               <a:solidFill>
@@ -6733,7 +6733,7 @@
           <a:p>
             <a:pPr algn="r"/>
             <a:r>
-              <a:t>256</a:t>
+              <a:t>257</a:t>
             </a:r>
             <a:endParaRPr sz="1000" b="1">
               <a:solidFill>
@@ -7122,7 +7122,7 @@
           <a:p>
             <a:pPr algn="r"/>
             <a:r>
-              <a:t>257</a:t>
+              <a:t>258</a:t>
             </a:r>
             <a:endParaRPr sz="1000" b="1">
               <a:solidFill>
@@ -7505,7 +7505,7 @@
           <a:p>
             <a:pPr algn="r"/>
             <a:r>
-              <a:t>258</a:t>
+              <a:t>259</a:t>
             </a:r>
             <a:endParaRPr sz="1000" b="1">
               <a:solidFill>
@@ -7832,7 +7832,7 @@
           <a:p>
             <a:pPr algn="r"/>
             <a:r>
-              <a:t>259</a:t>
+              <a:t>260</a:t>
             </a:r>
             <a:endParaRPr sz="1000" b="1">
               <a:solidFill>
@@ -8104,7 +8104,7 @@
           <a:p>
             <a:pPr algn="r"/>
             <a:r>
-              <a:t>260</a:t>
+              <a:t>261</a:t>
             </a:r>
             <a:endParaRPr sz="1000" b="1">
               <a:solidFill>
@@ -8484,7 +8484,7 @@
           <a:p>
             <a:pPr algn="r"/>
             <a:r>
-              <a:t>261</a:t>
+              <a:t>262</a:t>
             </a:r>
             <a:endParaRPr sz="1000" b="1">
               <a:solidFill>
@@ -8731,7 +8731,7 @@
           <a:p>
             <a:pPr algn="r"/>
             <a:r>
-              <a:t>262</a:t>
+              <a:t>263</a:t>
             </a:r>
             <a:endParaRPr sz="1000" b="1">
               <a:solidFill>

--- a/_implementation-notes/evening-series/FotH Evening Session 18 Slides DRAFT v1.pptx
+++ b/_implementation-notes/evening-series/FotH Evening Session 18 Slides DRAFT v1.pptx
@@ -784,7 +784,7 @@
           <a:lstStyle/>
           <a:p>
             <a:r>
-              <a:t>S18 · WELCOME · LEAD: CONTAINER HOLDER · GROUNDING — every session opens on this map</a:t>
+              <a:t>E14 · WELCOME · LEAD: CONTAINER HOLDER · GROUNDING — every session opens on this map</a:t>
             </a:r>
           </a:p>
           <a:p>
@@ -794,7 +794,7 @@
           </a:p>
           <a:p>
             <a:r>
-              <a:t>1. Locate tonight on the map, plainly: Session 18 returns to the whole map — all four Connects, for the final stretch. Each connection makes the next one real (Matt. 22:37–40).</a:t>
+              <a:t>1. Locate tonight on the map, plainly: Evening 14 returns to the whole map — all four Connects, for the final stretch. Each connection makes the next one real (Matt. 22:37–40).</a:t>
             </a:r>
           </a:p>
           <a:p>
@@ -855,7 +855,7 @@
           <a:lstStyle/>
           <a:p>
             <a:r>
-              <a:t>S18 · COMMISSIONING · LEAD: CONTENT PRESENTER</a:t>
+              <a:t>E14 · COMMISSIONING · LEAD: CONTENT PRESENTER</a:t>
             </a:r>
           </a:p>
           <a:p>
@@ -926,7 +926,7 @@
           <a:lstStyle/>
           <a:p>
             <a:r>
-              <a:t>S18 · COMMISSIONING · LEAD: CONTENT PRESENTER</a:t>
+              <a:t>E14 · COMMISSIONING · LEAD: CONTENT PRESENTER</a:t>
             </a:r>
           </a:p>
           <a:p>
@@ -992,13 +992,11 @@
           <a:lstStyle/>
           <a:p>
             <a:r>
-              <a:rPr lang="en-US" sz="1200"/>
-              <a:t>S18 · pre-session · DIVIDER</a:t>
-            </a:r>
-          </a:p>
-          <a:p>
-            <a:r>
-              <a:rPr lang="en-US" sz="1200"/>
+              <a:t>E14 · pre-session · DIVIDER</a:t>
+            </a:r>
+          </a:p>
+          <a:p>
+            <a:r>
               <a:t>On screen through dinner and as the circle forms. Greet at the door — the slide holds the room. Name tags out one more time; the year's last re-entry gets the same welcome as its first. Doors close at 7:00 and a Companion-in-Formation opens.</a:t>
             </a:r>
           </a:p>
@@ -1045,37 +1043,31 @@
           <a:lstStyle/>
           <a:p>
             <a:r>
-              <a:rPr lang="en-US" sz="1200"/>
-              <a:t>S18 · 7:00–8:30 · LEAD: BOTH LEADERS CIRCLE</a:t>
-            </a:r>
-          </a:p>
-          <a:p>
-            <a:r>
-              <a:rPr lang="en-US" sz="1200"/>
+              <a:t>E14 · 7:00–8:30 · LEAD: BOTH LEADERS CIRCLE</a:t>
+            </a:r>
+          </a:p>
+          <a:p>
+            <a:r>
               <a:t>BEATS:</a:t>
             </a:r>
           </a:p>
           <a:p>
             <a:r>
-              <a:rPr lang="en-US" sz="1200"/>
               <a:t>1. Frame the night light: Return II, not Return I — the room knows how to come back now; say it out loud and let the session prove it.</a:t>
             </a:r>
           </a:p>
           <a:p>
             <a:r>
-              <a:rPr lang="en-US" sz="1200"/>
               <a:t>2. Walk the road: teen-led open, two verses, a one-sentence what-held round, the final-stretch map, practice, close.</a:t>
             </a:r>
           </a:p>
           <a:p>
             <a:r>
-              <a:rPr lang="en-US" sz="1200"/>
               <a:t>3. One circle all night — no pairing.</a:t>
             </a:r>
           </a:p>
           <a:p>
             <a:r>
-              <a:rPr lang="en-US" sz="1200"/>
               <a:t>GUARD: A light night still gets a full listening — read every check-in word closely; the break may have been hard in some house. Section 6 and the two-adult rule hold today as every night.</a:t>
             </a:r>
           </a:p>
@@ -1122,7 +1114,7 @@
           <a:lstStyle/>
           <a:p>
             <a:r>
-              <a:t>S18 · 7:00–7:08 · LEAD: CONTAINER HOLDER CIRCLE</a:t>
+              <a:t>E14 · 7:00–7:08 · LEAD: CONTAINER HOLDER CIRCLE</a:t>
             </a:r>
           </a:p>
           <a:p>
@@ -1203,37 +1195,31 @@
           <a:lstStyle/>
           <a:p>
             <a:r>
-              <a:rPr lang="en-US" sz="1200"/>
-              <a:t>S18 · 7:25–7:33 · LEAD: CONTENT PRESENTER CIRCLE</a:t>
-            </a:r>
-          </a:p>
-          <a:p>
-            <a:r>
-              <a:rPr lang="en-US" sz="1200"/>
+              <a:t>E14 · 7:25–7:33 · LEAD: CONTENT PRESENTER CIRCLE</a:t>
+            </a:r>
+          </a:p>
+          <a:p>
+            <a:r>
               <a:t>BEATS:</a:t>
             </a:r>
           </a:p>
           <a:p>
             <a:r>
-              <a:rPr lang="en-US" sz="1200"/>
               <a:t>1. Read Galatians 6:9 then Philippians 1:6 aloud from the physical Bible. Brief — the room already owns the first verse.</a:t>
             </a:r>
           </a:p>
           <a:p>
             <a:r>
-              <a:rPr lang="en-US" sz="1200"/>
               <a:t>2. Teach: at the Rhythm week the verse was a warning; today it is a receipt — the chair they are sitting in is the not-giving-up it asks for.</a:t>
             </a:r>
           </a:p>
           <a:p>
             <a:r>
-              <a:rPr lang="en-US" sz="1200"/>
               <a:t>3. Phil 1:6 names why it is not white-knuckling: He began the work; He finishes it; the rhythm just keeps us where the engine runs.</a:t>
             </a:r>
           </a:p>
           <a:p>
             <a:r>
-              <a:rPr lang="en-US" sz="1200"/>
               <a:t>4. Land the observation: last re-entry of the year — look how fast the room came back; the practices belong to them now.</a:t>
             </a:r>
           </a:p>
@@ -1280,49 +1266,41 @@
           <a:lstStyle/>
           <a:p>
             <a:r>
-              <a:rPr lang="en-US" sz="1200"/>
-              <a:t>S18 · 7:33–8:01 · LEAD: CONTENT PRESENTER CIRCLE</a:t>
-            </a:r>
-          </a:p>
-          <a:p>
-            <a:r>
-              <a:rPr lang="en-US" sz="1200"/>
+              <a:t>E14 · 7:33–8:01 · LEAD: CONTENT PRESENTER CIRCLE</a:t>
+            </a:r>
+          </a:p>
+          <a:p>
+            <a:r>
               <a:t>BEATS:</a:t>
             </a:r>
           </a:p>
           <a:p>
             <a:r>
-              <a:rPr lang="en-US" sz="1200"/>
               <a:t>1. One sentence each, full circle: what held from your Rhythm Card across the break — or what slipped and got begun again.</a:t>
             </a:r>
           </a:p>
           <a:p>
             <a:r>
-              <a:rPr lang="en-US" sz="1200"/>
               <a:t>2. Keep it brisk and celebratory — a harvest reading, not an examination; holds and slips are both good news; laughter is allowed and likely.</a:t>
             </a:r>
           </a:p>
           <a:p>
             <a:r>
-              <a:rPr lang="en-US" sz="1200"/>
               <a:t>3. If a sentence becomes a story, receive warmly and keep the circle turning.</a:t>
             </a:r>
           </a:p>
           <a:p>
             <a:r>
-              <a:rPr lang="en-US" sz="1200"/>
               <a:t>4. Close: the room just read itself in one pass, nobody coaxed — best finding of the year; and Joshua's question is about to change hands.</a:t>
             </a:r>
           </a:p>
           <a:p>
             <a:r>
-              <a:rPr lang="en-US" sz="1200"/>
               <a:t>CUES: The arranged parent (Run Card) gives the first sentence — never a cold call on a teen. A Companion quietly tallies how many reported a daily practice holding — numbers only, no names.</a:t>
             </a:r>
           </a:p>
           <a:p>
             <a:r>
-              <a:rPr lang="en-US" sz="1200"/>
               <a:t>GUARD: A slip that sounds like a hard break, not a busy one — nearest Companion notes it and follows up at the door; the round does not stop.</a:t>
             </a:r>
           </a:p>
@@ -1369,43 +1347,36 @@
           <a:lstStyle/>
           <a:p>
             <a:r>
-              <a:rPr lang="en-US" sz="1200"/>
-              <a:t>S18 · 8:01–8:20 · LEAD: CONTENT PRESENTER CIRCLE</a:t>
-            </a:r>
-          </a:p>
-          <a:p>
-            <a:r>
-              <a:rPr lang="en-US" sz="1200"/>
+              <a:t>E14 · 8:01–8:20 · LEAD: CONTENT PRESENTER CIRCLE</a:t>
+            </a:r>
+          </a:p>
+          <a:p>
+            <a:r>
               <a:t>BEATS:</a:t>
             </a:r>
           </a:p>
           <a:p>
             <a:r>
-              <a:rPr lang="en-US" sz="1200"/>
               <a:t>1. Write the five lines live on the whiteboard, saying each: Wk 19 the teens teach the two mercy cards in pairs; Wk 20 The Long Walk — the seniors teach the whole room, journals come; Wk 21 Sending and Blessing — whole families, a TWO-HOUR night; Wk 22 the Commissioning of the Companions.</a:t>
             </a:r>
           </a:p>
           <a:p>
             <a:r>
-              <a:rPr lang="en-US" sz="1200"/>
               <a:t>2. Land the frame sentence: the year now begins to hand itself over — that was always the plan.</a:t>
             </a:r>
           </a:p>
           <a:p>
             <a:r>
-              <a:rPr lang="en-US" sz="1200"/>
-              <a:t>3. Three asks: come, bring your journal, bring the whole family to Week 21 — calendar it today, date visible on the board.</a:t>
-            </a:r>
-          </a:p>
-          <a:p>
-            <a:r>
-              <a:rPr lang="en-US" sz="1200"/>
-              <a:t>CUES: This script carries the school clock for Session 21, but the Week 21 plan runs food 6:00, session 6:30–8:30 — confirm the times in the family email before announcing.</a:t>
-            </a:r>
-          </a:p>
-          <a:p>
-            <a:r>
-              <a:rPr lang="en-US" sz="1200"/>
+              <a:t>3. Three asks: come, bring your journal, bring the whole family to Evening 16 — calendar it today, date visible on the board.</a:t>
+            </a:r>
+          </a:p>
+          <a:p>
+            <a:r>
+              <a:t>CUES: This script carries the school clock for Session 21, but the Evening 16 plan runs food 6:00, session 6:30–8:30 — confirm the times in the family email before announcing.</a:t>
+            </a:r>
+          </a:p>
+          <a:p>
+            <a:r>
               <a:t>GUARD: Watch the teens both ways — seniors hearing their commissioning named get a word of honor at the door; the teen who feels the ending gets warmth this week, not correction today.</a:t>
             </a:r>
           </a:p>
@@ -1452,37 +1423,31 @@
           <a:lstStyle/>
           <a:p>
             <a:r>
-              <a:rPr lang="en-US" sz="1200"/>
-              <a:t>S18 · 8:20–8:24 · LEAD: CONTENT PRESENTER CIRCLE</a:t>
-            </a:r>
-          </a:p>
-          <a:p>
-            <a:r>
-              <a:rPr lang="en-US" sz="1200"/>
+              <a:t>E14 · 8:20–8:24 · LEAD: CONTENT PRESENTER CIRCLE</a:t>
+            </a:r>
+          </a:p>
+          <a:p>
+            <a:r>
               <a:t>BEATS:</a:t>
             </a:r>
           </a:p>
           <a:p>
             <a:r>
-              <a:rPr lang="en-US" sz="1200"/>
               <a:t>1. Co-Companion (Parent) leads: run the Rhythm Card as built — nothing new; if the break knocked a piece loose, begin again on the next available day.</a:t>
             </a:r>
           </a:p>
           <a:p>
             <a:r>
-              <a:rPr lang="en-US" sz="1200"/>
               <a:t>2. Evening-note flavor this week: note where you see God already handing pieces of the year over to you.</a:t>
             </a:r>
           </a:p>
           <a:p>
             <a:r>
-              <a:rPr lang="en-US" sz="1200"/>
               <a:t>3. The Four Questions word to parents — one paragraph, spoken to the middle distance, moved past without pausing for reaction: willing-only, not-yet counts, nobody checks.</a:t>
             </a:r>
           </a:p>
           <a:p>
             <a:r>
-              <a:rPr lang="en-US" sz="1200"/>
               <a:t>GUARD: It is a door left ajar, not a knock. If any parent looks cornered, repeat the guards 1:1 before they leave; whatever they say afterward, receive, encourage, audit nothing.</a:t>
             </a:r>
           </a:p>
@@ -1529,7 +1494,7 @@
           <a:lstStyle/>
           <a:p>
             <a:r>
-              <a:t>S18 · 8:28–8:30 · LEAD: CONTAINER HOLDER CIRCLE</a:t>
+              <a:t>E14 · 8:28–8:30 · LEAD: CONTAINER HOLDER CIRCLE</a:t>
             </a:r>
           </a:p>
           <a:p>
@@ -1605,37 +1570,31 @@
           <a:lstStyle/>
           <a:p>
             <a:r>
-              <a:rPr lang="en-US" sz="1200"/>
-              <a:t>S18 · 8:24–8:28 · LEAD: BOTH LEADERS CIRCLE</a:t>
-            </a:r>
-          </a:p>
-          <a:p>
-            <a:r>
-              <a:rPr lang="en-US" sz="1200"/>
+              <a:t>E14 · 8:24–8:28 · LEAD: BOTH LEADERS CIRCLE</a:t>
+            </a:r>
+          </a:p>
+          <a:p>
+            <a:r>
               <a:t>BEATS:</a:t>
             </a:r>
           </a:p>
           <a:p>
             <a:r>
-              <a:rPr lang="en-US" sz="1200"/>
               <a:t>1. The teen who led answers first: what went well, what I'd do differently, what I'd tell someone teaching today's process.</a:t>
             </a:r>
           </a:p>
           <a:p>
             <a:r>
-              <a:rPr lang="en-US" sz="1200"/>
               <a:t>2. The Lead Companion answers the first two, briefly, for the blocks they carried.</a:t>
             </a:r>
           </a:p>
           <a:p>
             <a:r>
-              <a:rPr lang="en-US" sz="1200"/>
               <a:t>3. Then the room — same two questions; two or three voices each; leaders receive without defending — 'thank you' is the whole response.</a:t>
             </a:r>
           </a:p>
           <a:p>
             <a:r>
-              <a:rPr lang="en-US" sz="1200"/>
               <a:t>CUES: The round may be dropped if the room's energy needs something else; dropping it twice running goes to the team debrief.</a:t>
             </a:r>
           </a:p>
@@ -1682,31 +1641,26 @@
           <a:lstStyle/>
           <a:p>
             <a:r>
-              <a:rPr lang="en-US" sz="1200"/>
-              <a:t>S18 · 8:28–8:30 · LEAD: CONTAINER HOLDER CIRCLE</a:t>
-            </a:r>
-          </a:p>
-          <a:p>
-            <a:r>
-              <a:rPr lang="en-US" sz="1200"/>
+              <a:t>E14 · 8:28–8:30 · LEAD: CONTAINER HOLDER CIRCLE</a:t>
+            </a:r>
+          </a:p>
+          <a:p>
+            <a:r>
               <a:t>BEATS:</a:t>
             </a:r>
           </a:p>
           <a:p>
             <a:r>
-              <a:rPr lang="en-US" sz="1200"/>
               <a:t>1. One sentence for the road: you came back like people who know the way — five weeks to the sending; the season is His, and it is nearly harvest.</a:t>
             </a:r>
           </a:p>
           <a:p>
             <a:r>
-              <a:rPr lang="en-US" sz="1200"/>
               <a:t>2. Speak the Aaronic blessing (Numbers 6:24–26), hands up if you want.</a:t>
             </a:r>
           </a:p>
           <a:p>
             <a:r>
-              <a:rPr lang="en-US" sz="1200"/>
               <a:t>3. Send them glad: see you evenings — Week 19, the teens have the cards.</a:t>
             </a:r>
           </a:p>
@@ -6454,7 +6408,7 @@
                 </a:solidFill>
                 <a:latin typeface="Calibri"/>
               </a:rPr>
-              <a:t>SESSION 18</a:t>
+              <a:t>EVENING 14</a:t>
             </a:r>
           </a:p>
           <a:p>
@@ -6688,7 +6642,7 @@
                 </a:solidFill>
                 <a:latin typeface="Calibri"/>
               </a:rPr>
-              <a:t>Session 18 returns to the whole map — </a:t>
+              <a:t>Evening 14 returns to the whole map — </a:t>
             </a:r>
             <a:r>
               <a:rPr sz="1800" b="1">
@@ -6872,7 +6826,7 @@
                 </a:solidFill>
                 <a:latin typeface="Cambria"/>
               </a:rPr>
-              <a:t>Session 18 — Tonight’s Road</a:t>
+              <a:t>Evening 14 — Tonight’s Road</a:t>
             </a:r>
           </a:p>
         </p:txBody>
@@ -8357,7 +8311,7 @@
                 </a:solidFill>
                 <a:latin typeface="Calibri"/>
               </a:rPr>
-              <a:t>Week 20 — The Long Walk: the seniors teach the whole room; journals come along, and the testimony gathering begins</a:t>
+              <a:t>Evening 15 — The Long Walk: the seniors teach the whole room; journals come along, and the testimony gathering begins</a:t>
             </a:r>
           </a:p>
           <a:p>
@@ -8382,7 +8336,7 @@
                 </a:solidFill>
                 <a:latin typeface="Calibri"/>
               </a:rPr>
-              <a:t>Week 21 — Sending and Blessing: whole families, a longer evening — two hours, 6:30 to 8:30</a:t>
+              <a:t>Evening 16 — Sending and Blessing: whole families, a longer evening — two hours, 6:30 to 8:30</a:t>
             </a:r>
           </a:p>
           <a:p>
@@ -8407,7 +8361,7 @@
                 </a:solidFill>
                 <a:latin typeface="Calibri"/>
               </a:rPr>
-              <a:t>Week 22 — the Commissioning of the Companions, in front of everybody who watched them grow</a:t>
+              <a:t>Evening 17 — the Commissioning of the Companions, in front of everybody who watched them grow</a:t>
             </a:r>
           </a:p>
           <a:p>
@@ -8704,7 +8658,7 @@
                 </a:solidFill>
                 <a:latin typeface="Calibri"/>
               </a:rPr>
-              <a:t>Bring your journal — and put Week 21's two hours on the calendar tonight</a:t>
+              <a:t>Bring your journal — and put Evening 16's two hours on the calendar tonight</a:t>
             </a:r>
           </a:p>
         </p:txBody>

--- a/_implementation-notes/evening-series/FotH Evening Session 18 Slides DRAFT v1.pptx
+++ b/_implementation-notes/evening-series/FotH Evening Session 18 Slides DRAFT v1.pptx
@@ -1357,12 +1357,12 @@
           </a:p>
           <a:p>
             <a:r>
-              <a:t>1. Write the five lines live on the whiteboard, saying each: Wk 19 the teens teach the two mercy cards in pairs; Wk 20 The Long Walk — the seniors teach the whole room, journals come; Wk 21 Sending and Blessing — whole families, a TWO-HOUR night; Wk 22 the Commissioning of the Companions.</a:t>
-            </a:r>
-          </a:p>
-          <a:p>
-            <a:r>
-              <a:t>2. Land the frame sentence: the year now begins to hand itself over — that was always the plan.</a:t>
+              <a:t>1. Write the three lines live on the whiteboard, saying each: Evening 15, The Long Walk — the Companions-in-Formation teach the two mercy cards, journals come; Evening 16, Sending and Blessing — whole families, a TWO-HOUR night; Evening 17, the Commissioning of the Companions.</a:t>
+            </a:r>
+          </a:p>
+          <a:p>
+            <a:r>
+              <a:t>2. Land the frame sentence (John's word, 13 October): 'From here, the evenings stop holding you, and you start holding the practice.' The teens have led from the first night; what steps back now is the structure, and that was always the plan.</a:t>
             </a:r>
           </a:p>
           <a:p>
@@ -1651,7 +1651,7 @@
           </a:p>
           <a:p>
             <a:r>
-              <a:t>1. One sentence for the road: you came back like people who know the way — five weeks to the sending; the season is His, and it is nearly harvest.</a:t>
+              <a:t>1. One sentence for the road: you came back like people who know the way — two evenings to the sending; the season is His, and it is nearly harvest.</a:t>
             </a:r>
           </a:p>
           <a:p>
@@ -1661,7 +1661,7 @@
           </a:p>
           <a:p>
             <a:r>
-              <a:t>3. Send them glad: see you evenings — Week 19, the teens have the cards.</a:t>
+              <a:t>3. Send them glad: see you in two weeks — Evening 15, the teens have the cards.</a:t>
             </a:r>
           </a:p>
         </p:txBody>
@@ -6150,7 +6150,7 @@
                 </a:solidFill>
                 <a:latin typeface="Calibri"/>
               </a:rPr>
-              <a:t>“Five weeks to the sending. Let us not grow weary; the season is His, and it is nearly harvest.”</a:t>
+              <a:t>“Two evenings to the sending. Let us not grow weary; the season is His, and it is nearly harvest.”</a:t>
             </a:r>
           </a:p>
           <a:p>
@@ -6175,7 +6175,7 @@
                 </a:solidFill>
                 <a:latin typeface="Calibri"/>
               </a:rPr>
-              <a:t>“See you Wednesday. Week 19 — the teens have the cards.”</a:t>
+              <a:t>“See you in two weeks — Evening 15. The teens have the cards.”</a:t>
             </a:r>
           </a:p>
         </p:txBody>
@@ -6440,7 +6440,7 @@
                 </a:solidFill>
                 <a:latin typeface="Calibri"/>
               </a:rPr>
-              <a:t>A lighter homecoming — the room knows the way now, and the year begins to hand itself over</a:t>
+              <a:t>A lighter homecoming — the room knows the way now, and from here the practice is yours to hold</a:t>
             </a:r>
           </a:p>
         </p:txBody>
@@ -8286,7 +8286,7 @@
                 </a:solidFill>
                 <a:latin typeface="Calibri"/>
               </a:rPr>
-              <a:t>Week 19 — our Companions-in-Formation teach the two mercy cards — the Signs Card and the Path Home Card — in your pairs</a:t>
+              <a:t>Evening 15 — The Long Walk: our Companions-in-Formation teach the two mercy cards, the Signs Card and the Path Home Card; journals come along, and the testimony gathering begins</a:t>
             </a:r>
           </a:p>
           <a:p>
@@ -8311,7 +8311,7 @@
                 </a:solidFill>
                 <a:latin typeface="Calibri"/>
               </a:rPr>
-              <a:t>Evening 15 — The Long Walk: the seniors teach the whole room; journals come along, and the testimony gathering begins</a:t>
+              <a:t>Evening 16 — Sending and Blessing: whole families, a longer evening — two hours, 6:30 to 8:30</a:t>
             </a:r>
           </a:p>
           <a:p>
@@ -8336,31 +8336,6 @@
                 </a:solidFill>
                 <a:latin typeface="Calibri"/>
               </a:rPr>
-              <a:t>Evening 16 — Sending and Blessing: whole families, a longer evening — two hours, 6:30 to 8:30</a:t>
-            </a:r>
-          </a:p>
-          <a:p>
-            <a:pPr marL="342900" indent="-342900">
-              <a:spcAft>
-                <a:spcPts val="750"/>
-              </a:spcAft>
-            </a:pPr>
-            <a:r>
-              <a:rPr sz="2400" b="1" i="0">
-                <a:solidFill>
-                  <a:srgbClr val="97BC62"/>
-                </a:solidFill>
-                <a:latin typeface="Calibri"/>
-              </a:rPr>
-              <a:t>4   </a:t>
-            </a:r>
-            <a:r>
-              <a:rPr sz="2400" b="0" i="0">
-                <a:solidFill>
-                  <a:srgbClr val="222B22"/>
-                </a:solidFill>
-                <a:latin typeface="Calibri"/>
-              </a:rPr>
               <a:t>Evening 17 — the Commissioning of the Companions, in front of everybody who watched them grow</a:t>
             </a:r>
           </a:p>
@@ -8386,7 +8361,7 @@
                 </a:solidFill>
                 <a:latin typeface="Calibri"/>
               </a:rPr>
-              <a:t>Hear the shape of that list: week by week, the people up front stop being us and start being you</a:t>
+              <a:t>Evening by evening, the structure steps back, and the practice stays with you</a:t>
             </a:r>
           </a:p>
           <a:p>
@@ -8411,7 +8386,7 @@
                 </a:solidFill>
                 <a:latin typeface="Calibri"/>
               </a:rPr>
-              <a:t>The sentence to keep: “the year now begins to hand itself over”</a:t>
+              <a:t>The sentence to keep: “From here, the evenings stop holding you, and you start holding the practice.”</a:t>
             </a:r>
           </a:p>
         </p:txBody>

--- a/_implementation-notes/evening-series/FotH Evening Session 18 Slides DRAFT v1.pptx
+++ b/_implementation-notes/evening-series/FotH Evening Session 18 Slides DRAFT v1.pptx
@@ -16,6 +16,7 @@
     <p:sldId id="476" r:id="rId224"/>
     <p:sldId id="477" r:id="rId225"/>
     <p:sldId id="478" r:id="rId226"/>
+    <p:sldId id="545" r:id="rId20"/>
     <p:sldId id="479" r:id="rId227"/>
     <p:sldId id="543" r:id="rId22"/>
     <p:sldId id="544" r:id="rId23"/>
@@ -751,6 +752,72 @@
 </p:notes>
 </file>
 
+<file path=ppt/notesSlides/notesSlide12.xml><?xml version="1.0" encoding="utf-8"?>
+<p:notes xmlns:a="http://schemas.openxmlformats.org/drawingml/2006/main" xmlns:p="http://schemas.openxmlformats.org/presentationml/2006/main" xmlns:r="http://schemas.openxmlformats.org/officeDocument/2006/relationships">
+  <p:cSld>
+    <p:spTree>
+      <p:nvGrpSpPr>
+        <p:cNvPr id="1" name=""/>
+        <p:cNvGrpSpPr/>
+        <p:nvPr/>
+      </p:nvGrpSpPr>
+      <p:grpSpPr>
+        <a:xfrm>
+          <a:off x="0" y="0"/>
+          <a:ext cx="0" cy="0"/>
+          <a:chOff x="0" y="0"/>
+          <a:chExt cx="0" cy="0"/>
+        </a:xfrm>
+      </p:grpSpPr>
+      <p:sp>
+        <p:nvSpPr>
+          <p:cNvPr id="2" name="Notes Placeholder 1"/>
+          <p:cNvSpPr>
+            <a:spLocks noGrp="1"/>
+          </p:cNvSpPr>
+          <p:nvPr>
+            <p:ph type="body" idx="1"/>
+          </p:nvPr>
+        </p:nvSpPr>
+        <p:spPr/>
+        <p:txBody>
+          <a:bodyPr/>
+          <a:lstStyle/>
+          <a:p>
+            <a:r>
+              <a:t>E14 · 8:08–8:20 · LEAD: CONTENT PRESENTER CIRCLE</a:t>
+            </a:r>
+          </a:p>
+          <a:p>
+            <a:r>
+              <a:t>BEATS: 1. Bridge from the sentence: 'If the evenings stop holding you, what can you hold now? Where do you still need someone?' 2. Write, 3 minutes, all three questions: what can I do now, on my own, that I couldn't when we started? where do I still need someone beside me — a parent, an adult, this group? what would help me move one 'not yet' toward ready before we are sent? 3. Pairs within families, 6 minutes: the parent answers first — parents tell first. Then the parent names one place they see their teen ready, and one place they still want to walk beside them. 4. Room round, 3 minutes: one 'ready' each, out loud; a parent begins. The 'not yets' stay in the pair.</a:t>
+            </a:r>
+          </a:p>
+          <a:p>
+            <a:r>
+              <a:t>CUES: Never cold-call a teen; pass-anytime holds. The shrinking answer to 'where do I still need an adult?' is the measure the room has been watching since the Session 6 leader questions; say so lightly, once.</a:t>
+            </a:r>
+          </a:p>
+          <a:p>
+            <a:r>
+              <a:t>GUARD: 'Not yet' is honest, never a failure. This is about practices and leading, not anyone's standing with God. Nothing is written down by the team and nothing is graded; it is the room reading itself. A 'not yet' that is heavy gets a follow-up within the week, not a fix tonight.</a:t>
+            </a:r>
+          </a:p>
+          <a:p>
+            <a:r>
+              <a:t>FROM: John's word, 13 October; the S6 leader questions ('Can you do things now you couldn't in August?' 'Where do you still need an adult?') and the 13 October dinner sheet.</a:t>
+            </a:r>
+          </a:p>
+        </p:txBody>
+      </p:sp>
+    </p:spTree>
+  </p:cSld>
+  <p:clrMapOvr>
+    <a:masterClrMapping/>
+  </p:clrMapOvr>
+</p:notes>
+</file>
+
 <file path=ppt/notesSlides/notesSlide13.xml><?xml version="1.0" encoding="utf-8"?>
 <p:notes xmlns:a="http://schemas.openxmlformats.org/drawingml/2006/main" xmlns:p="http://schemas.openxmlformats.org/presentationml/2006/main" xmlns:r="http://schemas.openxmlformats.org/officeDocument/2006/relationships">
   <p:cSld>
@@ -1347,7 +1414,7 @@
           <a:lstStyle/>
           <a:p>
             <a:r>
-              <a:t>E14 · 8:01–8:20 · LEAD: CONTENT PRESENTER CIRCLE</a:t>
+              <a:t>E14 · 8:01–8:08 · LEAD: CONTENT PRESENTER CIRCLE</a:t>
             </a:r>
           </a:p>
           <a:p>
@@ -1367,7 +1434,7 @@
           </a:p>
           <a:p>
             <a:r>
-              <a:t>3. Three asks: come, bring your journal, bring the whole family to Evening 16 — calendar it today, date visible on the board.</a:t>
+              <a:t>3. Keep it to seven minutes; Ready, and Not Yet follows. 4. Three asks: come, bring your journal, bring the whole family to Evening 16 — calendar it today, date visible on the board.</a:t>
             </a:r>
           </a:p>
           <a:p>
@@ -1443,7 +1510,7 @@
           </a:p>
           <a:p>
             <a:r>
-              <a:t>3. The Four Questions word to parents — one paragraph, spoken to the middle distance, moved past without pausing for reaction: willing-only, not-yet counts, nobody checks.</a:t>
+              <a:t>3. The invitation list (John's word, 13 October): start a list of who you would invite to the follow-up series — names, not categories; pray over it before asking anyone. The group decides together, after Evening 17, what the follow-up is; the list is how each family comes ready to that conversation. Names stay in journals; nobody is asked to say them tonight, and the team keeps no list. 4. The Four Questions word to parents — one paragraph, spoken to the middle distance, moved past without pausing for reaction: willing-only, not-yet counts, nobody checks.</a:t>
             </a:r>
           </a:p>
           <a:p>
@@ -4874,6 +4941,314 @@
 </file>
 
 <file path=ppt/slides/slide10.xml><?xml version="1.0" encoding="utf-8"?>
+<p:sld xmlns:a="http://schemas.openxmlformats.org/drawingml/2006/main" xmlns:r="http://schemas.openxmlformats.org/officeDocument/2006/relationships" xmlns:p="http://schemas.openxmlformats.org/presentationml/2006/main">
+  <p:cSld>
+    <p:spTree>
+      <p:nvGrpSpPr>
+        <p:cNvPr id="1" name=""/>
+        <p:cNvGrpSpPr/>
+        <p:nvPr/>
+      </p:nvGrpSpPr>
+      <p:grpSpPr>
+        <a:xfrm>
+          <a:off x="0" y="0"/>
+          <a:ext cx="0" cy="0"/>
+          <a:chOff x="0" y="0"/>
+          <a:chExt cx="0" cy="0"/>
+        </a:xfrm>
+      </p:grpSpPr>
+      <p:sp>
+        <p:nvSpPr>
+          <p:cNvPr id="2" name="Rectangle 1"/>
+          <p:cNvSpPr/>
+          <p:nvPr/>
+        </p:nvSpPr>
+        <p:spPr>
+          <a:xfrm>
+            <a:off x="0" y="0"/>
+            <a:ext cx="12191695" cy="6858000"/>
+          </a:xfrm>
+          <a:prstGeom prst="rect">
+            <a:avLst/>
+          </a:prstGeom>
+          <a:solidFill>
+            <a:srgbClr val="FFFFFF"/>
+          </a:solidFill>
+          <a:ln>
+            <a:noFill/>
+          </a:ln>
+        </p:spPr>
+        <p:txBody>
+          <a:bodyPr/>
+          <a:lstStyle/>
+          <a:p>
+            <a:endParaRPr/>
+          </a:p>
+        </p:txBody>
+      </p:sp>
+      <p:sp>
+        <p:nvSpPr>
+          <p:cNvPr id="3" name="TextBox 2"/>
+          <p:cNvSpPr txBox="1"/>
+          <p:nvPr/>
+        </p:nvSpPr>
+        <p:spPr>
+          <a:xfrm>
+            <a:off x="822960" y="502920"/>
+            <a:ext cx="10515600" cy="822960"/>
+          </a:xfrm>
+          <a:prstGeom prst="rect">
+            <a:avLst/>
+          </a:prstGeom>
+          <a:noFill/>
+        </p:spPr>
+        <p:txBody>
+          <a:bodyPr wrap="square">
+            <a:spAutoFit/>
+          </a:bodyPr>
+          <a:lstStyle/>
+          <a:p>
+            <a:pPr algn="l">
+              <a:spcAft>
+                <a:spcPts val="600"/>
+              </a:spcAft>
+            </a:pPr>
+            <a:r>
+              <a:rPr sz="2800" b="1" i="0">
+                <a:solidFill>
+                  <a:srgbClr val="2C5F2D"/>
+                </a:solidFill>
+                <a:latin typeface="Cambria"/>
+              </a:rPr>
+              <a:t>Homework — Two Weeks, Four Parts</a:t>
+            </a:r>
+          </a:p>
+        </p:txBody>
+      </p:sp>
+      <p:sp>
+        <p:nvSpPr>
+          <p:cNvPr id="4" name="TextBox 4"/>
+          <p:cNvSpPr txBox="1"/>
+          <p:nvPr/>
+        </p:nvSpPr>
+        <p:spPr>
+          <a:xfrm>
+            <a:off x="822960" y="1554480"/>
+            <a:ext cx="6675120" cy="4892040"/>
+          </a:xfrm>
+          <a:prstGeom prst="rect">
+            <a:avLst/>
+          </a:prstGeom>
+          <a:noFill/>
+        </p:spPr>
+        <p:txBody>
+          <a:bodyPr wrap="square" lIns="91440" tIns="91440" rIns="91440" bIns="91440"/>
+          <a:lstStyle/>
+          <a:p>
+            <a:pPr marL="274320" indent="-274320">
+              <a:spcAft>
+                <a:spcPts val="900"/>
+              </a:spcAft>
+            </a:pPr>
+            <a:r>
+              <a:rPr sz="2000" b="1" i="0">
+                <a:solidFill>
+                  <a:srgbClr val="97BC62"/>
+                </a:solidFill>
+                <a:latin typeface="Calibri"/>
+              </a:rPr>
+              <a:t>•  </a:t>
+            </a:r>
+            <a:r>
+              <a:rPr sz="2000" b="0" i="0">
+                <a:solidFill>
+                  <a:srgbClr val="222B22"/>
+                </a:solidFill>
+                <a:latin typeface="Calibri"/>
+              </a:rPr>
+              <a:t>Run your Rhythm Card as built — nothing new, nothing extra; if the break knocked a piece loose, begin again on the next available day</a:t>
+            </a:r>
+          </a:p>
+          <a:p>
+            <a:pPr marL="274320" indent="-274320">
+              <a:spcAft>
+                <a:spcPts val="900"/>
+              </a:spcAft>
+            </a:pPr>
+            <a:r>
+              <a:rPr sz="2000" b="1" i="0">
+                <a:solidFill>
+                  <a:srgbClr val="97BC62"/>
+                </a:solidFill>
+                <a:latin typeface="Calibri"/>
+              </a:rPr>
+              <a:t>•  </a:t>
+            </a:r>
+            <a:r>
+              <a:rPr sz="2000" b="0" i="0">
+                <a:solidFill>
+                  <a:srgbClr val="222B22"/>
+                </a:solidFill>
+                <a:latin typeface="Calibri"/>
+              </a:rPr>
+              <a:t>The evening note, one extra flavor: note where you see God already handing pieces of this year over to you</a:t>
+            </a:r>
+          </a:p>
+          <a:p>
+            <a:pPr marL="274320" indent="-274320">
+              <a:spcAft>
+                <a:spcPts val="900"/>
+              </a:spcAft>
+            </a:pPr>
+            <a:r>
+              <a:rPr sz="2000" b="1" i="0">
+                <a:solidFill>
+                  <a:srgbClr val="97BC62"/>
+                </a:solidFill>
+                <a:latin typeface="Calibri"/>
+              </a:rPr>
+              <a:t>•  </a:t>
+            </a:r>
+            <a:r>
+              <a:rPr sz="2000" b="0" i="0">
+                <a:solidFill>
+                  <a:srgbClr val="222B22"/>
+                </a:solidFill>
+                <a:latin typeface="Calibri"/>
+              </a:rPr>
+              <a:t>Start a list: who would you invite to the follow-up series? Names, not categories. Pray over it before you ask</a:t>
+            </a:r>
+          </a:p>
+          <a:p>
+            <a:pPr marL="274320" indent="-274320">
+              <a:spcAft>
+                <a:spcPts val="900"/>
+              </a:spcAft>
+            </a:pPr>
+            <a:r>
+              <a:rPr sz="2000" b="1" i="0">
+                <a:solidFill>
+                  <a:srgbClr val="97BC62"/>
+                </a:solidFill>
+                <a:latin typeface="Calibri"/>
+              </a:rPr>
+              <a:t>•  </a:t>
+            </a:r>
+            <a:r>
+              <a:rPr sz="2000" b="0" i="0">
+                <a:solidFill>
+                  <a:srgbClr val="222B22"/>
+                </a:solidFill>
+                <a:latin typeface="Calibri"/>
+              </a:rPr>
+              <a:t>For the parents, said once: the Four Questions door is still open — willing-only, whenever the moment is right; nobody will ever check. The questions keep</a:t>
+            </a:r>
+          </a:p>
+          <a:p>
+            <a:pPr marL="274320" indent="-274320">
+              <a:spcAft>
+                <a:spcPts val="900"/>
+              </a:spcAft>
+            </a:pPr>
+            <a:r>
+              <a:rPr sz="2000" b="1" i="0">
+                <a:solidFill>
+                  <a:srgbClr val="97BC62"/>
+                </a:solidFill>
+                <a:latin typeface="Calibri"/>
+              </a:rPr>
+              <a:t>•  </a:t>
+            </a:r>
+            <a:r>
+              <a:rPr sz="2000" b="0" i="0">
+                <a:solidFill>
+                  <a:srgbClr val="222B22"/>
+                </a:solidFill>
+                <a:latin typeface="Calibri"/>
+              </a:rPr>
+              <a:t>Bring your journal — and put Evening 16's two hours on the calendar tonight</a:t>
+            </a:r>
+          </a:p>
+        </p:txBody>
+      </p:sp>
+      <p:sp>
+        <p:nvSpPr>
+          <p:cNvPr id="90" name="SlideNum"/>
+          <p:cNvSpPr txBox="1"/>
+          <p:nvPr/>
+        </p:nvSpPr>
+        <p:spPr>
+          <a:xfrm>
+            <a:off x="11384280" y="6446520"/>
+            <a:ext cx="640080" cy="292608"/>
+          </a:xfrm>
+          <a:prstGeom prst="rect">
+            <a:avLst/>
+          </a:prstGeom>
+          <a:noFill/>
+        </p:spPr>
+        <p:txBody>
+          <a:bodyPr wrap="none" lIns="0" tIns="0" rIns="45720" bIns="0" anchor="ctr"/>
+          <a:lstStyle/>
+          <a:p>
+            <a:pPr algn="r"/>
+            <a:r>
+              <a:t>264</a:t>
+            </a:r>
+            <a:endParaRPr sz="1000" b="1">
+              <a:solidFill>
+                <a:srgbClr val="7A8A6E"/>
+              </a:solidFill>
+              <a:latin typeface="Calibri"/>
+            </a:endParaRPr>
+          </a:p>
+        </p:txBody>
+      </p:sp>
+      <p:pic>
+        <p:nvPicPr>
+          <p:cNvPr id="33" name="Picture 33" descr="seedling - what grows between Wednesdays"/>
+          <p:cNvPicPr>
+            <a:picLocks noChangeAspect="1"/>
+          </p:cNvPicPr>
+          <p:nvPr/>
+        </p:nvPicPr>
+        <p:blipFill>
+          <a:blip r:embed="rId3"/>
+          <a:stretch>
+            <a:fillRect/>
+          </a:stretch>
+        </p:blipFill>
+        <p:spPr>
+          <a:xfrm>
+            <a:off x="8103612" y="1463040"/>
+            <a:ext cx="3262379" cy="4892040"/>
+          </a:xfrm>
+          <a:prstGeom prst="rect">
+            <a:avLst/>
+          </a:prstGeom>
+          <a:ln w="76200">
+            <a:solidFill>
+              <a:srgbClr val="FFFFFF"/>
+            </a:solidFill>
+          </a:ln>
+          <a:effectLst>
+            <a:outerShdw blurRad="63500" dist="25400" dir="5400000" rotWithShape="0">
+              <a:srgbClr val="000000">
+                <a:alpha val="35000"/>
+              </a:srgbClr>
+            </a:outerShdw>
+          </a:effectLst>
+        </p:spPr>
+      </p:pic>
+    </p:spTree>
+  </p:cSld>
+  <p:clrMapOvr>
+    <a:masterClrMapping/>
+  </p:clrMapOvr>
+</p:sld>
+</file>
+
+<file path=ppt/slides/slide11.xml><?xml version="1.0" encoding="utf-8"?>
 <p:sld xmlns:a="http://schemas.openxmlformats.org/drawingml/2006/main" xmlns:p="http://schemas.openxmlformats.org/presentationml/2006/main" xmlns:r="http://schemas.openxmlformats.org/officeDocument/2006/relationships">
   <p:cSld>
     <p:spTree>
@@ -5046,7 +5421,7 @@
           <a:p>
             <a:pPr algn="r"/>
             <a:r>
-              <a:t>264</a:t>
+              <a:t>265</a:t>
             </a:r>
             <a:endParaRPr sz="1000" b="1">
               <a:solidFill>
@@ -5065,7 +5440,7 @@
 </p:sld>
 </file>
 
-<file path=ppt/slides/slide11.xml><?xml version="1.0" encoding="utf-8"?>
+<file path=ppt/slides/slide12.xml><?xml version="1.0" encoding="utf-8"?>
 <p:sld xmlns:a="http://schemas.openxmlformats.org/drawingml/2006/main" xmlns:p="http://schemas.openxmlformats.org/presentationml/2006/main" xmlns:r="http://schemas.openxmlformats.org/officeDocument/2006/relationships">
   <p:cSld>
     <p:spTree>
@@ -5238,415 +5613,6 @@
           <a:p>
             <a:pPr algn="r"/>
             <a:r>
-              <a:t>265</a:t>
-            </a:r>
-            <a:endParaRPr sz="1000" b="1">
-              <a:solidFill>
-                <a:srgbClr val="7A8A6E"/>
-              </a:solidFill>
-              <a:latin typeface="Calibri"/>
-            </a:endParaRPr>
-          </a:p>
-        </p:txBody>
-      </p:sp>
-    </p:spTree>
-  </p:cSld>
-  <p:clrMapOvr>
-    <a:masterClrMapping/>
-  </p:clrMapOvr>
-</p:sld>
-</file>
-
-<file path=ppt/slides/slide12.xml><?xml version="1.0" encoding="utf-8"?>
-<p:sld xmlns:a="http://schemas.openxmlformats.org/drawingml/2006/main" xmlns:r="http://schemas.openxmlformats.org/officeDocument/2006/relationships" xmlns:p="http://schemas.openxmlformats.org/presentationml/2006/main">
-  <p:cSld>
-    <p:spTree>
-      <p:nvGrpSpPr>
-        <p:cNvPr id="1" name=""/>
-        <p:cNvGrpSpPr/>
-        <p:nvPr/>
-      </p:nvGrpSpPr>
-      <p:grpSpPr>
-        <a:xfrm>
-          <a:off x="0" y="0"/>
-          <a:ext cx="0" cy="0"/>
-          <a:chOff x="0" y="0"/>
-          <a:chExt cx="0" cy="0"/>
-        </a:xfrm>
-      </p:grpSpPr>
-      <p:sp>
-        <p:nvSpPr>
-          <p:cNvPr id="2" name="Rectangle 1"/>
-          <p:cNvSpPr/>
-          <p:nvPr/>
-        </p:nvSpPr>
-        <p:spPr>
-          <a:xfrm>
-            <a:off x="0" y="0"/>
-            <a:ext cx="12191695" cy="6858000"/>
-          </a:xfrm>
-          <a:prstGeom prst="rect">
-            <a:avLst/>
-          </a:prstGeom>
-          <a:solidFill>
-            <a:srgbClr val="FFFFFF"/>
-          </a:solidFill>
-          <a:ln>
-            <a:noFill/>
-          </a:ln>
-        </p:spPr>
-        <p:txBody>
-          <a:bodyPr/>
-          <a:lstStyle/>
-          <a:p>
-            <a:endParaRPr/>
-          </a:p>
-        </p:txBody>
-      </p:sp>
-      <p:sp>
-        <p:nvSpPr>
-          <p:cNvPr id="3" name="TextBox 2"/>
-          <p:cNvSpPr txBox="1"/>
-          <p:nvPr/>
-        </p:nvSpPr>
-        <p:spPr>
-          <a:xfrm>
-            <a:off x="822960" y="502920"/>
-            <a:ext cx="10515600" cy="822960"/>
-          </a:xfrm>
-          <a:prstGeom prst="rect">
-            <a:avLst/>
-          </a:prstGeom>
-          <a:noFill/>
-        </p:spPr>
-        <p:txBody>
-          <a:bodyPr wrap="square">
-            <a:spAutoFit/>
-          </a:bodyPr>
-          <a:lstStyle/>
-          <a:p>
-            <a:pPr algn="l">
-              <a:spcAft>
-                <a:spcPts val="600"/>
-              </a:spcAft>
-            </a:pPr>
-            <a:r>
-              <a:rPr sz="2800" b="1" i="0">
-                <a:solidFill>
-                  <a:srgbClr val="2C5F2D"/>
-                </a:solidFill>
-                <a:latin typeface="Cambria"/>
-              </a:rPr>
-              <a:t>Closing the Container + Aaronic Blessing</a:t>
-            </a:r>
-          </a:p>
-        </p:txBody>
-      </p:sp>
-      <p:sp>
-        <p:nvSpPr>
-          <p:cNvPr id="4" name="TextBox 4"/>
-          <p:cNvSpPr txBox="1"/>
-          <p:nvPr/>
-        </p:nvSpPr>
-        <p:spPr>
-          <a:xfrm>
-            <a:off x="822960" y="1600200"/>
-            <a:ext cx="5669280" cy="4572000"/>
-          </a:xfrm>
-          <a:prstGeom prst="rect">
-            <a:avLst/>
-          </a:prstGeom>
-          <a:noFill/>
-        </p:spPr>
-        <p:txBody>
-          <a:bodyPr wrap="square" lIns="91440" tIns="91440" rIns="91440" bIns="91440"/>
-          <a:lstStyle/>
-          <a:p>
-            <a:pPr marL="274320" indent="-274320">
-              <a:spcAft>
-                <a:spcPts val="900"/>
-              </a:spcAft>
-            </a:pPr>
-            <a:r>
-              <a:rPr sz="2200" b="1" i="0">
-                <a:solidFill>
-                  <a:srgbClr val="97BC62"/>
-                </a:solidFill>
-                <a:latin typeface="Calibri"/>
-              </a:rPr>
-              <a:t>•  </a:t>
-            </a:r>
-            <a:r>
-              <a:rPr sz="2200" b="0" i="0">
-                <a:solidFill>
-                  <a:srgbClr val="222B22"/>
-                </a:solidFill>
-                <a:latin typeface="Calibri"/>
-              </a:rPr>
-              <a:t>We close the way we opened — the container, six steps:</a:t>
-            </a:r>
-          </a:p>
-          <a:p>
-            <a:pPr marL="685800" indent="-274320">
-              <a:spcAft>
-                <a:spcPts val="700"/>
-              </a:spcAft>
-            </a:pPr>
-            <a:r>
-              <a:rPr sz="2000" b="1" i="0">
-                <a:solidFill>
-                  <a:srgbClr val="97BC62"/>
-                </a:solidFill>
-                <a:latin typeface="Calibri"/>
-              </a:rPr>
-              <a:t>1   </a:t>
-            </a:r>
-            <a:r>
-              <a:rPr sz="2000" b="0" i="0">
-                <a:solidFill>
-                  <a:srgbClr val="222B22"/>
-                </a:solidFill>
-                <a:latin typeface="Calibri"/>
-              </a:rPr>
-              <a:t>Stand again — same circle, same posture as the open</a:t>
-            </a:r>
-          </a:p>
-          <a:p>
-            <a:pPr marL="685800" indent="-274320">
-              <a:spcAft>
-                <a:spcPts val="700"/>
-              </a:spcAft>
-            </a:pPr>
-            <a:r>
-              <a:rPr sz="2000" b="1" i="0">
-                <a:solidFill>
-                  <a:srgbClr val="97BC62"/>
-                </a:solidFill>
-                <a:latin typeface="Calibri"/>
-              </a:rPr>
-              <a:t>2   </a:t>
-            </a:r>
-            <a:r>
-              <a:rPr sz="2000" b="0" i="0">
-                <a:solidFill>
-                  <a:srgbClr val="222B22"/>
-                </a:solidFill>
-                <a:latin typeface="Calibri"/>
-              </a:rPr>
-              <a:t>One-word landing — compare it to your opening word</a:t>
-            </a:r>
-          </a:p>
-          <a:p>
-            <a:pPr marL="685800" indent="-274320">
-              <a:spcAft>
-                <a:spcPts val="700"/>
-              </a:spcAft>
-            </a:pPr>
-            <a:r>
-              <a:rPr sz="2000" b="1" i="0">
-                <a:solidFill>
-                  <a:srgbClr val="97BC62"/>
-                </a:solidFill>
-                <a:latin typeface="Calibri"/>
-              </a:rPr>
-              <a:t>3   </a:t>
-            </a:r>
-            <a:r>
-              <a:rPr sz="2000" b="0" i="0">
-                <a:solidFill>
-                  <a:srgbClr val="222B22"/>
-                </a:solidFill>
-                <a:latin typeface="Calibri"/>
-              </a:rPr>
-              <a:t>The one thing you are taking from tonight</a:t>
-            </a:r>
-          </a:p>
-          <a:p>
-            <a:pPr marL="685800" indent="-274320">
-              <a:spcAft>
-                <a:spcPts val="700"/>
-              </a:spcAft>
-            </a:pPr>
-            <a:r>
-              <a:rPr sz="2000" b="1" i="0">
-                <a:solidFill>
-                  <a:srgbClr val="97BC62"/>
-                </a:solidFill>
-                <a:latin typeface="Calibri"/>
-              </a:rPr>
-              <a:t>4   </a:t>
-            </a:r>
-            <a:r>
-              <a:rPr sz="2000" b="0" i="0">
-                <a:solidFill>
-                  <a:srgbClr val="222B22"/>
-                </a:solidFill>
-                <a:latin typeface="Calibri"/>
-              </a:rPr>
-              <a:t>The one practice — committed aloud, or modified to one you will actually keep</a:t>
-            </a:r>
-          </a:p>
-          <a:p>
-            <a:pPr marL="685800" indent="-274320">
-              <a:spcAft>
-                <a:spcPts val="700"/>
-              </a:spcAft>
-            </a:pPr>
-            <a:r>
-              <a:rPr sz="2000" b="1" i="0">
-                <a:solidFill>
-                  <a:srgbClr val="97BC62"/>
-                </a:solidFill>
-                <a:latin typeface="Calibri"/>
-              </a:rPr>
-              <a:t>5   </a:t>
-            </a:r>
-            <a:r>
-              <a:rPr sz="2000" b="0" i="0">
-                <a:solidFill>
-                  <a:srgbClr val="222B22"/>
-                </a:solidFill>
-                <a:latin typeface="Calibri"/>
-              </a:rPr>
-              <a:t>Blessings — eyes on the person, not the screen: say what is on your heart for them. Specific, witnessed, short</a:t>
-            </a:r>
-          </a:p>
-          <a:p>
-            <a:pPr marL="685800" indent="-274320">
-              <a:spcAft>
-                <a:spcPts val="700"/>
-              </a:spcAft>
-            </a:pPr>
-            <a:r>
-              <a:rPr sz="2000" b="1" i="0">
-                <a:solidFill>
-                  <a:srgbClr val="97BC62"/>
-                </a:solidFill>
-                <a:latin typeface="Calibri"/>
-              </a:rPr>
-              <a:t>6   </a:t>
-            </a:r>
-            <a:r>
-              <a:rPr sz="2000" b="0" i="0">
-                <a:solidFill>
-                  <a:srgbClr val="222B22"/>
-                </a:solidFill>
-                <a:latin typeface="Calibri"/>
-              </a:rPr>
-              <a:t>Closing prayer — and the Aaronic blessing, spoken over each other, face to face</a:t>
-            </a:r>
-          </a:p>
-        </p:txBody>
-      </p:sp>
-      <p:sp>
-        <p:nvSpPr>
-          <p:cNvPr id="6" name="TextBox 6"/>
-          <p:cNvSpPr txBox="1"/>
-          <p:nvPr/>
-        </p:nvSpPr>
-        <p:spPr>
-          <a:xfrm>
-            <a:off x="6766560" y="1737360"/>
-            <a:ext cx="4663440" cy="2926080"/>
-          </a:xfrm>
-          <a:prstGeom prst="rect">
-            <a:avLst/>
-          </a:prstGeom>
-          <a:solidFill>
-            <a:srgbClr val="F1F6EC"/>
-          </a:solidFill>
-        </p:spPr>
-        <p:txBody>
-          <a:bodyPr wrap="square" lIns="91440" tIns="91440" rIns="91440" bIns="91440" anchor="ctr"/>
-          <a:lstStyle/>
-          <a:p>
-            <a:pPr>
-              <a:spcAft>
-                <a:spcPts val="900"/>
-              </a:spcAft>
-            </a:pPr>
-            <a:r>
-              <a:rPr sz="1200" b="1" i="0">
-                <a:solidFill>
-                  <a:srgbClr val="97BC62"/>
-                </a:solidFill>
-                <a:latin typeface="Calibri"/>
-              </a:rPr>
-              <a:t>THE AARONIC BLESSING — NUMBERS 6:24–26</a:t>
-            </a:r>
-          </a:p>
-          <a:p>
-            <a:pPr>
-              <a:spcAft>
-                <a:spcPts val="600"/>
-              </a:spcAft>
-            </a:pPr>
-            <a:r>
-              <a:rPr sz="2400" b="0" i="1">
-                <a:solidFill>
-                  <a:srgbClr val="222B22"/>
-                </a:solidFill>
-                <a:latin typeface="Cambria"/>
-              </a:rPr>
-              <a:t>“The Lord bless you and keep you;</a:t>
-            </a:r>
-          </a:p>
-          <a:p>
-            <a:pPr>
-              <a:spcAft>
-                <a:spcPts val="600"/>
-              </a:spcAft>
-            </a:pPr>
-            <a:r>
-              <a:rPr sz="2400" b="0" i="1">
-                <a:solidFill>
-                  <a:srgbClr val="222B22"/>
-                </a:solidFill>
-                <a:latin typeface="Cambria"/>
-              </a:rPr>
-              <a:t>the Lord make his face to shine upon you, and be gracious to you;</a:t>
-            </a:r>
-          </a:p>
-          <a:p>
-            <a:pPr>
-              <a:spcAft>
-                <a:spcPts val="600"/>
-              </a:spcAft>
-            </a:pPr>
-            <a:r>
-              <a:rPr sz="2400" b="0" i="1">
-                <a:solidFill>
-                  <a:srgbClr val="222B22"/>
-                </a:solidFill>
-                <a:latin typeface="Cambria"/>
-              </a:rPr>
-              <a:t>the Lord lift up his countenance upon you, and give you peace.”</a:t>
-            </a:r>
-          </a:p>
-        </p:txBody>
-      </p:sp>
-      <p:sp>
-        <p:nvSpPr>
-          <p:cNvPr id="90" name="SlideNum"/>
-          <p:cNvSpPr txBox="1"/>
-          <p:nvPr/>
-        </p:nvSpPr>
-        <p:spPr>
-          <a:xfrm>
-            <a:off x="11384280" y="6446520"/>
-            <a:ext cx="640080" cy="292608"/>
-          </a:xfrm>
-          <a:prstGeom prst="rect">
-            <a:avLst/>
-          </a:prstGeom>
-          <a:noFill/>
-        </p:spPr>
-        <p:txBody>
-          <a:bodyPr wrap="none" lIns="0" tIns="0" rIns="45720" bIns="0" anchor="ctr"/>
-          <a:lstStyle/>
-          <a:p>
-            <a:pPr algn="r"/>
-            <a:r>
               <a:t>266</a:t>
             </a:r>
             <a:endParaRPr sz="1000" b="1">
@@ -5746,6 +5712,415 @@
                 </a:solidFill>
                 <a:latin typeface="Cambria"/>
               </a:rPr>
+              <a:t>Closing the Container + Aaronic Blessing</a:t>
+            </a:r>
+          </a:p>
+        </p:txBody>
+      </p:sp>
+      <p:sp>
+        <p:nvSpPr>
+          <p:cNvPr id="4" name="TextBox 4"/>
+          <p:cNvSpPr txBox="1"/>
+          <p:nvPr/>
+        </p:nvSpPr>
+        <p:spPr>
+          <a:xfrm>
+            <a:off x="822960" y="1600200"/>
+            <a:ext cx="5669280" cy="4572000"/>
+          </a:xfrm>
+          <a:prstGeom prst="rect">
+            <a:avLst/>
+          </a:prstGeom>
+          <a:noFill/>
+        </p:spPr>
+        <p:txBody>
+          <a:bodyPr wrap="square" lIns="91440" tIns="91440" rIns="91440" bIns="91440"/>
+          <a:lstStyle/>
+          <a:p>
+            <a:pPr marL="274320" indent="-274320">
+              <a:spcAft>
+                <a:spcPts val="900"/>
+              </a:spcAft>
+            </a:pPr>
+            <a:r>
+              <a:rPr sz="2200" b="1" i="0">
+                <a:solidFill>
+                  <a:srgbClr val="97BC62"/>
+                </a:solidFill>
+                <a:latin typeface="Calibri"/>
+              </a:rPr>
+              <a:t>•  </a:t>
+            </a:r>
+            <a:r>
+              <a:rPr sz="2200" b="0" i="0">
+                <a:solidFill>
+                  <a:srgbClr val="222B22"/>
+                </a:solidFill>
+                <a:latin typeface="Calibri"/>
+              </a:rPr>
+              <a:t>We close the way we opened — the container, six steps:</a:t>
+            </a:r>
+          </a:p>
+          <a:p>
+            <a:pPr marL="685800" indent="-274320">
+              <a:spcAft>
+                <a:spcPts val="700"/>
+              </a:spcAft>
+            </a:pPr>
+            <a:r>
+              <a:rPr sz="2000" b="1" i="0">
+                <a:solidFill>
+                  <a:srgbClr val="97BC62"/>
+                </a:solidFill>
+                <a:latin typeface="Calibri"/>
+              </a:rPr>
+              <a:t>1   </a:t>
+            </a:r>
+            <a:r>
+              <a:rPr sz="2000" b="0" i="0">
+                <a:solidFill>
+                  <a:srgbClr val="222B22"/>
+                </a:solidFill>
+                <a:latin typeface="Calibri"/>
+              </a:rPr>
+              <a:t>Stand again — same circle, same posture as the open</a:t>
+            </a:r>
+          </a:p>
+          <a:p>
+            <a:pPr marL="685800" indent="-274320">
+              <a:spcAft>
+                <a:spcPts val="700"/>
+              </a:spcAft>
+            </a:pPr>
+            <a:r>
+              <a:rPr sz="2000" b="1" i="0">
+                <a:solidFill>
+                  <a:srgbClr val="97BC62"/>
+                </a:solidFill>
+                <a:latin typeface="Calibri"/>
+              </a:rPr>
+              <a:t>2   </a:t>
+            </a:r>
+            <a:r>
+              <a:rPr sz="2000" b="0" i="0">
+                <a:solidFill>
+                  <a:srgbClr val="222B22"/>
+                </a:solidFill>
+                <a:latin typeface="Calibri"/>
+              </a:rPr>
+              <a:t>One-word landing — compare it to your opening word</a:t>
+            </a:r>
+          </a:p>
+          <a:p>
+            <a:pPr marL="685800" indent="-274320">
+              <a:spcAft>
+                <a:spcPts val="700"/>
+              </a:spcAft>
+            </a:pPr>
+            <a:r>
+              <a:rPr sz="2000" b="1" i="0">
+                <a:solidFill>
+                  <a:srgbClr val="97BC62"/>
+                </a:solidFill>
+                <a:latin typeface="Calibri"/>
+              </a:rPr>
+              <a:t>3   </a:t>
+            </a:r>
+            <a:r>
+              <a:rPr sz="2000" b="0" i="0">
+                <a:solidFill>
+                  <a:srgbClr val="222B22"/>
+                </a:solidFill>
+                <a:latin typeface="Calibri"/>
+              </a:rPr>
+              <a:t>The one thing you are taking from tonight</a:t>
+            </a:r>
+          </a:p>
+          <a:p>
+            <a:pPr marL="685800" indent="-274320">
+              <a:spcAft>
+                <a:spcPts val="700"/>
+              </a:spcAft>
+            </a:pPr>
+            <a:r>
+              <a:rPr sz="2000" b="1" i="0">
+                <a:solidFill>
+                  <a:srgbClr val="97BC62"/>
+                </a:solidFill>
+                <a:latin typeface="Calibri"/>
+              </a:rPr>
+              <a:t>4   </a:t>
+            </a:r>
+            <a:r>
+              <a:rPr sz="2000" b="0" i="0">
+                <a:solidFill>
+                  <a:srgbClr val="222B22"/>
+                </a:solidFill>
+                <a:latin typeface="Calibri"/>
+              </a:rPr>
+              <a:t>The one practice — committed aloud, or modified to one you will actually keep</a:t>
+            </a:r>
+          </a:p>
+          <a:p>
+            <a:pPr marL="685800" indent="-274320">
+              <a:spcAft>
+                <a:spcPts val="700"/>
+              </a:spcAft>
+            </a:pPr>
+            <a:r>
+              <a:rPr sz="2000" b="1" i="0">
+                <a:solidFill>
+                  <a:srgbClr val="97BC62"/>
+                </a:solidFill>
+                <a:latin typeface="Calibri"/>
+              </a:rPr>
+              <a:t>5   </a:t>
+            </a:r>
+            <a:r>
+              <a:rPr sz="2000" b="0" i="0">
+                <a:solidFill>
+                  <a:srgbClr val="222B22"/>
+                </a:solidFill>
+                <a:latin typeface="Calibri"/>
+              </a:rPr>
+              <a:t>Blessings — eyes on the person, not the screen: say what is on your heart for them. Specific, witnessed, short</a:t>
+            </a:r>
+          </a:p>
+          <a:p>
+            <a:pPr marL="685800" indent="-274320">
+              <a:spcAft>
+                <a:spcPts val="700"/>
+              </a:spcAft>
+            </a:pPr>
+            <a:r>
+              <a:rPr sz="2000" b="1" i="0">
+                <a:solidFill>
+                  <a:srgbClr val="97BC62"/>
+                </a:solidFill>
+                <a:latin typeface="Calibri"/>
+              </a:rPr>
+              <a:t>6   </a:t>
+            </a:r>
+            <a:r>
+              <a:rPr sz="2000" b="0" i="0">
+                <a:solidFill>
+                  <a:srgbClr val="222B22"/>
+                </a:solidFill>
+                <a:latin typeface="Calibri"/>
+              </a:rPr>
+              <a:t>Closing prayer — and the Aaronic blessing, spoken over each other, face to face</a:t>
+            </a:r>
+          </a:p>
+        </p:txBody>
+      </p:sp>
+      <p:sp>
+        <p:nvSpPr>
+          <p:cNvPr id="6" name="TextBox 6"/>
+          <p:cNvSpPr txBox="1"/>
+          <p:nvPr/>
+        </p:nvSpPr>
+        <p:spPr>
+          <a:xfrm>
+            <a:off x="6766560" y="1737360"/>
+            <a:ext cx="4663440" cy="2926080"/>
+          </a:xfrm>
+          <a:prstGeom prst="rect">
+            <a:avLst/>
+          </a:prstGeom>
+          <a:solidFill>
+            <a:srgbClr val="F1F6EC"/>
+          </a:solidFill>
+        </p:spPr>
+        <p:txBody>
+          <a:bodyPr wrap="square" lIns="91440" tIns="91440" rIns="91440" bIns="91440" anchor="ctr"/>
+          <a:lstStyle/>
+          <a:p>
+            <a:pPr>
+              <a:spcAft>
+                <a:spcPts val="900"/>
+              </a:spcAft>
+            </a:pPr>
+            <a:r>
+              <a:rPr sz="1200" b="1" i="0">
+                <a:solidFill>
+                  <a:srgbClr val="97BC62"/>
+                </a:solidFill>
+                <a:latin typeface="Calibri"/>
+              </a:rPr>
+              <a:t>THE AARONIC BLESSING — NUMBERS 6:24–26</a:t>
+            </a:r>
+          </a:p>
+          <a:p>
+            <a:pPr>
+              <a:spcAft>
+                <a:spcPts val="600"/>
+              </a:spcAft>
+            </a:pPr>
+            <a:r>
+              <a:rPr sz="2400" b="0" i="1">
+                <a:solidFill>
+                  <a:srgbClr val="222B22"/>
+                </a:solidFill>
+                <a:latin typeface="Cambria"/>
+              </a:rPr>
+              <a:t>“The Lord bless you and keep you;</a:t>
+            </a:r>
+          </a:p>
+          <a:p>
+            <a:pPr>
+              <a:spcAft>
+                <a:spcPts val="600"/>
+              </a:spcAft>
+            </a:pPr>
+            <a:r>
+              <a:rPr sz="2400" b="0" i="1">
+                <a:solidFill>
+                  <a:srgbClr val="222B22"/>
+                </a:solidFill>
+                <a:latin typeface="Cambria"/>
+              </a:rPr>
+              <a:t>the Lord make his face to shine upon you, and be gracious to you;</a:t>
+            </a:r>
+          </a:p>
+          <a:p>
+            <a:pPr>
+              <a:spcAft>
+                <a:spcPts val="600"/>
+              </a:spcAft>
+            </a:pPr>
+            <a:r>
+              <a:rPr sz="2400" b="0" i="1">
+                <a:solidFill>
+                  <a:srgbClr val="222B22"/>
+                </a:solidFill>
+                <a:latin typeface="Cambria"/>
+              </a:rPr>
+              <a:t>the Lord lift up his countenance upon you, and give you peace.”</a:t>
+            </a:r>
+          </a:p>
+        </p:txBody>
+      </p:sp>
+      <p:sp>
+        <p:nvSpPr>
+          <p:cNvPr id="90" name="SlideNum"/>
+          <p:cNvSpPr txBox="1"/>
+          <p:nvPr/>
+        </p:nvSpPr>
+        <p:spPr>
+          <a:xfrm>
+            <a:off x="11384280" y="6446520"/>
+            <a:ext cx="640080" cy="292608"/>
+          </a:xfrm>
+          <a:prstGeom prst="rect">
+            <a:avLst/>
+          </a:prstGeom>
+          <a:noFill/>
+        </p:spPr>
+        <p:txBody>
+          <a:bodyPr wrap="none" lIns="0" tIns="0" rIns="45720" bIns="0" anchor="ctr"/>
+          <a:lstStyle/>
+          <a:p>
+            <a:pPr algn="r"/>
+            <a:r>
+              <a:t>267</a:t>
+            </a:r>
+            <a:endParaRPr sz="1000" b="1">
+              <a:solidFill>
+                <a:srgbClr val="7A8A6E"/>
+              </a:solidFill>
+              <a:latin typeface="Calibri"/>
+            </a:endParaRPr>
+          </a:p>
+        </p:txBody>
+      </p:sp>
+    </p:spTree>
+  </p:cSld>
+  <p:clrMapOvr>
+    <a:masterClrMapping/>
+  </p:clrMapOvr>
+</p:sld>
+</file>
+
+<file path=ppt/slides/slide14.xml><?xml version="1.0" encoding="utf-8"?>
+<p:sld xmlns:a="http://schemas.openxmlformats.org/drawingml/2006/main" xmlns:r="http://schemas.openxmlformats.org/officeDocument/2006/relationships" xmlns:p="http://schemas.openxmlformats.org/presentationml/2006/main">
+  <p:cSld>
+    <p:spTree>
+      <p:nvGrpSpPr>
+        <p:cNvPr id="1" name=""/>
+        <p:cNvGrpSpPr/>
+        <p:nvPr/>
+      </p:nvGrpSpPr>
+      <p:grpSpPr>
+        <a:xfrm>
+          <a:off x="0" y="0"/>
+          <a:ext cx="0" cy="0"/>
+          <a:chOff x="0" y="0"/>
+          <a:chExt cx="0" cy="0"/>
+        </a:xfrm>
+      </p:grpSpPr>
+      <p:sp>
+        <p:nvSpPr>
+          <p:cNvPr id="2" name="Rectangle 1"/>
+          <p:cNvSpPr/>
+          <p:nvPr/>
+        </p:nvSpPr>
+        <p:spPr>
+          <a:xfrm>
+            <a:off x="0" y="0"/>
+            <a:ext cx="12191695" cy="6858000"/>
+          </a:xfrm>
+          <a:prstGeom prst="rect">
+            <a:avLst/>
+          </a:prstGeom>
+          <a:solidFill>
+            <a:srgbClr val="FFFFFF"/>
+          </a:solidFill>
+          <a:ln>
+            <a:noFill/>
+          </a:ln>
+        </p:spPr>
+        <p:txBody>
+          <a:bodyPr/>
+          <a:lstStyle/>
+          <a:p>
+            <a:endParaRPr/>
+          </a:p>
+        </p:txBody>
+      </p:sp>
+      <p:sp>
+        <p:nvSpPr>
+          <p:cNvPr id="3" name="TextBox 2"/>
+          <p:cNvSpPr txBox="1"/>
+          <p:nvPr/>
+        </p:nvSpPr>
+        <p:spPr>
+          <a:xfrm>
+            <a:off x="822960" y="502920"/>
+            <a:ext cx="10515600" cy="822960"/>
+          </a:xfrm>
+          <a:prstGeom prst="rect">
+            <a:avLst/>
+          </a:prstGeom>
+          <a:noFill/>
+        </p:spPr>
+        <p:txBody>
+          <a:bodyPr wrap="square">
+            <a:spAutoFit/>
+          </a:bodyPr>
+          <a:lstStyle/>
+          <a:p>
+            <a:pPr algn="l">
+              <a:spcAft>
+                <a:spcPts val="600"/>
+              </a:spcAft>
+            </a:pPr>
+            <a:r>
+              <a:rPr sz="2800" b="1" i="0">
+                <a:solidFill>
+                  <a:srgbClr val="2C5F2D"/>
+                </a:solidFill>
+                <a:latin typeface="Cambria"/>
+              </a:rPr>
               <a:t>The Leader Feedback Round</a:t>
             </a:r>
           </a:p>
@@ -5944,7 +6319,7 @@
           <a:p>
             <a:pPr algn="r"/>
             <a:r>
-              <a:t>267</a:t>
+              <a:t>268</a:t>
             </a:r>
             <a:endParaRPr sz="1000" b="1">
               <a:solidFill>
@@ -5999,7 +6374,7 @@
 </p:sld>
 </file>
 
-<file path=ppt/slides/slide14.xml><?xml version="1.0" encoding="utf-8"?>
+<file path=ppt/slides/slide15.xml><?xml version="1.0" encoding="utf-8"?>
 <p:sld xmlns:a="http://schemas.openxmlformats.org/drawingml/2006/main" xmlns:r="http://schemas.openxmlformats.org/officeDocument/2006/relationships" xmlns:p="http://schemas.openxmlformats.org/presentationml/2006/main">
   <p:cSld>
     <p:spTree>
@@ -6257,7 +6632,7 @@
           <a:p>
             <a:pPr algn="r"/>
             <a:r>
-              <a:t>268</a:t>
+              <a:t>269</a:t>
             </a:r>
             <a:endParaRPr sz="1000" b="1">
               <a:solidFill>
@@ -6859,7 +7234,7 @@
               </a:spcAft>
             </a:pPr>
             <a:r>
-              <a:rPr sz="2800" b="1">
+              <a:rPr sz="2400" b="1">
                 <a:solidFill>
                   <a:srgbClr val="97BC62"/>
                 </a:solidFill>
@@ -6868,7 +7243,7 @@
               <a:t>1   </a:t>
             </a:r>
             <a:r>
-              <a:rPr sz="2800">
+              <a:rPr sz="2400">
                 <a:solidFill>
                   <a:srgbClr val="222B22"/>
                 </a:solidFill>
@@ -6884,7 +7259,7 @@
               </a:spcAft>
             </a:pPr>
             <a:r>
-              <a:rPr sz="2800" b="1">
+              <a:rPr sz="2400" b="1">
                 <a:solidFill>
                   <a:srgbClr val="97BC62"/>
                 </a:solidFill>
@@ -6893,7 +7268,7 @@
               <a:t>2   </a:t>
             </a:r>
             <a:r>
-              <a:rPr sz="2800">
+              <a:rPr sz="2400">
                 <a:solidFill>
                   <a:srgbClr val="222B22"/>
                 </a:solidFill>
@@ -6909,7 +7284,7 @@
               </a:spcAft>
             </a:pPr>
             <a:r>
-              <a:rPr sz="2800" b="1">
+              <a:rPr sz="2400" b="1">
                 <a:solidFill>
                   <a:srgbClr val="97BC62"/>
                 </a:solidFill>
@@ -6918,7 +7293,7 @@
               <a:t>3   </a:t>
             </a:r>
             <a:r>
-              <a:rPr sz="2800">
+              <a:rPr sz="2400">
                 <a:solidFill>
                   <a:srgbClr val="222B22"/>
                 </a:solidFill>
@@ -6934,7 +7309,7 @@
               </a:spcAft>
             </a:pPr>
             <a:r>
-              <a:rPr sz="2800" b="1">
+              <a:rPr sz="2400" b="1">
                 <a:solidFill>
                   <a:srgbClr val="97BC62"/>
                 </a:solidFill>
@@ -6943,7 +7318,7 @@
               <a:t>4   </a:t>
             </a:r>
             <a:r>
-              <a:rPr sz="2800">
+              <a:rPr sz="2400">
                 <a:solidFill>
                   <a:srgbClr val="222B22"/>
                 </a:solidFill>
@@ -6959,7 +7334,7 @@
               </a:spcAft>
             </a:pPr>
             <a:r>
-              <a:rPr sz="2800" b="1">
+              <a:rPr sz="2400" b="1">
                 <a:solidFill>
                   <a:srgbClr val="97BC62"/>
                 </a:solidFill>
@@ -6968,13 +7343,13 @@
               <a:t>5   </a:t>
             </a:r>
             <a:r>
-              <a:rPr sz="2800">
+              <a:rPr sz="2400">
                 <a:solidFill>
                   <a:srgbClr val="222B22"/>
                 </a:solidFill>
                 <a:latin typeface="Calibri"/>
               </a:rPr>
-              <a:t>Homework commissioning — handout + check-in partners</a:t>
+              <a:t>Ready, and not yet</a:t>
             </a:r>
           </a:p>
           <a:p>
@@ -6984,7 +7359,7 @@
               </a:spcAft>
             </a:pPr>
             <a:r>
-              <a:rPr sz="2800" b="1">
+              <a:rPr sz="2400" b="1">
                 <a:solidFill>
                   <a:srgbClr val="97BC62"/>
                 </a:solidFill>
@@ -6993,13 +7368,13 @@
               <a:t>6   </a:t>
             </a:r>
             <a:r>
-              <a:rPr sz="2800">
+              <a:rPr sz="2400">
                 <a:solidFill>
                   <a:srgbClr val="222B22"/>
                 </a:solidFill>
                 <a:latin typeface="Calibri"/>
               </a:rPr>
-              <a:t>Closing container</a:t>
+              <a:t>Homework — handout + check-in partners</a:t>
             </a:r>
           </a:p>
           <a:p>
@@ -7009,7 +7384,7 @@
               </a:spcAft>
             </a:pPr>
             <a:r>
-              <a:rPr sz="2800" b="1">
+              <a:rPr sz="2400" b="1">
                 <a:solidFill>
                   <a:srgbClr val="97BC62"/>
                 </a:solidFill>
@@ -7018,13 +7393,13 @@
               <a:t>7   </a:t>
             </a:r>
             <a:r>
-              <a:rPr sz="2800">
+              <a:rPr sz="2400">
                 <a:solidFill>
                   <a:srgbClr val="222B22"/>
                 </a:solidFill>
                 <a:latin typeface="Calibri"/>
               </a:rPr>
-              <a:t>Leader Feedback Round</a:t>
+              <a:t>Closing container</a:t>
             </a:r>
           </a:p>
           <a:p>
@@ -7034,7 +7409,7 @@
               </a:spcAft>
             </a:pPr>
             <a:r>
-              <a:rPr sz="2800" b="1">
+              <a:rPr sz="2400" b="1">
                 <a:solidFill>
                   <a:srgbClr val="97BC62"/>
                 </a:solidFill>
@@ -7043,7 +7418,32 @@
               <a:t>8   </a:t>
             </a:r>
             <a:r>
-              <a:rPr sz="2800">
+              <a:rPr sz="2400">
+                <a:solidFill>
+                  <a:srgbClr val="222B22"/>
+                </a:solidFill>
+                <a:latin typeface="Calibri"/>
+              </a:rPr>
+              <a:t>Leader Feedback Round</a:t>
+            </a:r>
+          </a:p>
+          <a:p>
+            <a:pPr>
+              <a:spcAft>
+                <a:spcPts val="800"/>
+              </a:spcAft>
+            </a:pPr>
+            <a:r>
+              <a:rPr sz="2400" b="1">
+                <a:solidFill>
+                  <a:srgbClr val="97BC62"/>
+                </a:solidFill>
+                <a:latin typeface="Calibri"/>
+              </a:rPr>
+              <a:t>9   </a:t>
+            </a:r>
+            <a:r>
+              <a:rPr sz="2400">
                 <a:solidFill>
                   <a:srgbClr val="222B22"/>
                 </a:solidFill>
@@ -8433,7 +8833,7 @@
 </file>
 
 <file path=ppt/slides/slide9.xml><?xml version="1.0" encoding="utf-8"?>
-<p:sld xmlns:a="http://schemas.openxmlformats.org/drawingml/2006/main" xmlns:r="http://schemas.openxmlformats.org/officeDocument/2006/relationships" xmlns:p="http://schemas.openxmlformats.org/presentationml/2006/main">
+<p:sld xmlns:a="http://schemas.openxmlformats.org/drawingml/2006/main" xmlns:p="http://schemas.openxmlformats.org/presentationml/2006/main" xmlns:r="http://schemas.openxmlformats.org/officeDocument/2006/relationships">
   <p:cSld>
     <p:spTree>
       <p:nvGrpSpPr>
@@ -8441,14 +8841,7 @@
         <p:cNvGrpSpPr/>
         <p:nvPr/>
       </p:nvGrpSpPr>
-      <p:grpSpPr>
-        <a:xfrm>
-          <a:off x="0" y="0"/>
-          <a:ext cx="0" cy="0"/>
-          <a:chOff x="0" y="0"/>
-          <a:chExt cx="0" cy="0"/>
-        </a:xfrm>
-      </p:grpSpPr>
+      <p:grpSpPr/>
       <p:sp>
         <p:nvSpPr>
           <p:cNvPr id="2" name="Rectangle 1"/>
@@ -8512,7 +8905,7 @@
                 </a:solidFill>
                 <a:latin typeface="Cambria"/>
               </a:rPr>
-              <a:t>Homework — Two Weeks, Four Parts</a:t>
+              <a:t>Ready, and Not Yet</a:t>
             </a:r>
           </a:p>
         </p:txBody>
@@ -8526,7 +8919,7 @@
         <p:spPr>
           <a:xfrm>
             <a:off x="822960" y="1554480"/>
-            <a:ext cx="6675120" cy="4892040"/>
+            <a:ext cx="10515600" cy="4892040"/>
           </a:xfrm>
           <a:prstGeom prst="rect">
             <a:avLst/>
@@ -8537,9 +8930,84 @@
           <a:bodyPr wrap="square" lIns="91440" tIns="91440" rIns="91440" bIns="91440"/>
           <a:lstStyle/>
           <a:p>
+            <a:pPr marL="342900" indent="-342900">
+              <a:spcAft>
+                <a:spcPts val="750"/>
+              </a:spcAft>
+            </a:pPr>
+            <a:r>
+              <a:rPr sz="2200" b="1" i="0">
+                <a:solidFill>
+                  <a:srgbClr val="97BC62"/>
+                </a:solidFill>
+                <a:latin typeface="Calibri"/>
+              </a:rPr>
+              <a:t>1   </a:t>
+            </a:r>
+            <a:r>
+              <a:rPr sz="2200" b="0" i="0">
+                <a:solidFill>
+                  <a:srgbClr val="222B22"/>
+                </a:solidFill>
+                <a:latin typeface="Calibri"/>
+              </a:rPr>
+              <a:t>Write (3 min): What can I do now, on my own, that I couldn’t when we started?</a:t>
+            </a:r>
+          </a:p>
+          <a:p>
+            <a:pPr marL="342900" indent="-342900">
+              <a:spcAft>
+                <a:spcPts val="750"/>
+              </a:spcAft>
+            </a:pPr>
+            <a:r>
+              <a:rPr sz="2200" b="1" i="0">
+                <a:solidFill>
+                  <a:srgbClr val="97BC62"/>
+                </a:solidFill>
+                <a:latin typeface="Calibri"/>
+              </a:rPr>
+              <a:t>2   </a:t>
+            </a:r>
+            <a:r>
+              <a:rPr sz="2200" b="0" i="0">
+                <a:solidFill>
+                  <a:srgbClr val="222B22"/>
+                </a:solidFill>
+                <a:latin typeface="Calibri"/>
+              </a:rPr>
+              <a:t>Where do I still need someone beside me — a parent, an adult, this group?</a:t>
+            </a:r>
+          </a:p>
+          <a:p>
+            <a:pPr marL="342900" indent="-342900">
+              <a:spcAft>
+                <a:spcPts val="750"/>
+              </a:spcAft>
+            </a:pPr>
+            <a:r>
+              <a:rPr sz="2200" b="1" i="0">
+                <a:solidFill>
+                  <a:srgbClr val="97BC62"/>
+                </a:solidFill>
+                <a:latin typeface="Calibri"/>
+              </a:rPr>
+              <a:t>3   </a:t>
+            </a:r>
+            <a:r>
+              <a:rPr sz="2200" b="0" i="0">
+                <a:solidFill>
+                  <a:srgbClr val="222B22"/>
+                </a:solidFill>
+                <a:latin typeface="Calibri"/>
+              </a:rPr>
+              <a:t>What would help me move one “not yet” toward ready before we are sent?</a:t>
+            </a:r>
+          </a:p>
+          <a:p>
             <a:pPr marL="274320" indent="-274320">
               <a:spcAft>
-                <a:spcPts val="900"/>
+                <a:spcPts val="750"/>
               </a:spcAft>
             </a:pPr>
             <a:r>
@@ -8558,13 +9026,13 @@
                 </a:solidFill>
                 <a:latin typeface="Calibri"/>
               </a:rPr>
-              <a:t>Run your Rhythm Card as built — nothing new, nothing extra; if the break knocked a piece loose, begin again on the next available day</a:t>
+              <a:t>Pairs within families (6 min): the parent answers first. Then the parent names one place they see their teen ready, and one place they still want to walk beside them</a:t>
             </a:r>
           </a:p>
           <a:p>
             <a:pPr marL="274320" indent="-274320">
               <a:spcAft>
-                <a:spcPts val="900"/>
+                <a:spcPts val="750"/>
               </a:spcAft>
             </a:pPr>
             <a:r>
@@ -8583,13 +9051,13 @@
                 </a:solidFill>
                 <a:latin typeface="Calibri"/>
               </a:rPr>
-              <a:t>The evening note, one extra flavor: note where you see God already handing pieces of this year over to you</a:t>
+              <a:t>Room round (3 min): one “ready” each, out loud. The “not yets” stay in the pair</a:t>
             </a:r>
           </a:p>
           <a:p>
             <a:pPr marL="274320" indent="-274320">
               <a:spcAft>
-                <a:spcPts val="900"/>
+                <a:spcPts val="750"/>
               </a:spcAft>
             </a:pPr>
             <a:r>
@@ -8608,32 +9076,7 @@
                 </a:solidFill>
                 <a:latin typeface="Calibri"/>
               </a:rPr>
-              <a:t>For the parents, said once: the Four Questions door is still open — willing-only, whenever the moment is right; nobody will ever check. The questions keep</a:t>
-            </a:r>
-          </a:p>
-          <a:p>
-            <a:pPr marL="274320" indent="-274320">
-              <a:spcAft>
-                <a:spcPts val="900"/>
-              </a:spcAft>
-            </a:pPr>
-            <a:r>
-              <a:rPr sz="2200" b="1" i="0">
-                <a:solidFill>
-                  <a:srgbClr val="97BC62"/>
-                </a:solidFill>
-                <a:latin typeface="Calibri"/>
-              </a:rPr>
-              <a:t>•  </a:t>
-            </a:r>
-            <a:r>
-              <a:rPr sz="2200" b="0" i="0">
-                <a:solidFill>
-                  <a:srgbClr val="222B22"/>
-                </a:solidFill>
-                <a:latin typeface="Calibri"/>
-              </a:rPr>
-              <a:t>Bring your journal — and put Evening 16's two hours on the calendar tonight</a:t>
+              <a:t>“Not yet” is an honest answer, not a failure</a:t>
             </a:r>
           </a:p>
         </p:txBody>
@@ -8671,42 +9114,6 @@
           </a:p>
         </p:txBody>
       </p:sp>
-      <p:pic>
-        <p:nvPicPr>
-          <p:cNvPr id="33" name="Picture 33" descr="seedling - what grows between Wednesdays"/>
-          <p:cNvPicPr>
-            <a:picLocks noChangeAspect="1"/>
-          </p:cNvPicPr>
-          <p:nvPr/>
-        </p:nvPicPr>
-        <p:blipFill>
-          <a:blip r:embed="rId3"/>
-          <a:stretch>
-            <a:fillRect/>
-          </a:stretch>
-        </p:blipFill>
-        <p:spPr>
-          <a:xfrm>
-            <a:off x="8103612" y="1463040"/>
-            <a:ext cx="3262379" cy="4892040"/>
-          </a:xfrm>
-          <a:prstGeom prst="rect">
-            <a:avLst/>
-          </a:prstGeom>
-          <a:ln w="76200">
-            <a:solidFill>
-              <a:srgbClr val="FFFFFF"/>
-            </a:solidFill>
-          </a:ln>
-          <a:effectLst>
-            <a:outerShdw blurRad="63500" dist="25400" dir="5400000" rotWithShape="0">
-              <a:srgbClr val="000000">
-                <a:alpha val="35000"/>
-              </a:srgbClr>
-            </a:outerShdw>
-          </a:effectLst>
-        </p:spPr>
-      </p:pic>
     </p:spTree>
   </p:cSld>
   <p:clrMapOvr>
